--- a/20243/Part 1-Introduction/Introduction to Data Mining.pptx
+++ b/20243/Part 1-Introduction/Introduction to Data Mining.pptx
@@ -6,35 +6,36 @@
   </p:sldMasterIdLst>
   <p:sldIdLst>
     <p:sldId id="455" r:id="rId5"/>
-    <p:sldId id="257" r:id="rId6"/>
-    <p:sldId id="258" r:id="rId7"/>
-    <p:sldId id="265" r:id="rId8"/>
-    <p:sldId id="261" r:id="rId9"/>
-    <p:sldId id="264" r:id="rId10"/>
-    <p:sldId id="262" r:id="rId11"/>
-    <p:sldId id="263" r:id="rId12"/>
-    <p:sldId id="268" r:id="rId13"/>
-    <p:sldId id="462" r:id="rId14"/>
-    <p:sldId id="266" r:id="rId15"/>
-    <p:sldId id="267" r:id="rId16"/>
-    <p:sldId id="463" r:id="rId17"/>
-    <p:sldId id="271" r:id="rId18"/>
-    <p:sldId id="269" r:id="rId19"/>
-    <p:sldId id="464" r:id="rId20"/>
-    <p:sldId id="270" r:id="rId21"/>
-    <p:sldId id="272" r:id="rId22"/>
-    <p:sldId id="465" r:id="rId23"/>
-    <p:sldId id="273" r:id="rId24"/>
-    <p:sldId id="274" r:id="rId25"/>
-    <p:sldId id="460" r:id="rId26"/>
-    <p:sldId id="275" r:id="rId27"/>
-    <p:sldId id="276" r:id="rId28"/>
-    <p:sldId id="461" r:id="rId29"/>
-    <p:sldId id="280" r:id="rId30"/>
-    <p:sldId id="277" r:id="rId31"/>
-    <p:sldId id="281" r:id="rId32"/>
-    <p:sldId id="282" r:id="rId33"/>
-    <p:sldId id="284" r:id="rId34"/>
+    <p:sldId id="485" r:id="rId6"/>
+    <p:sldId id="257" r:id="rId7"/>
+    <p:sldId id="258" r:id="rId8"/>
+    <p:sldId id="265" r:id="rId9"/>
+    <p:sldId id="261" r:id="rId10"/>
+    <p:sldId id="264" r:id="rId11"/>
+    <p:sldId id="262" r:id="rId12"/>
+    <p:sldId id="263" r:id="rId13"/>
+    <p:sldId id="268" r:id="rId14"/>
+    <p:sldId id="462" r:id="rId15"/>
+    <p:sldId id="266" r:id="rId16"/>
+    <p:sldId id="267" r:id="rId17"/>
+    <p:sldId id="463" r:id="rId18"/>
+    <p:sldId id="271" r:id="rId19"/>
+    <p:sldId id="269" r:id="rId20"/>
+    <p:sldId id="464" r:id="rId21"/>
+    <p:sldId id="270" r:id="rId22"/>
+    <p:sldId id="272" r:id="rId23"/>
+    <p:sldId id="465" r:id="rId24"/>
+    <p:sldId id="273" r:id="rId25"/>
+    <p:sldId id="274" r:id="rId26"/>
+    <p:sldId id="460" r:id="rId27"/>
+    <p:sldId id="275" r:id="rId28"/>
+    <p:sldId id="276" r:id="rId29"/>
+    <p:sldId id="461" r:id="rId30"/>
+    <p:sldId id="280" r:id="rId31"/>
+    <p:sldId id="277" r:id="rId32"/>
+    <p:sldId id="281" r:id="rId33"/>
+    <p:sldId id="282" r:id="rId34"/>
+    <p:sldId id="284" r:id="rId35"/>
   </p:sldIdLst>
   <p:sldSz cx="12192000" cy="6858000"/>
   <p:notesSz cx="6858000" cy="9144000"/>
@@ -144,7 +145,7 @@
 <file path=ppt/revisionInfo.xml><?xml version="1.0" encoding="utf-8"?>
 <p1510:revInfo xmlns:a="http://schemas.openxmlformats.org/drawingml/2006/main" xmlns:r="http://schemas.openxmlformats.org/officeDocument/2006/relationships" xmlns:p1510="http://schemas.microsoft.com/office/powerpoint/2015/10/main">
   <p1510:revLst>
-    <p1510:client id="{D1859E10-E91F-4CD4-B9AD-657F2116AC8C}" v="1" dt="2024-11-09T05:23:04.312"/>
+    <p1510:client id="{FEA592C4-A881-BCBA-C373-5668A186DED4}" v="8" dt="2025-07-24T07:58:00.722"/>
   </p1510:revLst>
 </p1510:revInfo>
 </file>
@@ -164,22 +165,6 @@
           <pc:docMk/>
           <pc:sldMasterMk cId="2573801746" sldId="2147483648"/>
         </pc:sldMasterMkLst>
-        <pc:picChg chg="del">
-          <ac:chgData name="Mohammed Fasha" userId="cc64f42d-a1a6-4f08-b97b-0c37f877119f" providerId="ADAL" clId="{D1859E10-E91F-4CD4-B9AD-657F2116AC8C}" dt="2024-11-09T05:23:03.092" v="0" actId="478"/>
-          <ac:picMkLst>
-            <pc:docMk/>
-            <pc:sldMasterMk cId="2573801746" sldId="2147483648"/>
-            <ac:picMk id="8" creationId="{209681C8-34CA-ECC5-8356-8F92339C24DA}"/>
-          </ac:picMkLst>
-        </pc:picChg>
-        <pc:picChg chg="add mod">
-          <ac:chgData name="Mohammed Fasha" userId="cc64f42d-a1a6-4f08-b97b-0c37f877119f" providerId="ADAL" clId="{D1859E10-E91F-4CD4-B9AD-657F2116AC8C}" dt="2024-11-09T05:23:14.444" v="3" actId="1076"/>
-          <ac:picMkLst>
-            <pc:docMk/>
-            <pc:sldMasterMk cId="2573801746" sldId="2147483648"/>
-            <ac:picMk id="10" creationId="{60C727CE-6255-82CB-CFCB-7738B389789F}"/>
-          </ac:picMkLst>
-        </pc:picChg>
       </pc:sldMasterChg>
     </pc:docChg>
   </pc:docChgLst>
@@ -196,14 +181,6 @@
           <pc:docMk/>
           <pc:sldMk cId="706735111" sldId="258"/>
         </pc:sldMkLst>
-        <pc:picChg chg="mod">
-          <ac:chgData name="Mohammed Fasha" userId="cc64f42d-a1a6-4f08-b97b-0c37f877119f" providerId="ADAL" clId="{D3520BFC-89CF-4CB5-8BC6-02854ED6C636}" dt="2024-10-16T09:27:15.806" v="128" actId="1076"/>
-          <ac:picMkLst>
-            <pc:docMk/>
-            <pc:sldMk cId="706735111" sldId="258"/>
-            <ac:picMk id="2050" creationId="{AA68ACC8-5427-41F6-A099-9DE9A9BF7361}"/>
-          </ac:picMkLst>
-        </pc:picChg>
       </pc:sldChg>
       <pc:sldChg chg="modSp mod">
         <pc:chgData name="Mohammed Fasha" userId="cc64f42d-a1a6-4f08-b97b-0c37f877119f" providerId="ADAL" clId="{D3520BFC-89CF-4CB5-8BC6-02854ED6C636}" dt="2024-10-16T09:44:32.790" v="325" actId="27636"/>
@@ -211,14 +188,6 @@
           <pc:docMk/>
           <pc:sldMk cId="4289469650" sldId="261"/>
         </pc:sldMkLst>
-        <pc:spChg chg="mod">
-          <ac:chgData name="Mohammed Fasha" userId="cc64f42d-a1a6-4f08-b97b-0c37f877119f" providerId="ADAL" clId="{D3520BFC-89CF-4CB5-8BC6-02854ED6C636}" dt="2024-10-16T09:44:32.790" v="325" actId="27636"/>
-          <ac:spMkLst>
-            <pc:docMk/>
-            <pc:sldMk cId="4289469650" sldId="261"/>
-            <ac:spMk id="3" creationId="{21FF2A87-8E89-4813-8BC6-A1CA52285D72}"/>
-          </ac:spMkLst>
-        </pc:spChg>
       </pc:sldChg>
       <pc:sldChg chg="addSp delSp modSp mod">
         <pc:chgData name="Mohammed Fasha" userId="cc64f42d-a1a6-4f08-b97b-0c37f877119f" providerId="ADAL" clId="{D3520BFC-89CF-4CB5-8BC6-02854ED6C636}" dt="2024-10-16T09:28:12.841" v="142" actId="1076"/>
@@ -226,38 +195,6 @@
           <pc:docMk/>
           <pc:sldMk cId="4130133658" sldId="262"/>
         </pc:sldMkLst>
-        <pc:spChg chg="add del mod">
-          <ac:chgData name="Mohammed Fasha" userId="cc64f42d-a1a6-4f08-b97b-0c37f877119f" providerId="ADAL" clId="{D3520BFC-89CF-4CB5-8BC6-02854ED6C636}" dt="2024-10-16T09:28:04.661" v="138" actId="478"/>
-          <ac:spMkLst>
-            <pc:docMk/>
-            <pc:sldMk cId="4130133658" sldId="262"/>
-            <ac:spMk id="3" creationId="{74892189-FD47-7286-3EE7-AE4ADB72D501}"/>
-          </ac:spMkLst>
-        </pc:spChg>
-        <pc:spChg chg="del mod">
-          <ac:chgData name="Mohammed Fasha" userId="cc64f42d-a1a6-4f08-b97b-0c37f877119f" providerId="ADAL" clId="{D3520BFC-89CF-4CB5-8BC6-02854ED6C636}" dt="2024-10-16T09:28:02.340" v="137" actId="478"/>
-          <ac:spMkLst>
-            <pc:docMk/>
-            <pc:sldMk cId="4130133658" sldId="262"/>
-            <ac:spMk id="5" creationId="{6897A2DA-C13C-4666-9469-D4969E1A0D04}"/>
-          </ac:spMkLst>
-        </pc:spChg>
-        <pc:spChg chg="add mod">
-          <ac:chgData name="Mohammed Fasha" userId="cc64f42d-a1a6-4f08-b97b-0c37f877119f" providerId="ADAL" clId="{D3520BFC-89CF-4CB5-8BC6-02854ED6C636}" dt="2024-10-16T09:28:05.536" v="139"/>
-          <ac:spMkLst>
-            <pc:docMk/>
-            <pc:sldMk cId="4130133658" sldId="262"/>
-            <ac:spMk id="6" creationId="{A1996B11-77EA-699A-085A-576D7E645E9D}"/>
-          </ac:spMkLst>
-        </pc:spChg>
-        <pc:picChg chg="mod">
-          <ac:chgData name="Mohammed Fasha" userId="cc64f42d-a1a6-4f08-b97b-0c37f877119f" providerId="ADAL" clId="{D3520BFC-89CF-4CB5-8BC6-02854ED6C636}" dt="2024-10-16T09:28:12.841" v="142" actId="1076"/>
-          <ac:picMkLst>
-            <pc:docMk/>
-            <pc:sldMk cId="4130133658" sldId="262"/>
-            <ac:picMk id="4" creationId="{4D1A933D-0C9F-4D19-BACA-5A1F0B3554E9}"/>
-          </ac:picMkLst>
-        </pc:picChg>
       </pc:sldChg>
       <pc:sldChg chg="addSp delSp modSp mod chgLayout">
         <pc:chgData name="Mohammed Fasha" userId="cc64f42d-a1a6-4f08-b97b-0c37f877119f" providerId="ADAL" clId="{D3520BFC-89CF-4CB5-8BC6-02854ED6C636}" dt="2024-10-16T09:43:01.102" v="281" actId="14100"/>
@@ -265,46 +202,6 @@
           <pc:docMk/>
           <pc:sldMk cId="2611575643" sldId="264"/>
         </pc:sldMkLst>
-        <pc:spChg chg="mod ord">
-          <ac:chgData name="Mohammed Fasha" userId="cc64f42d-a1a6-4f08-b97b-0c37f877119f" providerId="ADAL" clId="{D3520BFC-89CF-4CB5-8BC6-02854ED6C636}" dt="2024-10-16T09:42:31.476" v="270" actId="27636"/>
-          <ac:spMkLst>
-            <pc:docMk/>
-            <pc:sldMk cId="2611575643" sldId="264"/>
-            <ac:spMk id="2" creationId="{9288F61D-F3F3-4CF5-8002-3AC25EDB8819}"/>
-          </ac:spMkLst>
-        </pc:spChg>
-        <pc:spChg chg="add del">
-          <ac:chgData name="Mohammed Fasha" userId="cc64f42d-a1a6-4f08-b97b-0c37f877119f" providerId="ADAL" clId="{D3520BFC-89CF-4CB5-8BC6-02854ED6C636}" dt="2024-10-16T09:42:27.687" v="268" actId="22"/>
-          <ac:spMkLst>
-            <pc:docMk/>
-            <pc:sldMk cId="2611575643" sldId="264"/>
-            <ac:spMk id="4" creationId="{DCC2B062-4C2F-F377-C3B3-0E41084773A5}"/>
-          </ac:spMkLst>
-        </pc:spChg>
-        <pc:spChg chg="mod ord">
-          <ac:chgData name="Mohammed Fasha" userId="cc64f42d-a1a6-4f08-b97b-0c37f877119f" providerId="ADAL" clId="{D3520BFC-89CF-4CB5-8BC6-02854ED6C636}" dt="2024-10-16T09:42:31.461" v="269" actId="700"/>
-          <ac:spMkLst>
-            <pc:docMk/>
-            <pc:sldMk cId="2611575643" sldId="264"/>
-            <ac:spMk id="6" creationId="{DDFDCA3F-8817-43C9-BFB7-2CB99B29E1D4}"/>
-          </ac:spMkLst>
-        </pc:spChg>
-        <pc:spChg chg="add del mod">
-          <ac:chgData name="Mohammed Fasha" userId="cc64f42d-a1a6-4f08-b97b-0c37f877119f" providerId="ADAL" clId="{D3520BFC-89CF-4CB5-8BC6-02854ED6C636}" dt="2024-10-16T09:42:50.782" v="276" actId="478"/>
-          <ac:spMkLst>
-            <pc:docMk/>
-            <pc:sldMk cId="2611575643" sldId="264"/>
-            <ac:spMk id="8" creationId="{45F0D5E2-39EA-D66A-C11E-8303825DD134}"/>
-          </ac:spMkLst>
-        </pc:spChg>
-        <pc:spChg chg="add mod">
-          <ac:chgData name="Mohammed Fasha" userId="cc64f42d-a1a6-4f08-b97b-0c37f877119f" providerId="ADAL" clId="{D3520BFC-89CF-4CB5-8BC6-02854ED6C636}" dt="2024-10-16T09:43:01.102" v="281" actId="14100"/>
-          <ac:spMkLst>
-            <pc:docMk/>
-            <pc:sldMk cId="2611575643" sldId="264"/>
-            <ac:spMk id="9" creationId="{DD0EC4CA-3C2B-AE2D-B29C-3838895FBB9B}"/>
-          </ac:spMkLst>
-        </pc:spChg>
       </pc:sldChg>
       <pc:sldChg chg="modSp mod">
         <pc:chgData name="Mohammed Fasha" userId="cc64f42d-a1a6-4f08-b97b-0c37f877119f" providerId="ADAL" clId="{D3520BFC-89CF-4CB5-8BC6-02854ED6C636}" dt="2024-10-16T09:24:41.861" v="53" actId="14100"/>
@@ -312,22 +209,6 @@
           <pc:docMk/>
           <pc:sldMk cId="3898002179" sldId="275"/>
         </pc:sldMkLst>
-        <pc:spChg chg="mod">
-          <ac:chgData name="Mohammed Fasha" userId="cc64f42d-a1a6-4f08-b97b-0c37f877119f" providerId="ADAL" clId="{D3520BFC-89CF-4CB5-8BC6-02854ED6C636}" dt="2024-10-16T09:24:41.861" v="53" actId="14100"/>
-          <ac:spMkLst>
-            <pc:docMk/>
-            <pc:sldMk cId="3898002179" sldId="275"/>
-            <ac:spMk id="3" creationId="{6F60F422-6C8B-4350-9DB1-462B6D921C76}"/>
-          </ac:spMkLst>
-        </pc:spChg>
-        <pc:picChg chg="mod">
-          <ac:chgData name="Mohammed Fasha" userId="cc64f42d-a1a6-4f08-b97b-0c37f877119f" providerId="ADAL" clId="{D3520BFC-89CF-4CB5-8BC6-02854ED6C636}" dt="2024-10-16T09:24:25.276" v="46" actId="14100"/>
-          <ac:picMkLst>
-            <pc:docMk/>
-            <pc:sldMk cId="3898002179" sldId="275"/>
-            <ac:picMk id="4" creationId="{75F5472F-A08E-4300-8DAE-FAA0E2CB4AA0}"/>
-          </ac:picMkLst>
-        </pc:picChg>
       </pc:sldChg>
       <pc:sldChg chg="addSp delSp modSp mod">
         <pc:chgData name="Mohammed Fasha" userId="cc64f42d-a1a6-4f08-b97b-0c37f877119f" providerId="ADAL" clId="{D3520BFC-89CF-4CB5-8BC6-02854ED6C636}" dt="2024-10-16T09:24:38.381" v="52" actId="27636"/>
@@ -335,30 +216,6 @@
           <pc:docMk/>
           <pc:sldMk cId="1503352162" sldId="276"/>
         </pc:sldMkLst>
-        <pc:spChg chg="mod">
-          <ac:chgData name="Mohammed Fasha" userId="cc64f42d-a1a6-4f08-b97b-0c37f877119f" providerId="ADAL" clId="{D3520BFC-89CF-4CB5-8BC6-02854ED6C636}" dt="2024-10-16T09:24:38.381" v="52" actId="27636"/>
-          <ac:spMkLst>
-            <pc:docMk/>
-            <pc:sldMk cId="1503352162" sldId="276"/>
-            <ac:spMk id="3" creationId="{6F60F422-6C8B-4350-9DB1-462B6D921C76}"/>
-          </ac:spMkLst>
-        </pc:spChg>
-        <pc:picChg chg="del">
-          <ac:chgData name="Mohammed Fasha" userId="cc64f42d-a1a6-4f08-b97b-0c37f877119f" providerId="ADAL" clId="{D3520BFC-89CF-4CB5-8BC6-02854ED6C636}" dt="2024-10-16T09:24:30.372" v="47" actId="478"/>
-          <ac:picMkLst>
-            <pc:docMk/>
-            <pc:sldMk cId="1503352162" sldId="276"/>
-            <ac:picMk id="4" creationId="{6CB6DC69-0647-411B-B8F1-05D615751A44}"/>
-          </ac:picMkLst>
-        </pc:picChg>
-        <pc:picChg chg="add mod">
-          <ac:chgData name="Mohammed Fasha" userId="cc64f42d-a1a6-4f08-b97b-0c37f877119f" providerId="ADAL" clId="{D3520BFC-89CF-4CB5-8BC6-02854ED6C636}" dt="2024-10-16T09:24:30.700" v="48"/>
-          <ac:picMkLst>
-            <pc:docMk/>
-            <pc:sldMk cId="1503352162" sldId="276"/>
-            <ac:picMk id="5" creationId="{7B882FF7-A6EF-B1DB-5C99-5A7B8D2709D0}"/>
-          </ac:picMkLst>
-        </pc:picChg>
       </pc:sldChg>
       <pc:sldChg chg="modSp mod">
         <pc:chgData name="Mohammed Fasha" userId="cc64f42d-a1a6-4f08-b97b-0c37f877119f" providerId="ADAL" clId="{D3520BFC-89CF-4CB5-8BC6-02854ED6C636}" dt="2024-10-16T09:48:50.906" v="382"/>
@@ -366,14 +223,6 @@
           <pc:docMk/>
           <pc:sldMk cId="1260131707" sldId="277"/>
         </pc:sldMkLst>
-        <pc:graphicFrameChg chg="mod modGraphic">
-          <ac:chgData name="Mohammed Fasha" userId="cc64f42d-a1a6-4f08-b97b-0c37f877119f" providerId="ADAL" clId="{D3520BFC-89CF-4CB5-8BC6-02854ED6C636}" dt="2024-10-16T09:48:50.906" v="382"/>
-          <ac:graphicFrameMkLst>
-            <pc:docMk/>
-            <pc:sldMk cId="1260131707" sldId="277"/>
-            <ac:graphicFrameMk id="30" creationId="{2E29D0CD-8485-4FE5-9164-CC49877EAD54}"/>
-          </ac:graphicFrameMkLst>
-        </pc:graphicFrameChg>
       </pc:sldChg>
       <pc:sldChg chg="modSp mod">
         <pc:chgData name="Mohammed Fasha" userId="cc64f42d-a1a6-4f08-b97b-0c37f877119f" providerId="ADAL" clId="{D3520BFC-89CF-4CB5-8BC6-02854ED6C636}" dt="2024-10-16T09:47:08.623" v="367" actId="179"/>
@@ -381,22 +230,6 @@
           <pc:docMk/>
           <pc:sldMk cId="1324937023" sldId="280"/>
         </pc:sldMkLst>
-        <pc:spChg chg="mod">
-          <ac:chgData name="Mohammed Fasha" userId="cc64f42d-a1a6-4f08-b97b-0c37f877119f" providerId="ADAL" clId="{D3520BFC-89CF-4CB5-8BC6-02854ED6C636}" dt="2024-10-16T09:44:04.856" v="287" actId="403"/>
-          <ac:spMkLst>
-            <pc:docMk/>
-            <pc:sldMk cId="1324937023" sldId="280"/>
-            <ac:spMk id="2" creationId="{3CAF7544-BA7E-41E8-894A-3632197EA9B4}"/>
-          </ac:spMkLst>
-        </pc:spChg>
-        <pc:spChg chg="mod">
-          <ac:chgData name="Mohammed Fasha" userId="cc64f42d-a1a6-4f08-b97b-0c37f877119f" providerId="ADAL" clId="{D3520BFC-89CF-4CB5-8BC6-02854ED6C636}" dt="2024-10-16T09:47:08.623" v="367" actId="179"/>
-          <ac:spMkLst>
-            <pc:docMk/>
-            <pc:sldMk cId="1324937023" sldId="280"/>
-            <ac:spMk id="3" creationId="{EBB023EE-AD63-40DF-897F-AA511ACD459A}"/>
-          </ac:spMkLst>
-        </pc:spChg>
       </pc:sldChg>
       <pc:sldChg chg="modSp mod">
         <pc:chgData name="Mohammed Fasha" userId="cc64f42d-a1a6-4f08-b97b-0c37f877119f" providerId="ADAL" clId="{D3520BFC-89CF-4CB5-8BC6-02854ED6C636}" dt="2024-10-16T09:44:54.951" v="335" actId="6549"/>
@@ -404,22 +237,6 @@
           <pc:docMk/>
           <pc:sldMk cId="4085727926" sldId="281"/>
         </pc:sldMkLst>
-        <pc:spChg chg="mod">
-          <ac:chgData name="Mohammed Fasha" userId="cc64f42d-a1a6-4f08-b97b-0c37f877119f" providerId="ADAL" clId="{D3520BFC-89CF-4CB5-8BC6-02854ED6C636}" dt="2024-10-16T09:44:54.951" v="335" actId="6549"/>
-          <ac:spMkLst>
-            <pc:docMk/>
-            <pc:sldMk cId="4085727926" sldId="281"/>
-            <ac:spMk id="2" creationId="{51B680C5-701B-4CA0-AACA-6ADA5A25CC67}"/>
-          </ac:spMkLst>
-        </pc:spChg>
-        <pc:spChg chg="mod">
-          <ac:chgData name="Mohammed Fasha" userId="cc64f42d-a1a6-4f08-b97b-0c37f877119f" providerId="ADAL" clId="{D3520BFC-89CF-4CB5-8BC6-02854ED6C636}" dt="2024-10-16T09:20:14.600" v="8" actId="20577"/>
-          <ac:spMkLst>
-            <pc:docMk/>
-            <pc:sldMk cId="4085727926" sldId="281"/>
-            <ac:spMk id="4" creationId="{B04DCFCF-19A8-48A6-B38D-E45B8F507F3E}"/>
-          </ac:spMkLst>
-        </pc:spChg>
       </pc:sldChg>
       <pc:sldChg chg="modSp mod">
         <pc:chgData name="Mohammed Fasha" userId="cc64f42d-a1a6-4f08-b97b-0c37f877119f" providerId="ADAL" clId="{D3520BFC-89CF-4CB5-8BC6-02854ED6C636}" dt="2024-10-16T09:49:20.342" v="383"/>
@@ -427,14 +244,6 @@
           <pc:docMk/>
           <pc:sldMk cId="156012141" sldId="282"/>
         </pc:sldMkLst>
-        <pc:graphicFrameChg chg="mod modGraphic">
-          <ac:chgData name="Mohammed Fasha" userId="cc64f42d-a1a6-4f08-b97b-0c37f877119f" providerId="ADAL" clId="{D3520BFC-89CF-4CB5-8BC6-02854ED6C636}" dt="2024-10-16T09:49:20.342" v="383"/>
-          <ac:graphicFrameMkLst>
-            <pc:docMk/>
-            <pc:sldMk cId="156012141" sldId="282"/>
-            <ac:graphicFrameMk id="2" creationId="{DC54536A-B01D-4B91-BA55-F02519081599}"/>
-          </ac:graphicFrameMkLst>
-        </pc:graphicFrameChg>
       </pc:sldChg>
       <pc:sldChg chg="delSp modSp mod">
         <pc:chgData name="Mohammed Fasha" userId="cc64f42d-a1a6-4f08-b97b-0c37f877119f" providerId="ADAL" clId="{D3520BFC-89CF-4CB5-8BC6-02854ED6C636}" dt="2024-10-16T09:49:25.572" v="384"/>
@@ -442,22 +251,6 @@
           <pc:docMk/>
           <pc:sldMk cId="248623450" sldId="284"/>
         </pc:sldMkLst>
-        <pc:graphicFrameChg chg="mod modGraphic">
-          <ac:chgData name="Mohammed Fasha" userId="cc64f42d-a1a6-4f08-b97b-0c37f877119f" providerId="ADAL" clId="{D3520BFC-89CF-4CB5-8BC6-02854ED6C636}" dt="2024-10-16T09:49:25.572" v="384"/>
-          <ac:graphicFrameMkLst>
-            <pc:docMk/>
-            <pc:sldMk cId="248623450" sldId="284"/>
-            <ac:graphicFrameMk id="2" creationId="{DC54536A-B01D-4B91-BA55-F02519081599}"/>
-          </ac:graphicFrameMkLst>
-        </pc:graphicFrameChg>
-        <pc:graphicFrameChg chg="del mod">
-          <ac:chgData name="Mohammed Fasha" userId="cc64f42d-a1a6-4f08-b97b-0c37f877119f" providerId="ADAL" clId="{D3520BFC-89CF-4CB5-8BC6-02854ED6C636}" dt="2024-10-16T09:21:34.905" v="29" actId="21"/>
-          <ac:graphicFrameMkLst>
-            <pc:docMk/>
-            <pc:sldMk cId="248623450" sldId="284"/>
-            <ac:graphicFrameMk id="3" creationId="{73616EA2-18B4-4F62-B443-30494FB8E868}"/>
-          </ac:graphicFrameMkLst>
-        </pc:graphicFrameChg>
       </pc:sldChg>
       <pc:sldChg chg="addSp modSp add mod">
         <pc:chgData name="Mohammed Fasha" userId="cc64f42d-a1a6-4f08-b97b-0c37f877119f" providerId="ADAL" clId="{D3520BFC-89CF-4CB5-8BC6-02854ED6C636}" dt="2024-10-16T09:31:53.226" v="265" actId="20577"/>
@@ -465,30 +258,6 @@
           <pc:docMk/>
           <pc:sldMk cId="1489447582" sldId="455"/>
         </pc:sldMkLst>
-        <pc:spChg chg="add mod">
-          <ac:chgData name="Mohammed Fasha" userId="cc64f42d-a1a6-4f08-b97b-0c37f877119f" providerId="ADAL" clId="{D3520BFC-89CF-4CB5-8BC6-02854ED6C636}" dt="2024-10-16T09:26:56.467" v="122"/>
-          <ac:spMkLst>
-            <pc:docMk/>
-            <pc:sldMk cId="1489447582" sldId="455"/>
-            <ac:spMk id="4" creationId="{10433FF8-85E9-4FB4-B2A1-CB5361CA94B2}"/>
-          </ac:spMkLst>
-        </pc:spChg>
-        <pc:spChg chg="mod">
-          <ac:chgData name="Mohammed Fasha" userId="cc64f42d-a1a6-4f08-b97b-0c37f877119f" providerId="ADAL" clId="{D3520BFC-89CF-4CB5-8BC6-02854ED6C636}" dt="2024-10-16T09:31:53.226" v="265" actId="20577"/>
-          <ac:spMkLst>
-            <pc:docMk/>
-            <pc:sldMk cId="1489447582" sldId="455"/>
-            <ac:spMk id="8" creationId="{107CF054-390C-DCFC-C9A6-9E95C859A175}"/>
-          </ac:spMkLst>
-        </pc:spChg>
-        <pc:spChg chg="mod">
-          <ac:chgData name="Mohammed Fasha" userId="cc64f42d-a1a6-4f08-b97b-0c37f877119f" providerId="ADAL" clId="{D3520BFC-89CF-4CB5-8BC6-02854ED6C636}" dt="2024-10-16T09:25:40.417" v="114"/>
-          <ac:spMkLst>
-            <pc:docMk/>
-            <pc:sldMk cId="1489447582" sldId="455"/>
-            <ac:spMk id="9" creationId="{F599965F-D781-62F6-30A4-33D89AC89080}"/>
-          </ac:spMkLst>
-        </pc:spChg>
       </pc:sldChg>
       <pc:sldMasterChg chg="addSp modSp modSldLayout">
         <pc:chgData name="Mohammed Fasha" userId="cc64f42d-a1a6-4f08-b97b-0c37f877119f" providerId="ADAL" clId="{D3520BFC-89CF-4CB5-8BC6-02854ED6C636}" dt="2024-10-16T09:31:03.810" v="239" actId="14100"/>
@@ -496,30 +265,6 @@
           <pc:docMk/>
           <pc:sldMasterMk cId="2573801746" sldId="2147483648"/>
         </pc:sldMasterMkLst>
-        <pc:picChg chg="add mod">
-          <ac:chgData name="Mohammed Fasha" userId="cc64f42d-a1a6-4f08-b97b-0c37f877119f" providerId="ADAL" clId="{D3520BFC-89CF-4CB5-8BC6-02854ED6C636}" dt="2024-10-16T09:26:36.505" v="117"/>
-          <ac:picMkLst>
-            <pc:docMk/>
-            <pc:sldMasterMk cId="2573801746" sldId="2147483648"/>
-            <ac:picMk id="7" creationId="{AF4320F6-19BF-1133-2EDD-A210E0F3792B}"/>
-          </ac:picMkLst>
-        </pc:picChg>
-        <pc:picChg chg="add mod">
-          <ac:chgData name="Mohammed Fasha" userId="cc64f42d-a1a6-4f08-b97b-0c37f877119f" providerId="ADAL" clId="{D3520BFC-89CF-4CB5-8BC6-02854ED6C636}" dt="2024-10-16T09:26:36.505" v="117"/>
-          <ac:picMkLst>
-            <pc:docMk/>
-            <pc:sldMasterMk cId="2573801746" sldId="2147483648"/>
-            <ac:picMk id="8" creationId="{209681C8-34CA-ECC5-8356-8F92339C24DA}"/>
-          </ac:picMkLst>
-        </pc:picChg>
-        <pc:picChg chg="add mod">
-          <ac:chgData name="Mohammed Fasha" userId="cc64f42d-a1a6-4f08-b97b-0c37f877119f" providerId="ADAL" clId="{D3520BFC-89CF-4CB5-8BC6-02854ED6C636}" dt="2024-10-16T09:26:36.505" v="117"/>
-          <ac:picMkLst>
-            <pc:docMk/>
-            <pc:sldMasterMk cId="2573801746" sldId="2147483648"/>
-            <ac:picMk id="9" creationId="{D32F9A66-1583-03D0-01B5-EAB11A75ABB7}"/>
-          </ac:picMkLst>
-        </pc:picChg>
         <pc:sldLayoutChg chg="addSp modSp">
           <pc:chgData name="Mohammed Fasha" userId="cc64f42d-a1a6-4f08-b97b-0c37f877119f" providerId="ADAL" clId="{D3520BFC-89CF-4CB5-8BC6-02854ED6C636}" dt="2024-10-16T09:26:29.266" v="116"/>
           <pc:sldLayoutMkLst>
@@ -527,33 +272,6 @@
             <pc:sldMasterMk cId="2573801746" sldId="2147483648"/>
             <pc:sldLayoutMk cId="1871815692" sldId="2147483649"/>
           </pc:sldLayoutMkLst>
-          <pc:picChg chg="add mod">
-            <ac:chgData name="Mohammed Fasha" userId="cc64f42d-a1a6-4f08-b97b-0c37f877119f" providerId="ADAL" clId="{D3520BFC-89CF-4CB5-8BC6-02854ED6C636}" dt="2024-10-16T09:26:29.266" v="116"/>
-            <ac:picMkLst>
-              <pc:docMk/>
-              <pc:sldMasterMk cId="2573801746" sldId="2147483648"/>
-              <pc:sldLayoutMk cId="1871815692" sldId="2147483649"/>
-              <ac:picMk id="7" creationId="{362BD534-FD14-DC83-966E-A743C20575C2}"/>
-            </ac:picMkLst>
-          </pc:picChg>
-          <pc:picChg chg="add mod">
-            <ac:chgData name="Mohammed Fasha" userId="cc64f42d-a1a6-4f08-b97b-0c37f877119f" providerId="ADAL" clId="{D3520BFC-89CF-4CB5-8BC6-02854ED6C636}" dt="2024-10-16T09:26:29.266" v="116"/>
-            <ac:picMkLst>
-              <pc:docMk/>
-              <pc:sldMasterMk cId="2573801746" sldId="2147483648"/>
-              <pc:sldLayoutMk cId="1871815692" sldId="2147483649"/>
-              <ac:picMk id="8" creationId="{C2DD647E-7C10-CDC6-CD9C-B4C1BD6E474D}"/>
-            </ac:picMkLst>
-          </pc:picChg>
-          <pc:picChg chg="add mod">
-            <ac:chgData name="Mohammed Fasha" userId="cc64f42d-a1a6-4f08-b97b-0c37f877119f" providerId="ADAL" clId="{D3520BFC-89CF-4CB5-8BC6-02854ED6C636}" dt="2024-10-16T09:26:29.266" v="116"/>
-            <ac:picMkLst>
-              <pc:docMk/>
-              <pc:sldMasterMk cId="2573801746" sldId="2147483648"/>
-              <pc:sldLayoutMk cId="1871815692" sldId="2147483649"/>
-              <ac:picMk id="9" creationId="{D3B8E1E8-22E1-FDC2-108E-33F8D43B6418}"/>
-            </ac:picMkLst>
-          </pc:picChg>
         </pc:sldLayoutChg>
         <pc:sldLayoutChg chg="modSp mod">
           <pc:chgData name="Mohammed Fasha" userId="cc64f42d-a1a6-4f08-b97b-0c37f877119f" providerId="ADAL" clId="{D3520BFC-89CF-4CB5-8BC6-02854ED6C636}" dt="2024-10-16T09:31:03.810" v="239" actId="14100"/>
@@ -562,15 +280,6 @@
             <pc:sldMasterMk cId="2573801746" sldId="2147483648"/>
             <pc:sldLayoutMk cId="3033015503" sldId="2147483650"/>
           </pc:sldLayoutMkLst>
-          <pc:spChg chg="mod">
-            <ac:chgData name="Mohammed Fasha" userId="cc64f42d-a1a6-4f08-b97b-0c37f877119f" providerId="ADAL" clId="{D3520BFC-89CF-4CB5-8BC6-02854ED6C636}" dt="2024-10-16T09:31:03.810" v="239" actId="14100"/>
-            <ac:spMkLst>
-              <pc:docMk/>
-              <pc:sldMasterMk cId="2573801746" sldId="2147483648"/>
-              <pc:sldLayoutMk cId="3033015503" sldId="2147483650"/>
-              <ac:spMk id="2" creationId="{2D5B3F3C-1E16-4389-B985-D8A53EDEC091}"/>
-            </ac:spMkLst>
-          </pc:spChg>
         </pc:sldLayoutChg>
       </pc:sldMasterChg>
     </pc:docChg>
@@ -588,14 +297,6 @@
           <pc:docMk/>
           <pc:sldMk cId="4051642265" sldId="268"/>
         </pc:sldMkLst>
-        <pc:spChg chg="mod">
-          <ac:chgData name="Mohammed Fasha" userId="cc64f42d-a1a6-4f08-b97b-0c37f877119f" providerId="ADAL" clId="{30B40AC3-5669-44FB-A9B9-80E8E88C9E32}" dt="2024-10-21T07:01:55.743" v="0" actId="207"/>
-          <ac:spMkLst>
-            <pc:docMk/>
-            <pc:sldMk cId="4051642265" sldId="268"/>
-            <ac:spMk id="3" creationId="{21FF2A87-8E89-4813-8BC6-A1CA52285D72}"/>
-          </ac:spMkLst>
-        </pc:spChg>
       </pc:sldChg>
       <pc:sldChg chg="modSp">
         <pc:chgData name="Mohammed Fasha" userId="cc64f42d-a1a6-4f08-b97b-0c37f877119f" providerId="ADAL" clId="{30B40AC3-5669-44FB-A9B9-80E8E88C9E32}" dt="2024-10-21T07:23:44.619" v="11"/>
@@ -603,14 +304,6 @@
           <pc:docMk/>
           <pc:sldMk cId="1260131707" sldId="277"/>
         </pc:sldMkLst>
-        <pc:graphicFrameChg chg="mod modGraphic">
-          <ac:chgData name="Mohammed Fasha" userId="cc64f42d-a1a6-4f08-b97b-0c37f877119f" providerId="ADAL" clId="{30B40AC3-5669-44FB-A9B9-80E8E88C9E32}" dt="2024-10-21T07:23:44.619" v="11"/>
-          <ac:graphicFrameMkLst>
-            <pc:docMk/>
-            <pc:sldMk cId="1260131707" sldId="277"/>
-            <ac:graphicFrameMk id="30" creationId="{2E29D0CD-8485-4FE5-9164-CC49877EAD54}"/>
-          </ac:graphicFrameMkLst>
-        </pc:graphicFrameChg>
       </pc:sldChg>
       <pc:sldChg chg="addSp delSp modSp add del">
         <pc:chgData name="Mohammed Fasha" userId="cc64f42d-a1a6-4f08-b97b-0c37f877119f" providerId="ADAL" clId="{30B40AC3-5669-44FB-A9B9-80E8E88C9E32}" dt="2024-10-21T07:42:04.586" v="230" actId="2696"/>
@@ -618,30 +311,6 @@
           <pc:docMk/>
           <pc:sldMk cId="3743348053" sldId="456"/>
         </pc:sldMkLst>
-        <pc:spChg chg="del">
-          <ac:chgData name="Mohammed Fasha" userId="cc64f42d-a1a6-4f08-b97b-0c37f877119f" providerId="ADAL" clId="{30B40AC3-5669-44FB-A9B9-80E8E88C9E32}" dt="2024-10-21T07:26:58.681" v="24"/>
-          <ac:spMkLst>
-            <pc:docMk/>
-            <pc:sldMk cId="3743348053" sldId="456"/>
-            <ac:spMk id="2" creationId="{A9FFD075-A058-477F-850B-3E31D91C2A39}"/>
-          </ac:spMkLst>
-        </pc:spChg>
-        <pc:spChg chg="del mod">
-          <ac:chgData name="Mohammed Fasha" userId="cc64f42d-a1a6-4f08-b97b-0c37f877119f" providerId="ADAL" clId="{30B40AC3-5669-44FB-A9B9-80E8E88C9E32}" dt="2024-10-21T07:26:58.681" v="24"/>
-          <ac:spMkLst>
-            <pc:docMk/>
-            <pc:sldMk cId="3743348053" sldId="456"/>
-            <ac:spMk id="3" creationId="{8157D0A7-407B-4121-ABED-4BD155427073}"/>
-          </ac:spMkLst>
-        </pc:spChg>
-        <pc:spChg chg="add mod">
-          <ac:chgData name="Mohammed Fasha" userId="cc64f42d-a1a6-4f08-b97b-0c37f877119f" providerId="ADAL" clId="{30B40AC3-5669-44FB-A9B9-80E8E88C9E32}" dt="2024-10-21T07:28:23.253" v="37" actId="403"/>
-          <ac:spMkLst>
-            <pc:docMk/>
-            <pc:sldMk cId="3743348053" sldId="456"/>
-            <ac:spMk id="4" creationId="{4A8AFAC7-5650-4DFB-9EDD-32A78B0A9314}"/>
-          </ac:spMkLst>
-        </pc:spChg>
       </pc:sldChg>
       <pc:sldChg chg="addSp delSp modSp add del">
         <pc:chgData name="Mohammed Fasha" userId="cc64f42d-a1a6-4f08-b97b-0c37f877119f" providerId="ADAL" clId="{30B40AC3-5669-44FB-A9B9-80E8E88C9E32}" dt="2024-10-21T07:43:37.674" v="248" actId="2696"/>
@@ -649,30 +318,6 @@
           <pc:docMk/>
           <pc:sldMk cId="1914310957" sldId="457"/>
         </pc:sldMkLst>
-        <pc:spChg chg="del">
-          <ac:chgData name="Mohammed Fasha" userId="cc64f42d-a1a6-4f08-b97b-0c37f877119f" providerId="ADAL" clId="{30B40AC3-5669-44FB-A9B9-80E8E88C9E32}" dt="2024-10-21T07:31:49.167" v="39"/>
-          <ac:spMkLst>
-            <pc:docMk/>
-            <pc:sldMk cId="1914310957" sldId="457"/>
-            <ac:spMk id="2" creationId="{CF7336FA-8788-426D-B784-36D53D759E27}"/>
-          </ac:spMkLst>
-        </pc:spChg>
-        <pc:spChg chg="del">
-          <ac:chgData name="Mohammed Fasha" userId="cc64f42d-a1a6-4f08-b97b-0c37f877119f" providerId="ADAL" clId="{30B40AC3-5669-44FB-A9B9-80E8E88C9E32}" dt="2024-10-21T07:31:49.167" v="39"/>
-          <ac:spMkLst>
-            <pc:docMk/>
-            <pc:sldMk cId="1914310957" sldId="457"/>
-            <ac:spMk id="3" creationId="{174B71EF-F9C1-4952-A53A-BE076F384C2D}"/>
-          </ac:spMkLst>
-        </pc:spChg>
-        <pc:spChg chg="add mod">
-          <ac:chgData name="Mohammed Fasha" userId="cc64f42d-a1a6-4f08-b97b-0c37f877119f" providerId="ADAL" clId="{30B40AC3-5669-44FB-A9B9-80E8E88C9E32}" dt="2024-10-21T07:34:42.601" v="113" actId="20577"/>
-          <ac:spMkLst>
-            <pc:docMk/>
-            <pc:sldMk cId="1914310957" sldId="457"/>
-            <ac:spMk id="4" creationId="{D2E666BE-E74A-4207-8944-583A858B7BB2}"/>
-          </ac:spMkLst>
-        </pc:spChg>
       </pc:sldChg>
       <pc:sldChg chg="addSp delSp modSp add del">
         <pc:chgData name="Mohammed Fasha" userId="cc64f42d-a1a6-4f08-b97b-0c37f877119f" providerId="ADAL" clId="{30B40AC3-5669-44FB-A9B9-80E8E88C9E32}" dt="2024-10-21T07:43:44.968" v="251" actId="2696"/>
@@ -680,30 +325,6 @@
           <pc:docMk/>
           <pc:sldMk cId="1563484610" sldId="458"/>
         </pc:sldMkLst>
-        <pc:spChg chg="del">
-          <ac:chgData name="Mohammed Fasha" userId="cc64f42d-a1a6-4f08-b97b-0c37f877119f" providerId="ADAL" clId="{30B40AC3-5669-44FB-A9B9-80E8E88C9E32}" dt="2024-10-21T07:32:27.011" v="51"/>
-          <ac:spMkLst>
-            <pc:docMk/>
-            <pc:sldMk cId="1563484610" sldId="458"/>
-            <ac:spMk id="2" creationId="{099487FE-030F-4FAC-89C1-22411DDA67C5}"/>
-          </ac:spMkLst>
-        </pc:spChg>
-        <pc:spChg chg="del">
-          <ac:chgData name="Mohammed Fasha" userId="cc64f42d-a1a6-4f08-b97b-0c37f877119f" providerId="ADAL" clId="{30B40AC3-5669-44FB-A9B9-80E8E88C9E32}" dt="2024-10-21T07:32:27.011" v="51"/>
-          <ac:spMkLst>
-            <pc:docMk/>
-            <pc:sldMk cId="1563484610" sldId="458"/>
-            <ac:spMk id="3" creationId="{8FEBA0D6-EE51-4E86-83A2-49093A7F5095}"/>
-          </ac:spMkLst>
-        </pc:spChg>
-        <pc:spChg chg="add mod">
-          <ac:chgData name="Mohammed Fasha" userId="cc64f42d-a1a6-4f08-b97b-0c37f877119f" providerId="ADAL" clId="{30B40AC3-5669-44FB-A9B9-80E8E88C9E32}" dt="2024-10-21T07:38:41.486" v="181" actId="20577"/>
-          <ac:spMkLst>
-            <pc:docMk/>
-            <pc:sldMk cId="1563484610" sldId="458"/>
-            <ac:spMk id="4" creationId="{FAD60893-FDDA-4CB5-9ABD-12AAC81476BB}"/>
-          </ac:spMkLst>
-        </pc:spChg>
       </pc:sldChg>
       <pc:sldChg chg="addSp delSp modSp add del">
         <pc:chgData name="Mohammed Fasha" userId="cc64f42d-a1a6-4f08-b97b-0c37f877119f" providerId="ADAL" clId="{30B40AC3-5669-44FB-A9B9-80E8E88C9E32}" dt="2024-10-21T07:43:48.926" v="253" actId="2696"/>
@@ -711,30 +332,6 @@
           <pc:docMk/>
           <pc:sldMk cId="3782395966" sldId="459"/>
         </pc:sldMkLst>
-        <pc:spChg chg="del">
-          <ac:chgData name="Mohammed Fasha" userId="cc64f42d-a1a6-4f08-b97b-0c37f877119f" providerId="ADAL" clId="{30B40AC3-5669-44FB-A9B9-80E8E88C9E32}" dt="2024-10-21T07:33:37.115" v="72"/>
-          <ac:spMkLst>
-            <pc:docMk/>
-            <pc:sldMk cId="3782395966" sldId="459"/>
-            <ac:spMk id="2" creationId="{38A7DD79-0C90-420A-87BB-2C6B4F48BB66}"/>
-          </ac:spMkLst>
-        </pc:spChg>
-        <pc:spChg chg="del">
-          <ac:chgData name="Mohammed Fasha" userId="cc64f42d-a1a6-4f08-b97b-0c37f877119f" providerId="ADAL" clId="{30B40AC3-5669-44FB-A9B9-80E8E88C9E32}" dt="2024-10-21T07:33:37.115" v="72"/>
-          <ac:spMkLst>
-            <pc:docMk/>
-            <pc:sldMk cId="3782395966" sldId="459"/>
-            <ac:spMk id="3" creationId="{A999F354-ABED-41CF-BF8E-C98868371F1E}"/>
-          </ac:spMkLst>
-        </pc:spChg>
-        <pc:spChg chg="add mod">
-          <ac:chgData name="Mohammed Fasha" userId="cc64f42d-a1a6-4f08-b97b-0c37f877119f" providerId="ADAL" clId="{30B40AC3-5669-44FB-A9B9-80E8E88C9E32}" dt="2024-10-21T07:40:13.124" v="229" actId="6549"/>
-          <ac:spMkLst>
-            <pc:docMk/>
-            <pc:sldMk cId="3782395966" sldId="459"/>
-            <ac:spMk id="4" creationId="{931CA542-0DDC-4EE8-B424-27E67F6B71A3}"/>
-          </ac:spMkLst>
-        </pc:spChg>
       </pc:sldChg>
       <pc:sldChg chg="addSp delSp modSp add">
         <pc:chgData name="Mohammed Fasha" userId="cc64f42d-a1a6-4f08-b97b-0c37f877119f" providerId="ADAL" clId="{30B40AC3-5669-44FB-A9B9-80E8E88C9E32}" dt="2024-10-21T07:58:46.456" v="410" actId="207"/>
@@ -742,30 +339,6 @@
           <pc:docMk/>
           <pc:sldMk cId="713799975" sldId="460"/>
         </pc:sldMkLst>
-        <pc:spChg chg="del">
-          <ac:chgData name="Mohammed Fasha" userId="cc64f42d-a1a6-4f08-b97b-0c37f877119f" providerId="ADAL" clId="{30B40AC3-5669-44FB-A9B9-80E8E88C9E32}" dt="2024-10-21T07:33:33.202" v="71"/>
-          <ac:spMkLst>
-            <pc:docMk/>
-            <pc:sldMk cId="713799975" sldId="460"/>
-            <ac:spMk id="2" creationId="{09B13FA1-2D7B-4439-8931-79989D2EA692}"/>
-          </ac:spMkLst>
-        </pc:spChg>
-        <pc:spChg chg="del">
-          <ac:chgData name="Mohammed Fasha" userId="cc64f42d-a1a6-4f08-b97b-0c37f877119f" providerId="ADAL" clId="{30B40AC3-5669-44FB-A9B9-80E8E88C9E32}" dt="2024-10-21T07:33:33.202" v="71"/>
-          <ac:spMkLst>
-            <pc:docMk/>
-            <pc:sldMk cId="713799975" sldId="460"/>
-            <ac:spMk id="3" creationId="{9C91DB3E-D104-4002-AF36-18FBBF140A76}"/>
-          </ac:spMkLst>
-        </pc:spChg>
-        <pc:spChg chg="add mod">
-          <ac:chgData name="Mohammed Fasha" userId="cc64f42d-a1a6-4f08-b97b-0c37f877119f" providerId="ADAL" clId="{30B40AC3-5669-44FB-A9B9-80E8E88C9E32}" dt="2024-10-21T07:58:46.456" v="410" actId="207"/>
-          <ac:spMkLst>
-            <pc:docMk/>
-            <pc:sldMk cId="713799975" sldId="460"/>
-            <ac:spMk id="4" creationId="{46282CA3-25AB-4797-AE1F-89B85CED5039}"/>
-          </ac:spMkLst>
-        </pc:spChg>
       </pc:sldChg>
       <pc:sldChg chg="addSp delSp modSp add">
         <pc:chgData name="Mohammed Fasha" userId="cc64f42d-a1a6-4f08-b97b-0c37f877119f" providerId="ADAL" clId="{30B40AC3-5669-44FB-A9B9-80E8E88C9E32}" dt="2024-10-21T08:00:22.594" v="429" actId="207"/>
@@ -773,30 +346,6 @@
           <pc:docMk/>
           <pc:sldMk cId="1559487564" sldId="461"/>
         </pc:sldMkLst>
-        <pc:spChg chg="del">
-          <ac:chgData name="Mohammed Fasha" userId="cc64f42d-a1a6-4f08-b97b-0c37f877119f" providerId="ADAL" clId="{30B40AC3-5669-44FB-A9B9-80E8E88C9E32}" dt="2024-10-21T07:33:30.836" v="70"/>
-          <ac:spMkLst>
-            <pc:docMk/>
-            <pc:sldMk cId="1559487564" sldId="461"/>
-            <ac:spMk id="2" creationId="{344F86D0-A5AC-4B0D-91A4-A1C17A8DC9BD}"/>
-          </ac:spMkLst>
-        </pc:spChg>
-        <pc:spChg chg="del">
-          <ac:chgData name="Mohammed Fasha" userId="cc64f42d-a1a6-4f08-b97b-0c37f877119f" providerId="ADAL" clId="{30B40AC3-5669-44FB-A9B9-80E8E88C9E32}" dt="2024-10-21T07:33:30.836" v="70"/>
-          <ac:spMkLst>
-            <pc:docMk/>
-            <pc:sldMk cId="1559487564" sldId="461"/>
-            <ac:spMk id="3" creationId="{32055EFC-D3AD-4D60-8F8C-2F7D1A42BA40}"/>
-          </ac:spMkLst>
-        </pc:spChg>
-        <pc:spChg chg="add mod">
-          <ac:chgData name="Mohammed Fasha" userId="cc64f42d-a1a6-4f08-b97b-0c37f877119f" providerId="ADAL" clId="{30B40AC3-5669-44FB-A9B9-80E8E88C9E32}" dt="2024-10-21T08:00:22.594" v="429" actId="207"/>
-          <ac:spMkLst>
-            <pc:docMk/>
-            <pc:sldMk cId="1559487564" sldId="461"/>
-            <ac:spMk id="4" creationId="{C506341A-8429-4EB9-9B53-E5C8DEECBD22}"/>
-          </ac:spMkLst>
-        </pc:spChg>
       </pc:sldChg>
       <pc:sldChg chg="addSp delSp modSp add">
         <pc:chgData name="Mohammed Fasha" userId="cc64f42d-a1a6-4f08-b97b-0c37f877119f" providerId="ADAL" clId="{30B40AC3-5669-44FB-A9B9-80E8E88C9E32}" dt="2024-10-21T07:54:42.825" v="379" actId="207"/>
@@ -804,30 +353,6 @@
           <pc:docMk/>
           <pc:sldMk cId="3087456825" sldId="462"/>
         </pc:sldMkLst>
-        <pc:spChg chg="del">
-          <ac:chgData name="Mohammed Fasha" userId="cc64f42d-a1a6-4f08-b97b-0c37f877119f" providerId="ADAL" clId="{30B40AC3-5669-44FB-A9B9-80E8E88C9E32}" dt="2024-10-21T07:42:13.655" v="233"/>
-          <ac:spMkLst>
-            <pc:docMk/>
-            <pc:sldMk cId="3087456825" sldId="462"/>
-            <ac:spMk id="2" creationId="{C2D62A35-9137-402E-A552-59BDA1D9BBDC}"/>
-          </ac:spMkLst>
-        </pc:spChg>
-        <pc:spChg chg="del mod">
-          <ac:chgData name="Mohammed Fasha" userId="cc64f42d-a1a6-4f08-b97b-0c37f877119f" providerId="ADAL" clId="{30B40AC3-5669-44FB-A9B9-80E8E88C9E32}" dt="2024-10-21T07:42:44.626" v="239" actId="478"/>
-          <ac:spMkLst>
-            <pc:docMk/>
-            <pc:sldMk cId="3087456825" sldId="462"/>
-            <ac:spMk id="3" creationId="{0E14B895-3AFA-4828-AD32-326C001E72DC}"/>
-          </ac:spMkLst>
-        </pc:spChg>
-        <pc:spChg chg="add mod">
-          <ac:chgData name="Mohammed Fasha" userId="cc64f42d-a1a6-4f08-b97b-0c37f877119f" providerId="ADAL" clId="{30B40AC3-5669-44FB-A9B9-80E8E88C9E32}" dt="2024-10-21T07:54:42.825" v="379" actId="207"/>
-          <ac:spMkLst>
-            <pc:docMk/>
-            <pc:sldMk cId="3087456825" sldId="462"/>
-            <ac:spMk id="4" creationId="{A4C2D5F8-BE48-45B5-A4B0-BBBBD52ADF1E}"/>
-          </ac:spMkLst>
-        </pc:spChg>
       </pc:sldChg>
       <pc:sldChg chg="addSp delSp modSp add">
         <pc:chgData name="Mohammed Fasha" userId="cc64f42d-a1a6-4f08-b97b-0c37f877119f" providerId="ADAL" clId="{30B40AC3-5669-44FB-A9B9-80E8E88C9E32}" dt="2024-10-21T07:56:10.314" v="392" actId="14100"/>
@@ -835,22 +360,6 @@
           <pc:docMk/>
           <pc:sldMk cId="1869085755" sldId="463"/>
         </pc:sldMkLst>
-        <pc:spChg chg="add mod">
-          <ac:chgData name="Mohammed Fasha" userId="cc64f42d-a1a6-4f08-b97b-0c37f877119f" providerId="ADAL" clId="{30B40AC3-5669-44FB-A9B9-80E8E88C9E32}" dt="2024-10-21T07:56:10.314" v="392" actId="14100"/>
-          <ac:spMkLst>
-            <pc:docMk/>
-            <pc:sldMk cId="1869085755" sldId="463"/>
-            <ac:spMk id="2" creationId="{21269AA9-F7B2-45BE-8EF6-8BF442FDB0EB}"/>
-          </ac:spMkLst>
-        </pc:spChg>
-        <pc:spChg chg="del">
-          <ac:chgData name="Mohammed Fasha" userId="cc64f42d-a1a6-4f08-b97b-0c37f877119f" providerId="ADAL" clId="{30B40AC3-5669-44FB-A9B9-80E8E88C9E32}" dt="2024-10-21T07:43:40.285" v="249"/>
-          <ac:spMkLst>
-            <pc:docMk/>
-            <pc:sldMk cId="1869085755" sldId="463"/>
-            <ac:spMk id="4" creationId="{A4C2D5F8-BE48-45B5-A4B0-BBBBD52ADF1E}"/>
-          </ac:spMkLst>
-        </pc:spChg>
       </pc:sldChg>
       <pc:sldChg chg="addSp modSp add">
         <pc:chgData name="Mohammed Fasha" userId="cc64f42d-a1a6-4f08-b97b-0c37f877119f" providerId="ADAL" clId="{30B40AC3-5669-44FB-A9B9-80E8E88C9E32}" dt="2024-10-21T07:56:43.392" v="396" actId="5793"/>
@@ -858,14 +367,6 @@
           <pc:docMk/>
           <pc:sldMk cId="4139560" sldId="464"/>
         </pc:sldMkLst>
-        <pc:spChg chg="add mod">
-          <ac:chgData name="Mohammed Fasha" userId="cc64f42d-a1a6-4f08-b97b-0c37f877119f" providerId="ADAL" clId="{30B40AC3-5669-44FB-A9B9-80E8E88C9E32}" dt="2024-10-21T07:56:43.392" v="396" actId="5793"/>
-          <ac:spMkLst>
-            <pc:docMk/>
-            <pc:sldMk cId="4139560" sldId="464"/>
-            <ac:spMk id="2" creationId="{238DFF5C-CB6C-4CB1-B193-99DF5D0FC074}"/>
-          </ac:spMkLst>
-        </pc:spChg>
       </pc:sldChg>
       <pc:sldChg chg="addSp modSp add">
         <pc:chgData name="Mohammed Fasha" userId="cc64f42d-a1a6-4f08-b97b-0c37f877119f" providerId="ADAL" clId="{30B40AC3-5669-44FB-A9B9-80E8E88C9E32}" dt="2024-10-21T07:57:39.264" v="404" actId="207"/>
@@ -873,14 +374,6 @@
           <pc:docMk/>
           <pc:sldMk cId="277181267" sldId="465"/>
         </pc:sldMkLst>
-        <pc:spChg chg="add mod">
-          <ac:chgData name="Mohammed Fasha" userId="cc64f42d-a1a6-4f08-b97b-0c37f877119f" providerId="ADAL" clId="{30B40AC3-5669-44FB-A9B9-80E8E88C9E32}" dt="2024-10-21T07:57:39.264" v="404" actId="207"/>
-          <ac:spMkLst>
-            <pc:docMk/>
-            <pc:sldMk cId="277181267" sldId="465"/>
-            <ac:spMk id="2" creationId="{F002FBF9-C37A-4DFC-8DB1-8F41EEC69B01}"/>
-          </ac:spMkLst>
-        </pc:spChg>
       </pc:sldChg>
     </pc:docChg>
   </pc:docChgLst>
@@ -897,14 +390,6 @@
           <pc:docMk/>
           <pc:sldMk cId="1162554463" sldId="257"/>
         </pc:sldMkLst>
-        <pc:spChg chg="mod">
-          <ac:chgData name="Mohammed Fasha" userId="cc64f42d-a1a6-4f08-b97b-0c37f877119f" providerId="ADAL" clId="{30DD28B9-8B97-487C-83EE-EC2EB54F3F9E}" dt="2024-10-16T20:03:44.325" v="2" actId="20577"/>
-          <ac:spMkLst>
-            <pc:docMk/>
-            <pc:sldMk cId="1162554463" sldId="257"/>
-            <ac:spMk id="2" creationId="{8BE518FD-B81F-466C-AD85-5DDC967653B4}"/>
-          </ac:spMkLst>
-        </pc:spChg>
       </pc:sldChg>
       <pc:sldChg chg="modSp mod">
         <pc:chgData name="Mohammed Fasha" userId="cc64f42d-a1a6-4f08-b97b-0c37f877119f" providerId="ADAL" clId="{30DD28B9-8B97-487C-83EE-EC2EB54F3F9E}" dt="2024-10-16T20:03:53.393" v="4" actId="113"/>
@@ -912,14 +397,6 @@
           <pc:docMk/>
           <pc:sldMk cId="706735111" sldId="258"/>
         </pc:sldMkLst>
-        <pc:spChg chg="mod">
-          <ac:chgData name="Mohammed Fasha" userId="cc64f42d-a1a6-4f08-b97b-0c37f877119f" providerId="ADAL" clId="{30DD28B9-8B97-487C-83EE-EC2EB54F3F9E}" dt="2024-10-16T20:03:53.393" v="4" actId="113"/>
-          <ac:spMkLst>
-            <pc:docMk/>
-            <pc:sldMk cId="706735111" sldId="258"/>
-            <ac:spMk id="2" creationId="{9288F61D-F3F3-4CF5-8002-3AC25EDB8819}"/>
-          </ac:spMkLst>
-        </pc:spChg>
       </pc:sldChg>
       <pc:sldChg chg="addSp delSp modSp mod">
         <pc:chgData name="Mohammed Fasha" userId="cc64f42d-a1a6-4f08-b97b-0c37f877119f" providerId="ADAL" clId="{30DD28B9-8B97-487C-83EE-EC2EB54F3F9E}" dt="2024-10-16T20:04:08.776" v="6"/>
@@ -927,22 +404,6 @@
           <pc:docMk/>
           <pc:sldMk cId="2433706687" sldId="267"/>
         </pc:sldMkLst>
-        <pc:picChg chg="del">
-          <ac:chgData name="Mohammed Fasha" userId="cc64f42d-a1a6-4f08-b97b-0c37f877119f" providerId="ADAL" clId="{30DD28B9-8B97-487C-83EE-EC2EB54F3F9E}" dt="2024-10-16T20:04:07.330" v="5" actId="478"/>
-          <ac:picMkLst>
-            <pc:docMk/>
-            <pc:sldMk cId="2433706687" sldId="267"/>
-            <ac:picMk id="4" creationId="{D3DFDFF8-AB92-4467-A875-2BF47363F467}"/>
-          </ac:picMkLst>
-        </pc:picChg>
-        <pc:picChg chg="add mod">
-          <ac:chgData name="Mohammed Fasha" userId="cc64f42d-a1a6-4f08-b97b-0c37f877119f" providerId="ADAL" clId="{30DD28B9-8B97-487C-83EE-EC2EB54F3F9E}" dt="2024-10-16T20:04:08.776" v="6"/>
-          <ac:picMkLst>
-            <pc:docMk/>
-            <pc:sldMk cId="2433706687" sldId="267"/>
-            <ac:picMk id="5" creationId="{711CA3BE-8294-49EB-C075-FBD0A45AE456}"/>
-          </ac:picMkLst>
-        </pc:picChg>
       </pc:sldChg>
       <pc:sldChg chg="addSp delSp modSp mod">
         <pc:chgData name="Mohammed Fasha" userId="cc64f42d-a1a6-4f08-b97b-0c37f877119f" providerId="ADAL" clId="{30DD28B9-8B97-487C-83EE-EC2EB54F3F9E}" dt="2024-10-16T20:04:23.488" v="10" actId="27636"/>
@@ -950,30 +411,6 @@
           <pc:docMk/>
           <pc:sldMk cId="3925652072" sldId="271"/>
         </pc:sldMkLst>
-        <pc:spChg chg="mod">
-          <ac:chgData name="Mohammed Fasha" userId="cc64f42d-a1a6-4f08-b97b-0c37f877119f" providerId="ADAL" clId="{30DD28B9-8B97-487C-83EE-EC2EB54F3F9E}" dt="2024-10-16T20:04:23.488" v="10" actId="27636"/>
-          <ac:spMkLst>
-            <pc:docMk/>
-            <pc:sldMk cId="3925652072" sldId="271"/>
-            <ac:spMk id="3" creationId="{87120F09-B855-46F4-976C-8E2C0397ACE7}"/>
-          </ac:spMkLst>
-        </pc:spChg>
-        <pc:picChg chg="del">
-          <ac:chgData name="Mohammed Fasha" userId="cc64f42d-a1a6-4f08-b97b-0c37f877119f" providerId="ADAL" clId="{30DD28B9-8B97-487C-83EE-EC2EB54F3F9E}" dt="2024-10-16T20:04:18.644" v="7" actId="478"/>
-          <ac:picMkLst>
-            <pc:docMk/>
-            <pc:sldMk cId="3925652072" sldId="271"/>
-            <ac:picMk id="4" creationId="{5FCFED86-3233-47CE-8852-680ED6082B0C}"/>
-          </ac:picMkLst>
-        </pc:picChg>
-        <pc:picChg chg="add mod">
-          <ac:chgData name="Mohammed Fasha" userId="cc64f42d-a1a6-4f08-b97b-0c37f877119f" providerId="ADAL" clId="{30DD28B9-8B97-487C-83EE-EC2EB54F3F9E}" dt="2024-10-16T20:04:19.535" v="8"/>
-          <ac:picMkLst>
-            <pc:docMk/>
-            <pc:sldMk cId="3925652072" sldId="271"/>
-            <ac:picMk id="5" creationId="{597389B4-53D0-2971-A749-E12EA0B32C75}"/>
-          </ac:picMkLst>
-        </pc:picChg>
       </pc:sldChg>
       <pc:sldChg chg="modSp mod">
         <pc:chgData name="Mohammed Fasha" userId="cc64f42d-a1a6-4f08-b97b-0c37f877119f" providerId="ADAL" clId="{30DD28B9-8B97-487C-83EE-EC2EB54F3F9E}" dt="2024-10-17T03:04:01.750" v="11" actId="1076"/>
@@ -981,14 +418,6 @@
           <pc:docMk/>
           <pc:sldMk cId="1489447582" sldId="455"/>
         </pc:sldMkLst>
-        <pc:picChg chg="mod">
-          <ac:chgData name="Mohammed Fasha" userId="cc64f42d-a1a6-4f08-b97b-0c37f877119f" providerId="ADAL" clId="{30DD28B9-8B97-487C-83EE-EC2EB54F3F9E}" dt="2024-10-17T03:04:01.750" v="11" actId="1076"/>
-          <ac:picMkLst>
-            <pc:docMk/>
-            <pc:sldMk cId="1489447582" sldId="455"/>
-            <ac:picMk id="6" creationId="{87387D1D-1AA9-EA47-F9E0-B5509D9C1DE4}"/>
-          </ac:picMkLst>
-        </pc:picChg>
       </pc:sldChg>
     </pc:docChg>
   </pc:docChgLst>
@@ -1005,14 +434,6 @@
           <pc:docMk/>
           <pc:sldMk cId="1162554463" sldId="257"/>
         </pc:sldMkLst>
-        <pc:spChg chg="mod">
-          <ac:chgData name="Mohammed Fasha" userId="cc64f42d-a1a6-4f08-b97b-0c37f877119f" providerId="ADAL" clId="{985CD171-9E4A-4264-B045-872AAA800AE3}" dt="2024-10-16T07:15:21.970" v="481" actId="27636"/>
-          <ac:spMkLst>
-            <pc:docMk/>
-            <pc:sldMk cId="1162554463" sldId="257"/>
-            <ac:spMk id="3" creationId="{1A647627-019E-4599-BFE9-83A7DEA04B6D}"/>
-          </ac:spMkLst>
-        </pc:spChg>
       </pc:sldChg>
       <pc:sldChg chg="addSp modSp">
         <pc:chgData name="Mohammed Fasha" userId="cc64f42d-a1a6-4f08-b97b-0c37f877119f" providerId="ADAL" clId="{985CD171-9E4A-4264-B045-872AAA800AE3}" dt="2024-10-16T07:06:03.884" v="437" actId="1076"/>
@@ -1020,30 +441,6 @@
           <pc:docMk/>
           <pc:sldMk cId="706735111" sldId="258"/>
         </pc:sldMkLst>
-        <pc:spChg chg="mod">
-          <ac:chgData name="Mohammed Fasha" userId="cc64f42d-a1a6-4f08-b97b-0c37f877119f" providerId="ADAL" clId="{985CD171-9E4A-4264-B045-872AAA800AE3}" dt="2024-10-16T06:36:35.765" v="5" actId="20577"/>
-          <ac:spMkLst>
-            <pc:docMk/>
-            <pc:sldMk cId="706735111" sldId="258"/>
-            <ac:spMk id="2" creationId="{9288F61D-F3F3-4CF5-8002-3AC25EDB8819}"/>
-          </ac:spMkLst>
-        </pc:spChg>
-        <pc:spChg chg="mod">
-          <ac:chgData name="Mohammed Fasha" userId="cc64f42d-a1a6-4f08-b97b-0c37f877119f" providerId="ADAL" clId="{985CD171-9E4A-4264-B045-872AAA800AE3}" dt="2024-10-16T07:05:49.195" v="430" actId="27636"/>
-          <ac:spMkLst>
-            <pc:docMk/>
-            <pc:sldMk cId="706735111" sldId="258"/>
-            <ac:spMk id="3" creationId="{21FF2A87-8E89-4813-8BC6-A1CA52285D72}"/>
-          </ac:spMkLst>
-        </pc:spChg>
-        <pc:picChg chg="add mod">
-          <ac:chgData name="Mohammed Fasha" userId="cc64f42d-a1a6-4f08-b97b-0c37f877119f" providerId="ADAL" clId="{985CD171-9E4A-4264-B045-872AAA800AE3}" dt="2024-10-16T07:06:03.884" v="437" actId="1076"/>
-          <ac:picMkLst>
-            <pc:docMk/>
-            <pc:sldMk cId="706735111" sldId="258"/>
-            <ac:picMk id="2050" creationId="{AA68ACC8-5427-41F6-A099-9DE9A9BF7361}"/>
-          </ac:picMkLst>
-        </pc:picChg>
       </pc:sldChg>
       <pc:sldChg chg="addSp delSp modSp ord">
         <pc:chgData name="Mohammed Fasha" userId="cc64f42d-a1a6-4f08-b97b-0c37f877119f" providerId="ADAL" clId="{985CD171-9E4A-4264-B045-872AAA800AE3}" dt="2024-10-16T07:00:38.831" v="349" actId="207"/>
@@ -1051,30 +448,6 @@
           <pc:docMk/>
           <pc:sldMk cId="4289469650" sldId="261"/>
         </pc:sldMkLst>
-        <pc:spChg chg="mod">
-          <ac:chgData name="Mohammed Fasha" userId="cc64f42d-a1a6-4f08-b97b-0c37f877119f" providerId="ADAL" clId="{985CD171-9E4A-4264-B045-872AAA800AE3}" dt="2024-10-16T06:39:15.585" v="58" actId="20577"/>
-          <ac:spMkLst>
-            <pc:docMk/>
-            <pc:sldMk cId="4289469650" sldId="261"/>
-            <ac:spMk id="2" creationId="{9288F61D-F3F3-4CF5-8002-3AC25EDB8819}"/>
-          </ac:spMkLst>
-        </pc:spChg>
-        <pc:spChg chg="mod">
-          <ac:chgData name="Mohammed Fasha" userId="cc64f42d-a1a6-4f08-b97b-0c37f877119f" providerId="ADAL" clId="{985CD171-9E4A-4264-B045-872AAA800AE3}" dt="2024-10-16T07:00:38.831" v="349" actId="207"/>
-          <ac:spMkLst>
-            <pc:docMk/>
-            <pc:sldMk cId="4289469650" sldId="261"/>
-            <ac:spMk id="3" creationId="{21FF2A87-8E89-4813-8BC6-A1CA52285D72}"/>
-          </ac:spMkLst>
-        </pc:spChg>
-        <pc:picChg chg="add del mod">
-          <ac:chgData name="Mohammed Fasha" userId="cc64f42d-a1a6-4f08-b97b-0c37f877119f" providerId="ADAL" clId="{985CD171-9E4A-4264-B045-872AAA800AE3}" dt="2024-10-16T06:43:28.592" v="121"/>
-          <ac:picMkLst>
-            <pc:docMk/>
-            <pc:sldMk cId="4289469650" sldId="261"/>
-            <ac:picMk id="4" creationId="{C7CD0943-6DB6-4AC5-8B9C-6F6EE2801ACA}"/>
-          </ac:picMkLst>
-        </pc:picChg>
       </pc:sldChg>
       <pc:sldChg chg="addSp delSp modSp ord">
         <pc:chgData name="Mohammed Fasha" userId="cc64f42d-a1a6-4f08-b97b-0c37f877119f" providerId="ADAL" clId="{985CD171-9E4A-4264-B045-872AAA800AE3}" dt="2024-10-16T06:46:39.846" v="191" actId="14100"/>
@@ -1082,38 +455,6 @@
           <pc:docMk/>
           <pc:sldMk cId="4130133658" sldId="262"/>
         </pc:sldMkLst>
-        <pc:spChg chg="del">
-          <ac:chgData name="Mohammed Fasha" userId="cc64f42d-a1a6-4f08-b97b-0c37f877119f" providerId="ADAL" clId="{985CD171-9E4A-4264-B045-872AAA800AE3}" dt="2024-10-16T06:46:34.171" v="188" actId="478"/>
-          <ac:spMkLst>
-            <pc:docMk/>
-            <pc:sldMk cId="4130133658" sldId="262"/>
-            <ac:spMk id="2" creationId="{9288F61D-F3F3-4CF5-8002-3AC25EDB8819}"/>
-          </ac:spMkLst>
-        </pc:spChg>
-        <pc:spChg chg="del">
-          <ac:chgData name="Mohammed Fasha" userId="cc64f42d-a1a6-4f08-b97b-0c37f877119f" providerId="ADAL" clId="{985CD171-9E4A-4264-B045-872AAA800AE3}" dt="2024-10-16T06:45:08.604" v="162"/>
-          <ac:spMkLst>
-            <pc:docMk/>
-            <pc:sldMk cId="4130133658" sldId="262"/>
-            <ac:spMk id="3" creationId="{21FF2A87-8E89-4813-8BC6-A1CA52285D72}"/>
-          </ac:spMkLst>
-        </pc:spChg>
-        <pc:spChg chg="add">
-          <ac:chgData name="Mohammed Fasha" userId="cc64f42d-a1a6-4f08-b97b-0c37f877119f" providerId="ADAL" clId="{985CD171-9E4A-4264-B045-872AAA800AE3}" dt="2024-10-16T06:46:34.610" v="189"/>
-          <ac:spMkLst>
-            <pc:docMk/>
-            <pc:sldMk cId="4130133658" sldId="262"/>
-            <ac:spMk id="5" creationId="{6897A2DA-C13C-4666-9469-D4969E1A0D04}"/>
-          </ac:spMkLst>
-        </pc:spChg>
-        <pc:picChg chg="add mod">
-          <ac:chgData name="Mohammed Fasha" userId="cc64f42d-a1a6-4f08-b97b-0c37f877119f" providerId="ADAL" clId="{985CD171-9E4A-4264-B045-872AAA800AE3}" dt="2024-10-16T06:46:39.846" v="191" actId="14100"/>
-          <ac:picMkLst>
-            <pc:docMk/>
-            <pc:sldMk cId="4130133658" sldId="262"/>
-            <ac:picMk id="4" creationId="{4D1A933D-0C9F-4D19-BACA-5A1F0B3554E9}"/>
-          </ac:picMkLst>
-        </pc:picChg>
       </pc:sldChg>
       <pc:sldChg chg="addSp modSp ord">
         <pc:chgData name="Mohammed Fasha" userId="cc64f42d-a1a6-4f08-b97b-0c37f877119f" providerId="ADAL" clId="{985CD171-9E4A-4264-B045-872AAA800AE3}" dt="2024-10-16T07:55:18.576" v="615" actId="207"/>
@@ -1121,30 +462,6 @@
           <pc:docMk/>
           <pc:sldMk cId="4074862586" sldId="263"/>
         </pc:sldMkLst>
-        <pc:spChg chg="mod">
-          <ac:chgData name="Mohammed Fasha" userId="cc64f42d-a1a6-4f08-b97b-0c37f877119f" providerId="ADAL" clId="{985CD171-9E4A-4264-B045-872AAA800AE3}" dt="2024-10-16T06:45:48.950" v="179" actId="20577"/>
-          <ac:spMkLst>
-            <pc:docMk/>
-            <pc:sldMk cId="4074862586" sldId="263"/>
-            <ac:spMk id="2" creationId="{9288F61D-F3F3-4CF5-8002-3AC25EDB8819}"/>
-          </ac:spMkLst>
-        </pc:spChg>
-        <pc:spChg chg="mod">
-          <ac:chgData name="Mohammed Fasha" userId="cc64f42d-a1a6-4f08-b97b-0c37f877119f" providerId="ADAL" clId="{985CD171-9E4A-4264-B045-872AAA800AE3}" dt="2024-10-16T07:55:18.576" v="615" actId="207"/>
-          <ac:spMkLst>
-            <pc:docMk/>
-            <pc:sldMk cId="4074862586" sldId="263"/>
-            <ac:spMk id="3" creationId="{21FF2A87-8E89-4813-8BC6-A1CA52285D72}"/>
-          </ac:spMkLst>
-        </pc:spChg>
-        <pc:picChg chg="add mod">
-          <ac:chgData name="Mohammed Fasha" userId="cc64f42d-a1a6-4f08-b97b-0c37f877119f" providerId="ADAL" clId="{985CD171-9E4A-4264-B045-872AAA800AE3}" dt="2024-10-16T07:01:20.877" v="357" actId="1076"/>
-          <ac:picMkLst>
-            <pc:docMk/>
-            <pc:sldMk cId="4074862586" sldId="263"/>
-            <ac:picMk id="4" creationId="{5F6629B2-E2E7-4132-BFCF-F6A78C0F1430}"/>
-          </ac:picMkLst>
-        </pc:picChg>
       </pc:sldChg>
       <pc:sldChg chg="addSp delSp modSp add">
         <pc:chgData name="Mohammed Fasha" userId="cc64f42d-a1a6-4f08-b97b-0c37f877119f" providerId="ADAL" clId="{985CD171-9E4A-4264-B045-872AAA800AE3}" dt="2024-10-16T07:54:33.790" v="610"/>
@@ -1152,70 +469,6 @@
           <pc:docMk/>
           <pc:sldMk cId="2611575643" sldId="264"/>
         </pc:sldMkLst>
-        <pc:spChg chg="mod">
-          <ac:chgData name="Mohammed Fasha" userId="cc64f42d-a1a6-4f08-b97b-0c37f877119f" providerId="ADAL" clId="{985CD171-9E4A-4264-B045-872AAA800AE3}" dt="2024-10-16T06:45:16.497" v="167" actId="122"/>
-          <ac:spMkLst>
-            <pc:docMk/>
-            <pc:sldMk cId="2611575643" sldId="264"/>
-            <ac:spMk id="2" creationId="{9288F61D-F3F3-4CF5-8002-3AC25EDB8819}"/>
-          </ac:spMkLst>
-        </pc:spChg>
-        <pc:spChg chg="del">
-          <ac:chgData name="Mohammed Fasha" userId="cc64f42d-a1a6-4f08-b97b-0c37f877119f" providerId="ADAL" clId="{985CD171-9E4A-4264-B045-872AAA800AE3}" dt="2024-10-16T06:41:25.285" v="88"/>
-          <ac:spMkLst>
-            <pc:docMk/>
-            <pc:sldMk cId="2611575643" sldId="264"/>
-            <ac:spMk id="3" creationId="{21FF2A87-8E89-4813-8BC6-A1CA52285D72}"/>
-          </ac:spMkLst>
-        </pc:spChg>
-        <pc:spChg chg="add del mod">
-          <ac:chgData name="Mohammed Fasha" userId="cc64f42d-a1a6-4f08-b97b-0c37f877119f" providerId="ADAL" clId="{985CD171-9E4A-4264-B045-872AAA800AE3}" dt="2024-10-16T07:54:33.790" v="610"/>
-          <ac:spMkLst>
-            <pc:docMk/>
-            <pc:sldMk cId="2611575643" sldId="264"/>
-            <ac:spMk id="4" creationId="{426410E2-12F6-4569-A98D-9EFD6881FC70}"/>
-          </ac:spMkLst>
-        </pc:spChg>
-        <pc:spChg chg="add del mod">
-          <ac:chgData name="Mohammed Fasha" userId="cc64f42d-a1a6-4f08-b97b-0c37f877119f" providerId="ADAL" clId="{985CD171-9E4A-4264-B045-872AAA800AE3}" dt="2024-10-16T06:45:43.079" v="173"/>
-          <ac:spMkLst>
-            <pc:docMk/>
-            <pc:sldMk cId="2611575643" sldId="264"/>
-            <ac:spMk id="5" creationId="{464DA3AD-EBFE-41ED-9C87-4D997F1F5B9F}"/>
-          </ac:spMkLst>
-        </pc:spChg>
-        <pc:spChg chg="add mod">
-          <ac:chgData name="Mohammed Fasha" userId="cc64f42d-a1a6-4f08-b97b-0c37f877119f" providerId="ADAL" clId="{985CD171-9E4A-4264-B045-872AAA800AE3}" dt="2024-10-16T06:45:27.388" v="171" actId="5793"/>
-          <ac:spMkLst>
-            <pc:docMk/>
-            <pc:sldMk cId="2611575643" sldId="264"/>
-            <ac:spMk id="6" creationId="{DDFDCA3F-8817-43C9-BFB7-2CB99B29E1D4}"/>
-          </ac:spMkLst>
-        </pc:spChg>
-        <pc:picChg chg="add">
-          <ac:chgData name="Mohammed Fasha" userId="cc64f42d-a1a6-4f08-b97b-0c37f877119f" providerId="ADAL" clId="{985CD171-9E4A-4264-B045-872AAA800AE3}" dt="2024-10-16T06:43:29.797" v="122"/>
-          <ac:picMkLst>
-            <pc:docMk/>
-            <pc:sldMk cId="2611575643" sldId="264"/>
-            <ac:picMk id="7" creationId="{6319464A-C4AA-467E-837D-231219155A05}"/>
-          </ac:picMkLst>
-        </pc:picChg>
-        <pc:picChg chg="add del mod">
-          <ac:chgData name="Mohammed Fasha" userId="cc64f42d-a1a6-4f08-b97b-0c37f877119f" providerId="ADAL" clId="{985CD171-9E4A-4264-B045-872AAA800AE3}" dt="2024-10-16T06:45:05.843" v="161"/>
-          <ac:picMkLst>
-            <pc:docMk/>
-            <pc:sldMk cId="2611575643" sldId="264"/>
-            <ac:picMk id="1026" creationId="{36507CCE-9032-4D0C-BB69-BFC045A80BB4}"/>
-          </ac:picMkLst>
-        </pc:picChg>
-        <pc:picChg chg="add del mod">
-          <ac:chgData name="Mohammed Fasha" userId="cc64f42d-a1a6-4f08-b97b-0c37f877119f" providerId="ADAL" clId="{985CD171-9E4A-4264-B045-872AAA800AE3}" dt="2024-10-16T06:41:58.638" v="98"/>
-          <ac:picMkLst>
-            <pc:docMk/>
-            <pc:sldMk cId="2611575643" sldId="264"/>
-            <ac:picMk id="1028" creationId="{D28251D0-255D-4551-ADC1-EDB1BD37382C}"/>
-          </ac:picMkLst>
-        </pc:picChg>
       </pc:sldChg>
       <pc:sldChg chg="addSp modSp add ord">
         <pc:chgData name="Mohammed Fasha" userId="cc64f42d-a1a6-4f08-b97b-0c37f877119f" providerId="ADAL" clId="{985CD171-9E4A-4264-B045-872AAA800AE3}" dt="2024-10-16T07:08:38.092" v="475" actId="27636"/>
@@ -1223,30 +476,6 @@
           <pc:docMk/>
           <pc:sldMk cId="335199774" sldId="265"/>
         </pc:sldMkLst>
-        <pc:spChg chg="mod">
-          <ac:chgData name="Mohammed Fasha" userId="cc64f42d-a1a6-4f08-b97b-0c37f877119f" providerId="ADAL" clId="{985CD171-9E4A-4264-B045-872AAA800AE3}" dt="2024-10-16T06:38:37.120" v="51" actId="20577"/>
-          <ac:spMkLst>
-            <pc:docMk/>
-            <pc:sldMk cId="335199774" sldId="265"/>
-            <ac:spMk id="2" creationId="{9288F61D-F3F3-4CF5-8002-3AC25EDB8819}"/>
-          </ac:spMkLst>
-        </pc:spChg>
-        <pc:spChg chg="mod">
-          <ac:chgData name="Mohammed Fasha" userId="cc64f42d-a1a6-4f08-b97b-0c37f877119f" providerId="ADAL" clId="{985CD171-9E4A-4264-B045-872AAA800AE3}" dt="2024-10-16T07:08:38.092" v="475" actId="27636"/>
-          <ac:spMkLst>
-            <pc:docMk/>
-            <pc:sldMk cId="335199774" sldId="265"/>
-            <ac:spMk id="3" creationId="{21FF2A87-8E89-4813-8BC6-A1CA52285D72}"/>
-          </ac:spMkLst>
-        </pc:spChg>
-        <pc:picChg chg="add mod">
-          <ac:chgData name="Mohammed Fasha" userId="cc64f42d-a1a6-4f08-b97b-0c37f877119f" providerId="ADAL" clId="{985CD171-9E4A-4264-B045-872AAA800AE3}" dt="2024-10-16T07:08:34.220" v="471" actId="1076"/>
-          <ac:picMkLst>
-            <pc:docMk/>
-            <pc:sldMk cId="335199774" sldId="265"/>
-            <ac:picMk id="5122" creationId="{AECF9FDB-7251-40AD-AFCF-F5418FEF4FBA}"/>
-          </ac:picMkLst>
-        </pc:picChg>
       </pc:sldChg>
       <pc:sldChg chg="addSp delSp modSp add">
         <pc:chgData name="Mohammed Fasha" userId="cc64f42d-a1a6-4f08-b97b-0c37f877119f" providerId="ADAL" clId="{985CD171-9E4A-4264-B045-872AAA800AE3}" dt="2024-10-16T07:02:57.901" v="385" actId="27636"/>
@@ -1254,46 +483,6 @@
           <pc:docMk/>
           <pc:sldMk cId="2810357117" sldId="266"/>
         </pc:sldMkLst>
-        <pc:spChg chg="mod">
-          <ac:chgData name="Mohammed Fasha" userId="cc64f42d-a1a6-4f08-b97b-0c37f877119f" providerId="ADAL" clId="{985CD171-9E4A-4264-B045-872AAA800AE3}" dt="2024-10-16T06:47:21.230" v="200" actId="20577"/>
-          <ac:spMkLst>
-            <pc:docMk/>
-            <pc:sldMk cId="2810357117" sldId="266"/>
-            <ac:spMk id="2" creationId="{6C057820-CF00-4795-9097-113B9CA6485A}"/>
-          </ac:spMkLst>
-        </pc:spChg>
-        <pc:spChg chg="mod">
-          <ac:chgData name="Mohammed Fasha" userId="cc64f42d-a1a6-4f08-b97b-0c37f877119f" providerId="ADAL" clId="{985CD171-9E4A-4264-B045-872AAA800AE3}" dt="2024-10-16T07:02:57.901" v="385" actId="27636"/>
-          <ac:spMkLst>
-            <pc:docMk/>
-            <pc:sldMk cId="2810357117" sldId="266"/>
-            <ac:spMk id="3" creationId="{8D85989A-80AD-468A-8F1A-3E3AE90C37B2}"/>
-          </ac:spMkLst>
-        </pc:spChg>
-        <pc:picChg chg="add del mod">
-          <ac:chgData name="Mohammed Fasha" userId="cc64f42d-a1a6-4f08-b97b-0c37f877119f" providerId="ADAL" clId="{985CD171-9E4A-4264-B045-872AAA800AE3}" dt="2024-10-16T07:01:59.644" v="368"/>
-          <ac:picMkLst>
-            <pc:docMk/>
-            <pc:sldMk cId="2810357117" sldId="266"/>
-            <ac:picMk id="4" creationId="{356328D9-0305-4B83-AEEA-7FA540ADE3E7}"/>
-          </ac:picMkLst>
-        </pc:picChg>
-        <pc:picChg chg="add del mod">
-          <ac:chgData name="Mohammed Fasha" userId="cc64f42d-a1a6-4f08-b97b-0c37f877119f" providerId="ADAL" clId="{985CD171-9E4A-4264-B045-872AAA800AE3}" dt="2024-10-16T07:02:32.183" v="373"/>
-          <ac:picMkLst>
-            <pc:docMk/>
-            <pc:sldMk cId="2810357117" sldId="266"/>
-            <ac:picMk id="5" creationId="{C43D7EC6-084D-4656-B21E-1D10F65D3F1E}"/>
-          </ac:picMkLst>
-        </pc:picChg>
-        <pc:picChg chg="add mod">
-          <ac:chgData name="Mohammed Fasha" userId="cc64f42d-a1a6-4f08-b97b-0c37f877119f" providerId="ADAL" clId="{985CD171-9E4A-4264-B045-872AAA800AE3}" dt="2024-10-16T07:02:52.869" v="380" actId="1076"/>
-          <ac:picMkLst>
-            <pc:docMk/>
-            <pc:sldMk cId="2810357117" sldId="266"/>
-            <ac:picMk id="6" creationId="{DD42A04E-7FA1-47E0-8CDD-5E9CAC4EFD55}"/>
-          </ac:picMkLst>
-        </pc:picChg>
       </pc:sldChg>
       <pc:sldChg chg="addSp modSp add">
         <pc:chgData name="Mohammed Fasha" userId="cc64f42d-a1a6-4f08-b97b-0c37f877119f" providerId="ADAL" clId="{985CD171-9E4A-4264-B045-872AAA800AE3}" dt="2024-10-16T07:03:19.455" v="397" actId="27636"/>
@@ -1301,22 +490,6 @@
           <pc:docMk/>
           <pc:sldMk cId="2433706687" sldId="267"/>
         </pc:sldMkLst>
-        <pc:spChg chg="mod">
-          <ac:chgData name="Mohammed Fasha" userId="cc64f42d-a1a6-4f08-b97b-0c37f877119f" providerId="ADAL" clId="{985CD171-9E4A-4264-B045-872AAA800AE3}" dt="2024-10-16T07:03:19.455" v="397" actId="27636"/>
-          <ac:spMkLst>
-            <pc:docMk/>
-            <pc:sldMk cId="2433706687" sldId="267"/>
-            <ac:spMk id="3" creationId="{8D85989A-80AD-468A-8F1A-3E3AE90C37B2}"/>
-          </ac:spMkLst>
-        </pc:spChg>
-        <pc:picChg chg="add mod">
-          <ac:chgData name="Mohammed Fasha" userId="cc64f42d-a1a6-4f08-b97b-0c37f877119f" providerId="ADAL" clId="{985CD171-9E4A-4264-B045-872AAA800AE3}" dt="2024-10-16T07:03:09.592" v="390" actId="1076"/>
-          <ac:picMkLst>
-            <pc:docMk/>
-            <pc:sldMk cId="2433706687" sldId="267"/>
-            <ac:picMk id="4" creationId="{D3DFDFF8-AB92-4467-A875-2BF47363F467}"/>
-          </ac:picMkLst>
-        </pc:picChg>
       </pc:sldChg>
       <pc:sldChg chg="addSp modSp add">
         <pc:chgData name="Mohammed Fasha" userId="cc64f42d-a1a6-4f08-b97b-0c37f877119f" providerId="ADAL" clId="{985CD171-9E4A-4264-B045-872AAA800AE3}" dt="2024-10-16T08:00:33.047" v="616" actId="14100"/>
@@ -1324,22 +497,6 @@
           <pc:docMk/>
           <pc:sldMk cId="4051642265" sldId="268"/>
         </pc:sldMkLst>
-        <pc:spChg chg="mod">
-          <ac:chgData name="Mohammed Fasha" userId="cc64f42d-a1a6-4f08-b97b-0c37f877119f" providerId="ADAL" clId="{985CD171-9E4A-4264-B045-872AAA800AE3}" dt="2024-10-16T08:00:33.047" v="616" actId="14100"/>
-          <ac:spMkLst>
-            <pc:docMk/>
-            <pc:sldMk cId="4051642265" sldId="268"/>
-            <ac:spMk id="3" creationId="{21FF2A87-8E89-4813-8BC6-A1CA52285D72}"/>
-          </ac:spMkLst>
-        </pc:spChg>
-        <pc:picChg chg="add">
-          <ac:chgData name="Mohammed Fasha" userId="cc64f42d-a1a6-4f08-b97b-0c37f877119f" providerId="ADAL" clId="{985CD171-9E4A-4264-B045-872AAA800AE3}" dt="2024-10-16T07:01:31.859" v="360"/>
-          <ac:picMkLst>
-            <pc:docMk/>
-            <pc:sldMk cId="4051642265" sldId="268"/>
-            <ac:picMk id="4" creationId="{E78F6ABA-AFCC-4712-A573-B2C8A9E1504B}"/>
-          </ac:picMkLst>
-        </pc:picChg>
       </pc:sldChg>
       <pc:sldChg chg="addSp modSp add">
         <pc:chgData name="Mohammed Fasha" userId="cc64f42d-a1a6-4f08-b97b-0c37f877119f" providerId="ADAL" clId="{985CD171-9E4A-4264-B045-872AAA800AE3}" dt="2024-10-16T07:04:05.205" v="412" actId="14100"/>
@@ -1347,30 +504,6 @@
           <pc:docMk/>
           <pc:sldMk cId="87410777" sldId="269"/>
         </pc:sldMkLst>
-        <pc:spChg chg="mod">
-          <ac:chgData name="Mohammed Fasha" userId="cc64f42d-a1a6-4f08-b97b-0c37f877119f" providerId="ADAL" clId="{985CD171-9E4A-4264-B045-872AAA800AE3}" dt="2024-10-16T06:49:36.316" v="248" actId="20577"/>
-          <ac:spMkLst>
-            <pc:docMk/>
-            <pc:sldMk cId="87410777" sldId="269"/>
-            <ac:spMk id="2" creationId="{9987501D-B572-4460-8231-76B9F857EC0F}"/>
-          </ac:spMkLst>
-        </pc:spChg>
-        <pc:spChg chg="mod">
-          <ac:chgData name="Mohammed Fasha" userId="cc64f42d-a1a6-4f08-b97b-0c37f877119f" providerId="ADAL" clId="{985CD171-9E4A-4264-B045-872AAA800AE3}" dt="2024-10-16T07:04:05.205" v="412" actId="14100"/>
-          <ac:spMkLst>
-            <pc:docMk/>
-            <pc:sldMk cId="87410777" sldId="269"/>
-            <ac:spMk id="3" creationId="{87120F09-B855-46F4-976C-8E2C0397ACE7}"/>
-          </ac:spMkLst>
-        </pc:spChg>
-        <pc:picChg chg="add mod">
-          <ac:chgData name="Mohammed Fasha" userId="cc64f42d-a1a6-4f08-b97b-0c37f877119f" providerId="ADAL" clId="{985CD171-9E4A-4264-B045-872AAA800AE3}" dt="2024-10-16T07:04:02.816" v="411" actId="1076"/>
-          <ac:picMkLst>
-            <pc:docMk/>
-            <pc:sldMk cId="87410777" sldId="269"/>
-            <ac:picMk id="4" creationId="{9D4574B7-9F5D-4EE4-B90B-8A14193B4734}"/>
-          </ac:picMkLst>
-        </pc:picChg>
       </pc:sldChg>
       <pc:sldChg chg="addSp modSp add">
         <pc:chgData name="Mohammed Fasha" userId="cc64f42d-a1a6-4f08-b97b-0c37f877119f" providerId="ADAL" clId="{985CD171-9E4A-4264-B045-872AAA800AE3}" dt="2024-10-16T07:04:34.185" v="419" actId="14100"/>
@@ -1378,30 +511,6 @@
           <pc:docMk/>
           <pc:sldMk cId="595502031" sldId="270"/>
         </pc:sldMkLst>
-        <pc:spChg chg="mod">
-          <ac:chgData name="Mohammed Fasha" userId="cc64f42d-a1a6-4f08-b97b-0c37f877119f" providerId="ADAL" clId="{985CD171-9E4A-4264-B045-872AAA800AE3}" dt="2024-10-16T06:49:58.912" v="255" actId="20577"/>
-          <ac:spMkLst>
-            <pc:docMk/>
-            <pc:sldMk cId="595502031" sldId="270"/>
-            <ac:spMk id="2" creationId="{9987501D-B572-4460-8231-76B9F857EC0F}"/>
-          </ac:spMkLst>
-        </pc:spChg>
-        <pc:spChg chg="mod">
-          <ac:chgData name="Mohammed Fasha" userId="cc64f42d-a1a6-4f08-b97b-0c37f877119f" providerId="ADAL" clId="{985CD171-9E4A-4264-B045-872AAA800AE3}" dt="2024-10-16T07:04:34.185" v="419" actId="14100"/>
-          <ac:spMkLst>
-            <pc:docMk/>
-            <pc:sldMk cId="595502031" sldId="270"/>
-            <ac:spMk id="3" creationId="{87120F09-B855-46F4-976C-8E2C0397ACE7}"/>
-          </ac:spMkLst>
-        </pc:spChg>
-        <pc:picChg chg="add mod">
-          <ac:chgData name="Mohammed Fasha" userId="cc64f42d-a1a6-4f08-b97b-0c37f877119f" providerId="ADAL" clId="{985CD171-9E4A-4264-B045-872AAA800AE3}" dt="2024-10-16T07:04:31.981" v="418" actId="1076"/>
-          <ac:picMkLst>
-            <pc:docMk/>
-            <pc:sldMk cId="595502031" sldId="270"/>
-            <ac:picMk id="4" creationId="{CC627305-525B-48C1-9B0E-4A94A6323C29}"/>
-          </ac:picMkLst>
-        </pc:picChg>
       </pc:sldChg>
       <pc:sldChg chg="addSp modSp add ord">
         <pc:chgData name="Mohammed Fasha" userId="cc64f42d-a1a6-4f08-b97b-0c37f877119f" providerId="ADAL" clId="{985CD171-9E4A-4264-B045-872AAA800AE3}" dt="2024-10-16T07:03:52.480" v="404" actId="27636"/>
@@ -1409,30 +518,6 @@
           <pc:docMk/>
           <pc:sldMk cId="3925652072" sldId="271"/>
         </pc:sldMkLst>
-        <pc:spChg chg="mod">
-          <ac:chgData name="Mohammed Fasha" userId="cc64f42d-a1a6-4f08-b97b-0c37f877119f" providerId="ADAL" clId="{985CD171-9E4A-4264-B045-872AAA800AE3}" dt="2024-10-16T06:49:38.082" v="249" actId="20577"/>
-          <ac:spMkLst>
-            <pc:docMk/>
-            <pc:sldMk cId="3925652072" sldId="271"/>
-            <ac:spMk id="2" creationId="{9987501D-B572-4460-8231-76B9F857EC0F}"/>
-          </ac:spMkLst>
-        </pc:spChg>
-        <pc:spChg chg="mod">
-          <ac:chgData name="Mohammed Fasha" userId="cc64f42d-a1a6-4f08-b97b-0c37f877119f" providerId="ADAL" clId="{985CD171-9E4A-4264-B045-872AAA800AE3}" dt="2024-10-16T07:03:52.480" v="404" actId="27636"/>
-          <ac:spMkLst>
-            <pc:docMk/>
-            <pc:sldMk cId="3925652072" sldId="271"/>
-            <ac:spMk id="3" creationId="{87120F09-B855-46F4-976C-8E2C0397ACE7}"/>
-          </ac:spMkLst>
-        </pc:spChg>
-        <pc:picChg chg="add mod">
-          <ac:chgData name="Mohammed Fasha" userId="cc64f42d-a1a6-4f08-b97b-0c37f877119f" providerId="ADAL" clId="{985CD171-9E4A-4264-B045-872AAA800AE3}" dt="2024-10-16T07:03:49.975" v="402" actId="1076"/>
-          <ac:picMkLst>
-            <pc:docMk/>
-            <pc:sldMk cId="3925652072" sldId="271"/>
-            <ac:picMk id="4" creationId="{5FCFED86-3233-47CE-8852-680ED6082B0C}"/>
-          </ac:picMkLst>
-        </pc:picChg>
       </pc:sldChg>
       <pc:sldChg chg="addSp modSp add">
         <pc:chgData name="Mohammed Fasha" userId="cc64f42d-a1a6-4f08-b97b-0c37f877119f" providerId="ADAL" clId="{985CD171-9E4A-4264-B045-872AAA800AE3}" dt="2024-10-16T07:04:42.805" v="424" actId="1076"/>
@@ -1440,30 +525,6 @@
           <pc:docMk/>
           <pc:sldMk cId="463115072" sldId="272"/>
         </pc:sldMkLst>
-        <pc:spChg chg="mod">
-          <ac:chgData name="Mohammed Fasha" userId="cc64f42d-a1a6-4f08-b97b-0c37f877119f" providerId="ADAL" clId="{985CD171-9E4A-4264-B045-872AAA800AE3}" dt="2024-10-16T06:50:25.773" v="268"/>
-          <ac:spMkLst>
-            <pc:docMk/>
-            <pc:sldMk cId="463115072" sldId="272"/>
-            <ac:spMk id="2" creationId="{01EEEC5D-AE76-482E-9BDB-4391F6FFC714}"/>
-          </ac:spMkLst>
-        </pc:spChg>
-        <pc:spChg chg="mod">
-          <ac:chgData name="Mohammed Fasha" userId="cc64f42d-a1a6-4f08-b97b-0c37f877119f" providerId="ADAL" clId="{985CD171-9E4A-4264-B045-872AAA800AE3}" dt="2024-10-16T07:04:37.651" v="421" actId="27636"/>
-          <ac:spMkLst>
-            <pc:docMk/>
-            <pc:sldMk cId="463115072" sldId="272"/>
-            <ac:spMk id="3" creationId="{D2295298-8EE1-4945-B5D5-F3017888096E}"/>
-          </ac:spMkLst>
-        </pc:spChg>
-        <pc:picChg chg="add mod">
-          <ac:chgData name="Mohammed Fasha" userId="cc64f42d-a1a6-4f08-b97b-0c37f877119f" providerId="ADAL" clId="{985CD171-9E4A-4264-B045-872AAA800AE3}" dt="2024-10-16T07:04:42.805" v="424" actId="1076"/>
-          <ac:picMkLst>
-            <pc:docMk/>
-            <pc:sldMk cId="463115072" sldId="272"/>
-            <ac:picMk id="4" creationId="{5886277E-050E-4CBC-911D-8EEEC8BFD6A2}"/>
-          </ac:picMkLst>
-        </pc:picChg>
       </pc:sldChg>
       <pc:sldChg chg="addSp modSp add">
         <pc:chgData name="Mohammed Fasha" userId="cc64f42d-a1a6-4f08-b97b-0c37f877119f" providerId="ADAL" clId="{985CD171-9E4A-4264-B045-872AAA800AE3}" dt="2024-10-16T07:06:32.789" v="441" actId="14100"/>
@@ -1471,30 +532,6 @@
           <pc:docMk/>
           <pc:sldMk cId="3668955903" sldId="273"/>
         </pc:sldMkLst>
-        <pc:spChg chg="mod">
-          <ac:chgData name="Mohammed Fasha" userId="cc64f42d-a1a6-4f08-b97b-0c37f877119f" providerId="ADAL" clId="{985CD171-9E4A-4264-B045-872AAA800AE3}" dt="2024-10-16T06:50:44.712" v="276" actId="20577"/>
-          <ac:spMkLst>
-            <pc:docMk/>
-            <pc:sldMk cId="3668955903" sldId="273"/>
-            <ac:spMk id="2" creationId="{01EEEC5D-AE76-482E-9BDB-4391F6FFC714}"/>
-          </ac:spMkLst>
-        </pc:spChg>
-        <pc:spChg chg="mod">
-          <ac:chgData name="Mohammed Fasha" userId="cc64f42d-a1a6-4f08-b97b-0c37f877119f" providerId="ADAL" clId="{985CD171-9E4A-4264-B045-872AAA800AE3}" dt="2024-10-16T07:06:32.789" v="441" actId="14100"/>
-          <ac:spMkLst>
-            <pc:docMk/>
-            <pc:sldMk cId="3668955903" sldId="273"/>
-            <ac:spMk id="3" creationId="{D2295298-8EE1-4945-B5D5-F3017888096E}"/>
-          </ac:spMkLst>
-        </pc:spChg>
-        <pc:picChg chg="add mod">
-          <ac:chgData name="Mohammed Fasha" userId="cc64f42d-a1a6-4f08-b97b-0c37f877119f" providerId="ADAL" clId="{985CD171-9E4A-4264-B045-872AAA800AE3}" dt="2024-10-16T07:06:30.753" v="440" actId="1076"/>
-          <ac:picMkLst>
-            <pc:docMk/>
-            <pc:sldMk cId="3668955903" sldId="273"/>
-            <ac:picMk id="4" creationId="{0B45CC0D-25F8-496D-A3D7-1CB2FD98251F}"/>
-          </ac:picMkLst>
-        </pc:picChg>
       </pc:sldChg>
       <pc:sldChg chg="addSp delSp modSp add">
         <pc:chgData name="Mohammed Fasha" userId="cc64f42d-a1a6-4f08-b97b-0c37f877119f" providerId="ADAL" clId="{985CD171-9E4A-4264-B045-872AAA800AE3}" dt="2024-10-16T07:06:45.628" v="449" actId="27636"/>
@@ -1502,38 +539,6 @@
           <pc:docMk/>
           <pc:sldMk cId="3192380798" sldId="274"/>
         </pc:sldMkLst>
-        <pc:spChg chg="mod">
-          <ac:chgData name="Mohammed Fasha" userId="cc64f42d-a1a6-4f08-b97b-0c37f877119f" providerId="ADAL" clId="{985CD171-9E4A-4264-B045-872AAA800AE3}" dt="2024-10-16T06:51:07.485" v="283"/>
-          <ac:spMkLst>
-            <pc:docMk/>
-            <pc:sldMk cId="3192380798" sldId="274"/>
-            <ac:spMk id="2" creationId="{01EEEC5D-AE76-482E-9BDB-4391F6FFC714}"/>
-          </ac:spMkLst>
-        </pc:spChg>
-        <pc:spChg chg="mod">
-          <ac:chgData name="Mohammed Fasha" userId="cc64f42d-a1a6-4f08-b97b-0c37f877119f" providerId="ADAL" clId="{985CD171-9E4A-4264-B045-872AAA800AE3}" dt="2024-10-16T07:06:45.628" v="449" actId="27636"/>
-          <ac:spMkLst>
-            <pc:docMk/>
-            <pc:sldMk cId="3192380798" sldId="274"/>
-            <ac:spMk id="3" creationId="{D2295298-8EE1-4945-B5D5-F3017888096E}"/>
-          </ac:spMkLst>
-        </pc:spChg>
-        <pc:picChg chg="add del mod">
-          <ac:chgData name="Mohammed Fasha" userId="cc64f42d-a1a6-4f08-b97b-0c37f877119f" providerId="ADAL" clId="{985CD171-9E4A-4264-B045-872AAA800AE3}" dt="2024-10-16T07:06:37.910" v="445"/>
-          <ac:picMkLst>
-            <pc:docMk/>
-            <pc:sldMk cId="3192380798" sldId="274"/>
-            <ac:picMk id="4" creationId="{E35FA6C1-C249-4061-A574-EC4630D8B6B5}"/>
-          </ac:picMkLst>
-        </pc:picChg>
-        <pc:picChg chg="add">
-          <ac:chgData name="Mohammed Fasha" userId="cc64f42d-a1a6-4f08-b97b-0c37f877119f" providerId="ADAL" clId="{985CD171-9E4A-4264-B045-872AAA800AE3}" dt="2024-10-16T07:06:40.394" v="446"/>
-          <ac:picMkLst>
-            <pc:docMk/>
-            <pc:sldMk cId="3192380798" sldId="274"/>
-            <ac:picMk id="5" creationId="{DCCD9F40-F7FE-4494-BB32-C2D7AF916061}"/>
-          </ac:picMkLst>
-        </pc:picChg>
       </pc:sldChg>
       <pc:sldChg chg="addSp modSp add">
         <pc:chgData name="Mohammed Fasha" userId="cc64f42d-a1a6-4f08-b97b-0c37f877119f" providerId="ADAL" clId="{985CD171-9E4A-4264-B045-872AAA800AE3}" dt="2024-10-16T07:07:23.747" v="460" actId="20577"/>
@@ -1541,30 +546,6 @@
           <pc:docMk/>
           <pc:sldMk cId="3898002179" sldId="275"/>
         </pc:sldMkLst>
-        <pc:spChg chg="mod">
-          <ac:chgData name="Mohammed Fasha" userId="cc64f42d-a1a6-4f08-b97b-0c37f877119f" providerId="ADAL" clId="{985CD171-9E4A-4264-B045-872AAA800AE3}" dt="2024-10-16T06:53:39.912" v="321" actId="20577"/>
-          <ac:spMkLst>
-            <pc:docMk/>
-            <pc:sldMk cId="3898002179" sldId="275"/>
-            <ac:spMk id="2" creationId="{A41507DF-990C-4C58-A50D-C80F4672B8E7}"/>
-          </ac:spMkLst>
-        </pc:spChg>
-        <pc:spChg chg="mod">
-          <ac:chgData name="Mohammed Fasha" userId="cc64f42d-a1a6-4f08-b97b-0c37f877119f" providerId="ADAL" clId="{985CD171-9E4A-4264-B045-872AAA800AE3}" dt="2024-10-16T07:07:23.747" v="460" actId="20577"/>
-          <ac:spMkLst>
-            <pc:docMk/>
-            <pc:sldMk cId="3898002179" sldId="275"/>
-            <ac:spMk id="3" creationId="{6F60F422-6C8B-4350-9DB1-462B6D921C76}"/>
-          </ac:spMkLst>
-        </pc:spChg>
-        <pc:picChg chg="add mod">
-          <ac:chgData name="Mohammed Fasha" userId="cc64f42d-a1a6-4f08-b97b-0c37f877119f" providerId="ADAL" clId="{985CD171-9E4A-4264-B045-872AAA800AE3}" dt="2024-10-16T07:07:12.400" v="454" actId="1076"/>
-          <ac:picMkLst>
-            <pc:docMk/>
-            <pc:sldMk cId="3898002179" sldId="275"/>
-            <ac:picMk id="4" creationId="{75F5472F-A08E-4300-8DAE-FAA0E2CB4AA0}"/>
-          </ac:picMkLst>
-        </pc:picChg>
       </pc:sldChg>
       <pc:sldChg chg="addSp modSp add">
         <pc:chgData name="Mohammed Fasha" userId="cc64f42d-a1a6-4f08-b97b-0c37f877119f" providerId="ADAL" clId="{985CD171-9E4A-4264-B045-872AAA800AE3}" dt="2024-10-16T07:07:35.379" v="465" actId="27636"/>
@@ -1572,30 +553,6 @@
           <pc:docMk/>
           <pc:sldMk cId="1503352162" sldId="276"/>
         </pc:sldMkLst>
-        <pc:spChg chg="mod">
-          <ac:chgData name="Mohammed Fasha" userId="cc64f42d-a1a6-4f08-b97b-0c37f877119f" providerId="ADAL" clId="{985CD171-9E4A-4264-B045-872AAA800AE3}" dt="2024-10-16T06:54:09.942" v="331"/>
-          <ac:spMkLst>
-            <pc:docMk/>
-            <pc:sldMk cId="1503352162" sldId="276"/>
-            <ac:spMk id="2" creationId="{A41507DF-990C-4C58-A50D-C80F4672B8E7}"/>
-          </ac:spMkLst>
-        </pc:spChg>
-        <pc:spChg chg="mod">
-          <ac:chgData name="Mohammed Fasha" userId="cc64f42d-a1a6-4f08-b97b-0c37f877119f" providerId="ADAL" clId="{985CD171-9E4A-4264-B045-872AAA800AE3}" dt="2024-10-16T07:07:35.379" v="465" actId="27636"/>
-          <ac:spMkLst>
-            <pc:docMk/>
-            <pc:sldMk cId="1503352162" sldId="276"/>
-            <ac:spMk id="3" creationId="{6F60F422-6C8B-4350-9DB1-462B6D921C76}"/>
-          </ac:spMkLst>
-        </pc:spChg>
-        <pc:picChg chg="add">
-          <ac:chgData name="Mohammed Fasha" userId="cc64f42d-a1a6-4f08-b97b-0c37f877119f" providerId="ADAL" clId="{985CD171-9E4A-4264-B045-872AAA800AE3}" dt="2024-10-16T07:07:32.649" v="463"/>
-          <ac:picMkLst>
-            <pc:docMk/>
-            <pc:sldMk cId="1503352162" sldId="276"/>
-            <ac:picMk id="4" creationId="{6CB6DC69-0647-411B-B8F1-05D615751A44}"/>
-          </ac:picMkLst>
-        </pc:picChg>
       </pc:sldChg>
       <pc:sldChg chg="addSp delSp modSp add">
         <pc:chgData name="Mohammed Fasha" userId="cc64f42d-a1a6-4f08-b97b-0c37f877119f" providerId="ADAL" clId="{985CD171-9E4A-4264-B045-872AAA800AE3}" dt="2024-10-16T07:28:38.184" v="537" actId="948"/>
@@ -1603,238 +560,6 @@
           <pc:docMk/>
           <pc:sldMk cId="1260131707" sldId="277"/>
         </pc:sldMkLst>
-        <pc:spChg chg="del">
-          <ac:chgData name="Mohammed Fasha" userId="cc64f42d-a1a6-4f08-b97b-0c37f877119f" providerId="ADAL" clId="{985CD171-9E4A-4264-B045-872AAA800AE3}" dt="2024-10-16T07:19:49.381" v="504"/>
-          <ac:spMkLst>
-            <pc:docMk/>
-            <pc:sldMk cId="1260131707" sldId="277"/>
-            <ac:spMk id="2" creationId="{3CAF7544-BA7E-41E8-894A-3632197EA9B4}"/>
-          </ac:spMkLst>
-        </pc:spChg>
-        <pc:spChg chg="add del">
-          <ac:chgData name="Mohammed Fasha" userId="cc64f42d-a1a6-4f08-b97b-0c37f877119f" providerId="ADAL" clId="{985CD171-9E4A-4264-B045-872AAA800AE3}" dt="2024-10-16T07:19:49.381" v="504"/>
-          <ac:spMkLst>
-            <pc:docMk/>
-            <pc:sldMk cId="1260131707" sldId="277"/>
-            <ac:spMk id="3" creationId="{EBB023EE-AD63-40DF-897F-AA511ACD459A}"/>
-          </ac:spMkLst>
-        </pc:spChg>
-        <pc:graphicFrameChg chg="add del mod">
-          <ac:chgData name="Mohammed Fasha" userId="cc64f42d-a1a6-4f08-b97b-0c37f877119f" providerId="ADAL" clId="{985CD171-9E4A-4264-B045-872AAA800AE3}" dt="2024-10-16T07:19:44.296" v="503"/>
-          <ac:graphicFrameMkLst>
-            <pc:docMk/>
-            <pc:sldMk cId="1260131707" sldId="277"/>
-            <ac:graphicFrameMk id="4" creationId="{ACEDFE53-59B6-456A-AB75-21FEBF8B6478}"/>
-          </ac:graphicFrameMkLst>
-        </pc:graphicFrameChg>
-        <pc:graphicFrameChg chg="add del">
-          <ac:chgData name="Mohammed Fasha" userId="cc64f42d-a1a6-4f08-b97b-0c37f877119f" providerId="ADAL" clId="{985CD171-9E4A-4264-B045-872AAA800AE3}" dt="2024-10-16T07:19:44.296" v="503"/>
-          <ac:graphicFrameMkLst>
-            <pc:docMk/>
-            <pc:sldMk cId="1260131707" sldId="277"/>
-            <ac:graphicFrameMk id="5" creationId="{9C9C5843-01FA-4091-8913-95F9F6C9BA61}"/>
-          </ac:graphicFrameMkLst>
-        </pc:graphicFrameChg>
-        <pc:graphicFrameChg chg="add del">
-          <ac:chgData name="Mohammed Fasha" userId="cc64f42d-a1a6-4f08-b97b-0c37f877119f" providerId="ADAL" clId="{985CD171-9E4A-4264-B045-872AAA800AE3}" dt="2024-10-16T07:19:44.296" v="503"/>
-          <ac:graphicFrameMkLst>
-            <pc:docMk/>
-            <pc:sldMk cId="1260131707" sldId="277"/>
-            <ac:graphicFrameMk id="6" creationId="{95D3A693-7F8E-44F8-8024-79E6FA659F7F}"/>
-          </ac:graphicFrameMkLst>
-        </pc:graphicFrameChg>
-        <pc:graphicFrameChg chg="add del">
-          <ac:chgData name="Mohammed Fasha" userId="cc64f42d-a1a6-4f08-b97b-0c37f877119f" providerId="ADAL" clId="{985CD171-9E4A-4264-B045-872AAA800AE3}" dt="2024-10-16T07:19:44.296" v="503"/>
-          <ac:graphicFrameMkLst>
-            <pc:docMk/>
-            <pc:sldMk cId="1260131707" sldId="277"/>
-            <ac:graphicFrameMk id="7" creationId="{359536C2-38BF-4406-A3B3-A8EC7AF4D360}"/>
-          </ac:graphicFrameMkLst>
-        </pc:graphicFrameChg>
-        <pc:graphicFrameChg chg="add del">
-          <ac:chgData name="Mohammed Fasha" userId="cc64f42d-a1a6-4f08-b97b-0c37f877119f" providerId="ADAL" clId="{985CD171-9E4A-4264-B045-872AAA800AE3}" dt="2024-10-16T07:19:44.296" v="503"/>
-          <ac:graphicFrameMkLst>
-            <pc:docMk/>
-            <pc:sldMk cId="1260131707" sldId="277"/>
-            <ac:graphicFrameMk id="8" creationId="{6B3EE3F9-8A6A-4DF7-AC14-94EF951661FD}"/>
-          </ac:graphicFrameMkLst>
-        </pc:graphicFrameChg>
-        <pc:graphicFrameChg chg="add del">
-          <ac:chgData name="Mohammed Fasha" userId="cc64f42d-a1a6-4f08-b97b-0c37f877119f" providerId="ADAL" clId="{985CD171-9E4A-4264-B045-872AAA800AE3}" dt="2024-10-16T07:19:44.296" v="503"/>
-          <ac:graphicFrameMkLst>
-            <pc:docMk/>
-            <pc:sldMk cId="1260131707" sldId="277"/>
-            <ac:graphicFrameMk id="9" creationId="{24FBF006-0129-4B9C-BC58-5BBA0B829709}"/>
-          </ac:graphicFrameMkLst>
-        </pc:graphicFrameChg>
-        <pc:graphicFrameChg chg="add del">
-          <ac:chgData name="Mohammed Fasha" userId="cc64f42d-a1a6-4f08-b97b-0c37f877119f" providerId="ADAL" clId="{985CD171-9E4A-4264-B045-872AAA800AE3}" dt="2024-10-16T07:19:44.296" v="503"/>
-          <ac:graphicFrameMkLst>
-            <pc:docMk/>
-            <pc:sldMk cId="1260131707" sldId="277"/>
-            <ac:graphicFrameMk id="10" creationId="{30A1A9AD-7625-49F4-87D3-88315B5A4BEE}"/>
-          </ac:graphicFrameMkLst>
-        </pc:graphicFrameChg>
-        <pc:graphicFrameChg chg="add del">
-          <ac:chgData name="Mohammed Fasha" userId="cc64f42d-a1a6-4f08-b97b-0c37f877119f" providerId="ADAL" clId="{985CD171-9E4A-4264-B045-872AAA800AE3}" dt="2024-10-16T07:19:44.296" v="503"/>
-          <ac:graphicFrameMkLst>
-            <pc:docMk/>
-            <pc:sldMk cId="1260131707" sldId="277"/>
-            <ac:graphicFrameMk id="11" creationId="{34A95722-F01A-420D-BE36-09D1D488CF66}"/>
-          </ac:graphicFrameMkLst>
-        </pc:graphicFrameChg>
-        <pc:graphicFrameChg chg="add del">
-          <ac:chgData name="Mohammed Fasha" userId="cc64f42d-a1a6-4f08-b97b-0c37f877119f" providerId="ADAL" clId="{985CD171-9E4A-4264-B045-872AAA800AE3}" dt="2024-10-16T07:19:44.296" v="503"/>
-          <ac:graphicFrameMkLst>
-            <pc:docMk/>
-            <pc:sldMk cId="1260131707" sldId="277"/>
-            <ac:graphicFrameMk id="12" creationId="{2C4A27AF-D82D-466D-B6A2-F266CB80A867}"/>
-          </ac:graphicFrameMkLst>
-        </pc:graphicFrameChg>
-        <pc:graphicFrameChg chg="add del">
-          <ac:chgData name="Mohammed Fasha" userId="cc64f42d-a1a6-4f08-b97b-0c37f877119f" providerId="ADAL" clId="{985CD171-9E4A-4264-B045-872AAA800AE3}" dt="2024-10-16T07:19:44.296" v="503"/>
-          <ac:graphicFrameMkLst>
-            <pc:docMk/>
-            <pc:sldMk cId="1260131707" sldId="277"/>
-            <ac:graphicFrameMk id="13" creationId="{640EB34E-B64F-4FA8-ADF1-30B06B684B83}"/>
-          </ac:graphicFrameMkLst>
-        </pc:graphicFrameChg>
-        <pc:graphicFrameChg chg="add del">
-          <ac:chgData name="Mohammed Fasha" userId="cc64f42d-a1a6-4f08-b97b-0c37f877119f" providerId="ADAL" clId="{985CD171-9E4A-4264-B045-872AAA800AE3}" dt="2024-10-16T07:19:44.296" v="503"/>
-          <ac:graphicFrameMkLst>
-            <pc:docMk/>
-            <pc:sldMk cId="1260131707" sldId="277"/>
-            <ac:graphicFrameMk id="14" creationId="{3A90D87B-2A27-41BD-BE33-CF6EA3E6A254}"/>
-          </ac:graphicFrameMkLst>
-        </pc:graphicFrameChg>
-        <pc:graphicFrameChg chg="add del">
-          <ac:chgData name="Mohammed Fasha" userId="cc64f42d-a1a6-4f08-b97b-0c37f877119f" providerId="ADAL" clId="{985CD171-9E4A-4264-B045-872AAA800AE3}" dt="2024-10-16T07:19:44.296" v="503"/>
-          <ac:graphicFrameMkLst>
-            <pc:docMk/>
-            <pc:sldMk cId="1260131707" sldId="277"/>
-            <ac:graphicFrameMk id="15" creationId="{E3EF7DAB-BE1D-4B12-9905-3E769D4601AC}"/>
-          </ac:graphicFrameMkLst>
-        </pc:graphicFrameChg>
-        <pc:graphicFrameChg chg="add del">
-          <ac:chgData name="Mohammed Fasha" userId="cc64f42d-a1a6-4f08-b97b-0c37f877119f" providerId="ADAL" clId="{985CD171-9E4A-4264-B045-872AAA800AE3}" dt="2024-10-16T07:19:44.296" v="503"/>
-          <ac:graphicFrameMkLst>
-            <pc:docMk/>
-            <pc:sldMk cId="1260131707" sldId="277"/>
-            <ac:graphicFrameMk id="16" creationId="{14CFECED-ADAF-487A-99A0-BC2DBA2C7869}"/>
-          </ac:graphicFrameMkLst>
-        </pc:graphicFrameChg>
-        <pc:graphicFrameChg chg="add del">
-          <ac:chgData name="Mohammed Fasha" userId="cc64f42d-a1a6-4f08-b97b-0c37f877119f" providerId="ADAL" clId="{985CD171-9E4A-4264-B045-872AAA800AE3}" dt="2024-10-16T07:19:51.180" v="506"/>
-          <ac:graphicFrameMkLst>
-            <pc:docMk/>
-            <pc:sldMk cId="1260131707" sldId="277"/>
-            <ac:graphicFrameMk id="17" creationId="{B5B395F2-94F3-4CF7-83E6-4467B0F1D634}"/>
-          </ac:graphicFrameMkLst>
-        </pc:graphicFrameChg>
-        <pc:graphicFrameChg chg="add del">
-          <ac:chgData name="Mohammed Fasha" userId="cc64f42d-a1a6-4f08-b97b-0c37f877119f" providerId="ADAL" clId="{985CD171-9E4A-4264-B045-872AAA800AE3}" dt="2024-10-16T07:19:51.180" v="506"/>
-          <ac:graphicFrameMkLst>
-            <pc:docMk/>
-            <pc:sldMk cId="1260131707" sldId="277"/>
-            <ac:graphicFrameMk id="18" creationId="{E36CA22F-E1CB-438B-B08F-F481AF0EC6DA}"/>
-          </ac:graphicFrameMkLst>
-        </pc:graphicFrameChg>
-        <pc:graphicFrameChg chg="add del">
-          <ac:chgData name="Mohammed Fasha" userId="cc64f42d-a1a6-4f08-b97b-0c37f877119f" providerId="ADAL" clId="{985CD171-9E4A-4264-B045-872AAA800AE3}" dt="2024-10-16T07:19:51.180" v="506"/>
-          <ac:graphicFrameMkLst>
-            <pc:docMk/>
-            <pc:sldMk cId="1260131707" sldId="277"/>
-            <ac:graphicFrameMk id="19" creationId="{C7B81BD9-4F11-4CB5-9EF9-B03C952260F0}"/>
-          </ac:graphicFrameMkLst>
-        </pc:graphicFrameChg>
-        <pc:graphicFrameChg chg="add del">
-          <ac:chgData name="Mohammed Fasha" userId="cc64f42d-a1a6-4f08-b97b-0c37f877119f" providerId="ADAL" clId="{985CD171-9E4A-4264-B045-872AAA800AE3}" dt="2024-10-16T07:19:51.180" v="506"/>
-          <ac:graphicFrameMkLst>
-            <pc:docMk/>
-            <pc:sldMk cId="1260131707" sldId="277"/>
-            <ac:graphicFrameMk id="20" creationId="{9D0FFB07-37BF-4CF4-A2B8-3D671B9F41FF}"/>
-          </ac:graphicFrameMkLst>
-        </pc:graphicFrameChg>
-        <pc:graphicFrameChg chg="add del">
-          <ac:chgData name="Mohammed Fasha" userId="cc64f42d-a1a6-4f08-b97b-0c37f877119f" providerId="ADAL" clId="{985CD171-9E4A-4264-B045-872AAA800AE3}" dt="2024-10-16T07:19:51.180" v="506"/>
-          <ac:graphicFrameMkLst>
-            <pc:docMk/>
-            <pc:sldMk cId="1260131707" sldId="277"/>
-            <ac:graphicFrameMk id="21" creationId="{C65F4037-1E56-4A0C-9B62-26F45B4B2D6F}"/>
-          </ac:graphicFrameMkLst>
-        </pc:graphicFrameChg>
-        <pc:graphicFrameChg chg="add del">
-          <ac:chgData name="Mohammed Fasha" userId="cc64f42d-a1a6-4f08-b97b-0c37f877119f" providerId="ADAL" clId="{985CD171-9E4A-4264-B045-872AAA800AE3}" dt="2024-10-16T07:19:51.180" v="506"/>
-          <ac:graphicFrameMkLst>
-            <pc:docMk/>
-            <pc:sldMk cId="1260131707" sldId="277"/>
-            <ac:graphicFrameMk id="22" creationId="{47F26621-F3F7-432C-9AB6-0FBFEE1903C2}"/>
-          </ac:graphicFrameMkLst>
-        </pc:graphicFrameChg>
-        <pc:graphicFrameChg chg="add del">
-          <ac:chgData name="Mohammed Fasha" userId="cc64f42d-a1a6-4f08-b97b-0c37f877119f" providerId="ADAL" clId="{985CD171-9E4A-4264-B045-872AAA800AE3}" dt="2024-10-16T07:19:51.180" v="506"/>
-          <ac:graphicFrameMkLst>
-            <pc:docMk/>
-            <pc:sldMk cId="1260131707" sldId="277"/>
-            <ac:graphicFrameMk id="23" creationId="{53CE266B-6254-4D3B-8A69-305203A77EB5}"/>
-          </ac:graphicFrameMkLst>
-        </pc:graphicFrameChg>
-        <pc:graphicFrameChg chg="add del">
-          <ac:chgData name="Mohammed Fasha" userId="cc64f42d-a1a6-4f08-b97b-0c37f877119f" providerId="ADAL" clId="{985CD171-9E4A-4264-B045-872AAA800AE3}" dt="2024-10-16T07:19:51.180" v="506"/>
-          <ac:graphicFrameMkLst>
-            <pc:docMk/>
-            <pc:sldMk cId="1260131707" sldId="277"/>
-            <ac:graphicFrameMk id="24" creationId="{5B78069B-46A3-4EE1-9FF1-40CB818E0634}"/>
-          </ac:graphicFrameMkLst>
-        </pc:graphicFrameChg>
-        <pc:graphicFrameChg chg="add del">
-          <ac:chgData name="Mohammed Fasha" userId="cc64f42d-a1a6-4f08-b97b-0c37f877119f" providerId="ADAL" clId="{985CD171-9E4A-4264-B045-872AAA800AE3}" dt="2024-10-16T07:19:51.180" v="506"/>
-          <ac:graphicFrameMkLst>
-            <pc:docMk/>
-            <pc:sldMk cId="1260131707" sldId="277"/>
-            <ac:graphicFrameMk id="25" creationId="{09D34AA0-8E55-408D-BBFC-A2B6FE659242}"/>
-          </ac:graphicFrameMkLst>
-        </pc:graphicFrameChg>
-        <pc:graphicFrameChg chg="add del">
-          <ac:chgData name="Mohammed Fasha" userId="cc64f42d-a1a6-4f08-b97b-0c37f877119f" providerId="ADAL" clId="{985CD171-9E4A-4264-B045-872AAA800AE3}" dt="2024-10-16T07:19:51.180" v="506"/>
-          <ac:graphicFrameMkLst>
-            <pc:docMk/>
-            <pc:sldMk cId="1260131707" sldId="277"/>
-            <ac:graphicFrameMk id="26" creationId="{C81549BB-9079-4886-BEE6-A40F1AB17AB4}"/>
-          </ac:graphicFrameMkLst>
-        </pc:graphicFrameChg>
-        <pc:graphicFrameChg chg="add del">
-          <ac:chgData name="Mohammed Fasha" userId="cc64f42d-a1a6-4f08-b97b-0c37f877119f" providerId="ADAL" clId="{985CD171-9E4A-4264-B045-872AAA800AE3}" dt="2024-10-16T07:19:51.180" v="506"/>
-          <ac:graphicFrameMkLst>
-            <pc:docMk/>
-            <pc:sldMk cId="1260131707" sldId="277"/>
-            <ac:graphicFrameMk id="27" creationId="{C062C748-EDDD-4F0C-A57B-8ADE6F0D3C58}"/>
-          </ac:graphicFrameMkLst>
-        </pc:graphicFrameChg>
-        <pc:graphicFrameChg chg="add del">
-          <ac:chgData name="Mohammed Fasha" userId="cc64f42d-a1a6-4f08-b97b-0c37f877119f" providerId="ADAL" clId="{985CD171-9E4A-4264-B045-872AAA800AE3}" dt="2024-10-16T07:19:51.180" v="506"/>
-          <ac:graphicFrameMkLst>
-            <pc:docMk/>
-            <pc:sldMk cId="1260131707" sldId="277"/>
-            <ac:graphicFrameMk id="28" creationId="{E090AF22-332D-4E52-A78C-D3E1BA769768}"/>
-          </ac:graphicFrameMkLst>
-        </pc:graphicFrameChg>
-        <pc:graphicFrameChg chg="add del">
-          <ac:chgData name="Mohammed Fasha" userId="cc64f42d-a1a6-4f08-b97b-0c37f877119f" providerId="ADAL" clId="{985CD171-9E4A-4264-B045-872AAA800AE3}" dt="2024-10-16T07:19:51.180" v="506"/>
-          <ac:graphicFrameMkLst>
-            <pc:docMk/>
-            <pc:sldMk cId="1260131707" sldId="277"/>
-            <ac:graphicFrameMk id="29" creationId="{683827F0-81A2-47AB-AA05-4ABBFB276931}"/>
-          </ac:graphicFrameMkLst>
-        </pc:graphicFrameChg>
-        <pc:graphicFrameChg chg="add mod modGraphic">
-          <ac:chgData name="Mohammed Fasha" userId="cc64f42d-a1a6-4f08-b97b-0c37f877119f" providerId="ADAL" clId="{985CD171-9E4A-4264-B045-872AAA800AE3}" dt="2024-10-16T07:28:38.184" v="537" actId="948"/>
-          <ac:graphicFrameMkLst>
-            <pc:docMk/>
-            <pc:sldMk cId="1260131707" sldId="277"/>
-            <ac:graphicFrameMk id="30" creationId="{2E29D0CD-8485-4FE5-9164-CC49877EAD54}"/>
-          </ac:graphicFrameMkLst>
-        </pc:graphicFrameChg>
       </pc:sldChg>
       <pc:sldChg chg="addSp modSp add ord">
         <pc:chgData name="Mohammed Fasha" userId="cc64f42d-a1a6-4f08-b97b-0c37f877119f" providerId="ADAL" clId="{985CD171-9E4A-4264-B045-872AAA800AE3}" dt="2024-10-16T07:16:54.093" v="501" actId="27636"/>
@@ -1842,30 +567,6 @@
           <pc:docMk/>
           <pc:sldMk cId="1324937023" sldId="280"/>
         </pc:sldMkLst>
-        <pc:spChg chg="mod">
-          <ac:chgData name="Mohammed Fasha" userId="cc64f42d-a1a6-4f08-b97b-0c37f877119f" providerId="ADAL" clId="{985CD171-9E4A-4264-B045-872AAA800AE3}" dt="2024-10-16T07:15:56.745" v="492" actId="20577"/>
-          <ac:spMkLst>
-            <pc:docMk/>
-            <pc:sldMk cId="1324937023" sldId="280"/>
-            <ac:spMk id="2" creationId="{3CAF7544-BA7E-41E8-894A-3632197EA9B4}"/>
-          </ac:spMkLst>
-        </pc:spChg>
-        <pc:spChg chg="mod">
-          <ac:chgData name="Mohammed Fasha" userId="cc64f42d-a1a6-4f08-b97b-0c37f877119f" providerId="ADAL" clId="{985CD171-9E4A-4264-B045-872AAA800AE3}" dt="2024-10-16T07:16:54.093" v="501" actId="27636"/>
-          <ac:spMkLst>
-            <pc:docMk/>
-            <pc:sldMk cId="1324937023" sldId="280"/>
-            <ac:spMk id="3" creationId="{EBB023EE-AD63-40DF-897F-AA511ACD459A}"/>
-          </ac:spMkLst>
-        </pc:spChg>
-        <pc:picChg chg="add mod">
-          <ac:chgData name="Mohammed Fasha" userId="cc64f42d-a1a6-4f08-b97b-0c37f877119f" providerId="ADAL" clId="{985CD171-9E4A-4264-B045-872AAA800AE3}" dt="2024-10-16T07:16:51.794" v="499" actId="1076"/>
-          <ac:picMkLst>
-            <pc:docMk/>
-            <pc:sldMk cId="1324937023" sldId="280"/>
-            <ac:picMk id="8194" creationId="{F419425A-90B8-4B60-B39F-65C44FC875BF}"/>
-          </ac:picMkLst>
-        </pc:picChg>
       </pc:sldChg>
       <pc:sldChg chg="addSp delSp modSp add">
         <pc:chgData name="Mohammed Fasha" userId="cc64f42d-a1a6-4f08-b97b-0c37f877119f" providerId="ADAL" clId="{985CD171-9E4A-4264-B045-872AAA800AE3}" dt="2024-10-16T07:44:30.797" v="606" actId="5793"/>
@@ -1873,30 +574,6 @@
           <pc:docMk/>
           <pc:sldMk cId="4085727926" sldId="281"/>
         </pc:sldMkLst>
-        <pc:spChg chg="add mod">
-          <ac:chgData name="Mohammed Fasha" userId="cc64f42d-a1a6-4f08-b97b-0c37f877119f" providerId="ADAL" clId="{985CD171-9E4A-4264-B045-872AAA800AE3}" dt="2024-10-16T07:41:13.767" v="578" actId="20577"/>
-          <ac:spMkLst>
-            <pc:docMk/>
-            <pc:sldMk cId="4085727926" sldId="281"/>
-            <ac:spMk id="2" creationId="{51B680C5-701B-4CA0-AACA-6ADA5A25CC67}"/>
-          </ac:spMkLst>
-        </pc:spChg>
-        <pc:spChg chg="add del mod">
-          <ac:chgData name="Mohammed Fasha" userId="cc64f42d-a1a6-4f08-b97b-0c37f877119f" providerId="ADAL" clId="{985CD171-9E4A-4264-B045-872AAA800AE3}" dt="2024-10-16T07:44:22.319" v="603"/>
-          <ac:spMkLst>
-            <pc:docMk/>
-            <pc:sldMk cId="4085727926" sldId="281"/>
-            <ac:spMk id="3" creationId="{69C1A506-ECAB-43C1-9524-E52808499CDE}"/>
-          </ac:spMkLst>
-        </pc:spChg>
-        <pc:spChg chg="add mod">
-          <ac:chgData name="Mohammed Fasha" userId="cc64f42d-a1a6-4f08-b97b-0c37f877119f" providerId="ADAL" clId="{985CD171-9E4A-4264-B045-872AAA800AE3}" dt="2024-10-16T07:44:30.797" v="606" actId="5793"/>
-          <ac:spMkLst>
-            <pc:docMk/>
-            <pc:sldMk cId="4085727926" sldId="281"/>
-            <ac:spMk id="4" creationId="{B04DCFCF-19A8-48A6-B38D-E45B8F507F3E}"/>
-          </ac:spMkLst>
-        </pc:spChg>
       </pc:sldChg>
       <pc:sldChg chg="addSp modSp add">
         <pc:chgData name="Mohammed Fasha" userId="cc64f42d-a1a6-4f08-b97b-0c37f877119f" providerId="ADAL" clId="{985CD171-9E4A-4264-B045-872AAA800AE3}" dt="2024-10-16T08:01:33.772" v="621" actId="403"/>
@@ -1904,14 +581,6 @@
           <pc:docMk/>
           <pc:sldMk cId="156012141" sldId="282"/>
         </pc:sldMkLst>
-        <pc:graphicFrameChg chg="add mod modGraphic">
-          <ac:chgData name="Mohammed Fasha" userId="cc64f42d-a1a6-4f08-b97b-0c37f877119f" providerId="ADAL" clId="{985CD171-9E4A-4264-B045-872AAA800AE3}" dt="2024-10-16T08:01:33.772" v="621" actId="403"/>
-          <ac:graphicFrameMkLst>
-            <pc:docMk/>
-            <pc:sldMk cId="156012141" sldId="282"/>
-            <ac:graphicFrameMk id="2" creationId="{DC54536A-B01D-4B91-BA55-F02519081599}"/>
-          </ac:graphicFrameMkLst>
-        </pc:graphicFrameChg>
       </pc:sldChg>
       <pc:sldChg chg="addSp modSp add">
         <pc:chgData name="Mohammed Fasha" userId="cc64f42d-a1a6-4f08-b97b-0c37f877119f" providerId="ADAL" clId="{985CD171-9E4A-4264-B045-872AAA800AE3}" dt="2024-10-16T08:02:59.311" v="633" actId="404"/>
@@ -1919,22 +588,45 @@
           <pc:docMk/>
           <pc:sldMk cId="248623450" sldId="284"/>
         </pc:sldMkLst>
-        <pc:graphicFrameChg chg="mod modGraphic">
-          <ac:chgData name="Mohammed Fasha" userId="cc64f42d-a1a6-4f08-b97b-0c37f877119f" providerId="ADAL" clId="{985CD171-9E4A-4264-B045-872AAA800AE3}" dt="2024-10-16T08:02:52.510" v="630" actId="403"/>
-          <ac:graphicFrameMkLst>
+      </pc:sldChg>
+    </pc:docChg>
+  </pc:docChgLst>
+  <pc:docChgLst>
+    <pc:chgData name="Mohammed Fasha" userId="S::mohammed.fasha@uop.edu.jo::cc64f42d-a1a6-4f08-b97b-0c37f877119f" providerId="AD" clId="Web-{FEA592C4-A881-BCBA-C373-5668A186DED4}"/>
+    <pc:docChg chg="addSld delSld modSld">
+      <pc:chgData name="Mohammed Fasha" userId="S::mohammed.fasha@uop.edu.jo::cc64f42d-a1a6-4f08-b97b-0c37f877119f" providerId="AD" clId="Web-{FEA592C4-A881-BCBA-C373-5668A186DED4}" dt="2025-07-24T07:58:00.722" v="7" actId="14100"/>
+      <pc:docMkLst>
+        <pc:docMk/>
+      </pc:docMkLst>
+      <pc:sldChg chg="new del">
+        <pc:chgData name="Mohammed Fasha" userId="S::mohammed.fasha@uop.edu.jo::cc64f42d-a1a6-4f08-b97b-0c37f877119f" providerId="AD" clId="Web-{FEA592C4-A881-BCBA-C373-5668A186DED4}" dt="2025-07-24T07:57:32.674" v="2"/>
+        <pc:sldMkLst>
+          <pc:docMk/>
+          <pc:sldMk cId="1218970784" sldId="466"/>
+        </pc:sldMkLst>
+      </pc:sldChg>
+      <pc:sldChg chg="modSp add">
+        <pc:chgData name="Mohammed Fasha" userId="S::mohammed.fasha@uop.edu.jo::cc64f42d-a1a6-4f08-b97b-0c37f877119f" providerId="AD" clId="Web-{FEA592C4-A881-BCBA-C373-5668A186DED4}" dt="2025-07-24T07:58:00.722" v="7" actId="14100"/>
+        <pc:sldMkLst>
+          <pc:docMk/>
+          <pc:sldMk cId="1915583685" sldId="485"/>
+        </pc:sldMkLst>
+        <pc:spChg chg="mod">
+          <ac:chgData name="Mohammed Fasha" userId="S::mohammed.fasha@uop.edu.jo::cc64f42d-a1a6-4f08-b97b-0c37f877119f" providerId="AD" clId="Web-{FEA592C4-A881-BCBA-C373-5668A186DED4}" dt="2025-07-24T07:58:00.722" v="7" actId="14100"/>
+          <ac:spMkLst>
             <pc:docMk/>
-            <pc:sldMk cId="248623450" sldId="284"/>
-            <ac:graphicFrameMk id="2" creationId="{DC54536A-B01D-4B91-BA55-F02519081599}"/>
-          </ac:graphicFrameMkLst>
-        </pc:graphicFrameChg>
-        <pc:graphicFrameChg chg="add mod modGraphic">
-          <ac:chgData name="Mohammed Fasha" userId="cc64f42d-a1a6-4f08-b97b-0c37f877119f" providerId="ADAL" clId="{985CD171-9E4A-4264-B045-872AAA800AE3}" dt="2024-10-16T08:02:59.311" v="633" actId="404"/>
-          <ac:graphicFrameMkLst>
+            <pc:sldMk cId="1915583685" sldId="485"/>
+            <ac:spMk id="2" creationId="{7885DAC0-F666-1E70-A069-E0E346810F00}"/>
+          </ac:spMkLst>
+        </pc:spChg>
+        <pc:spChg chg="mod">
+          <ac:chgData name="Mohammed Fasha" userId="S::mohammed.fasha@uop.edu.jo::cc64f42d-a1a6-4f08-b97b-0c37f877119f" providerId="AD" clId="Web-{FEA592C4-A881-BCBA-C373-5668A186DED4}" dt="2025-07-24T07:57:50.987" v="5" actId="20577"/>
+          <ac:spMkLst>
             <pc:docMk/>
-            <pc:sldMk cId="248623450" sldId="284"/>
-            <ac:graphicFrameMk id="3" creationId="{73616EA2-18B4-4F62-B443-30494FB8E868}"/>
-          </ac:graphicFrameMkLst>
-        </pc:graphicFrameChg>
+            <pc:sldMk cId="1915583685" sldId="485"/>
+            <ac:spMk id="3" creationId="{39BF1C2E-CEA4-91E0-9928-E5BCB00A766E}"/>
+          </ac:spMkLst>
+        </pc:spChg>
       </pc:sldChg>
     </pc:docChg>
   </pc:docChgLst>
@@ -2088,7 +780,7 @@
           <a:p>
             <a:fld id="{D83FB9BE-DA6C-46CF-8E77-0CE63E601AD4}" type="datetimeFigureOut">
               <a:rPr lang="en-US" smtClean="0"/>
-              <a:t>3/5/2025</a:t>
+              <a:t>7/24/2025</a:t>
             </a:fld>
             <a:endParaRPr lang="en-US"/>
           </a:p>
@@ -2286,7 +978,7 @@
           <a:p>
             <a:fld id="{D83FB9BE-DA6C-46CF-8E77-0CE63E601AD4}" type="datetimeFigureOut">
               <a:rPr lang="en-US" smtClean="0"/>
-              <a:t>3/5/2025</a:t>
+              <a:t>7/24/2025</a:t>
             </a:fld>
             <a:endParaRPr lang="en-US"/>
           </a:p>
@@ -2494,7 +1186,7 @@
           <a:p>
             <a:fld id="{D83FB9BE-DA6C-46CF-8E77-0CE63E601AD4}" type="datetimeFigureOut">
               <a:rPr lang="en-US" smtClean="0"/>
-              <a:t>3/5/2025</a:t>
+              <a:t>7/24/2025</a:t>
             </a:fld>
             <a:endParaRPr lang="en-US"/>
           </a:p>
@@ -2697,7 +1389,7 @@
           <a:p>
             <a:fld id="{D83FB9BE-DA6C-46CF-8E77-0CE63E601AD4}" type="datetimeFigureOut">
               <a:rPr lang="en-US" smtClean="0"/>
-              <a:t>3/5/2025</a:t>
+              <a:t>7/24/2025</a:t>
             </a:fld>
             <a:endParaRPr lang="en-US"/>
           </a:p>
@@ -2972,7 +1664,7 @@
           <a:p>
             <a:fld id="{D83FB9BE-DA6C-46CF-8E77-0CE63E601AD4}" type="datetimeFigureOut">
               <a:rPr lang="en-US" smtClean="0"/>
-              <a:t>3/5/2025</a:t>
+              <a:t>7/24/2025</a:t>
             </a:fld>
             <a:endParaRPr lang="en-US"/>
           </a:p>
@@ -3237,7 +1929,7 @@
           <a:p>
             <a:fld id="{D83FB9BE-DA6C-46CF-8E77-0CE63E601AD4}" type="datetimeFigureOut">
               <a:rPr lang="en-US" smtClean="0"/>
-              <a:t>3/5/2025</a:t>
+              <a:t>7/24/2025</a:t>
             </a:fld>
             <a:endParaRPr lang="en-US"/>
           </a:p>
@@ -3649,7 +2341,7 @@
           <a:p>
             <a:fld id="{D83FB9BE-DA6C-46CF-8E77-0CE63E601AD4}" type="datetimeFigureOut">
               <a:rPr lang="en-US" smtClean="0"/>
-              <a:t>3/5/2025</a:t>
+              <a:t>7/24/2025</a:t>
             </a:fld>
             <a:endParaRPr lang="en-US"/>
           </a:p>
@@ -3790,7 +2482,7 @@
           <a:p>
             <a:fld id="{D83FB9BE-DA6C-46CF-8E77-0CE63E601AD4}" type="datetimeFigureOut">
               <a:rPr lang="en-US" smtClean="0"/>
-              <a:t>3/5/2025</a:t>
+              <a:t>7/24/2025</a:t>
             </a:fld>
             <a:endParaRPr lang="en-US"/>
           </a:p>
@@ -3903,7 +2595,7 @@
           <a:p>
             <a:fld id="{D83FB9BE-DA6C-46CF-8E77-0CE63E601AD4}" type="datetimeFigureOut">
               <a:rPr lang="en-US" smtClean="0"/>
-              <a:t>3/5/2025</a:t>
+              <a:t>7/24/2025</a:t>
             </a:fld>
             <a:endParaRPr lang="en-US"/>
           </a:p>
@@ -4214,7 +2906,7 @@
           <a:p>
             <a:fld id="{D83FB9BE-DA6C-46CF-8E77-0CE63E601AD4}" type="datetimeFigureOut">
               <a:rPr lang="en-US" smtClean="0"/>
-              <a:t>3/5/2025</a:t>
+              <a:t>7/24/2025</a:t>
             </a:fld>
             <a:endParaRPr lang="en-US"/>
           </a:p>
@@ -4502,7 +3194,7 @@
           <a:p>
             <a:fld id="{D83FB9BE-DA6C-46CF-8E77-0CE63E601AD4}" type="datetimeFigureOut">
               <a:rPr lang="en-US" smtClean="0"/>
-              <a:t>3/5/2025</a:t>
+              <a:t>7/24/2025</a:t>
             </a:fld>
             <a:endParaRPr lang="en-US"/>
           </a:p>
@@ -4743,7 +3435,7 @@
           <a:p>
             <a:fld id="{D83FB9BE-DA6C-46CF-8E77-0CE63E601AD4}" type="datetimeFigureOut">
               <a:rPr lang="en-US" smtClean="0"/>
-              <a:t>3/5/2025</a:t>
+              <a:t>7/24/2025</a:t>
             </a:fld>
             <a:endParaRPr lang="en-US"/>
           </a:p>
@@ -5451,791 +4143,170 @@
       </p:grpSpPr>
       <p:sp>
         <p:nvSpPr>
-          <p:cNvPr id="4" name="Rectangle 3">
+          <p:cNvPr id="2" name="Title 1">
             <a:extLst>
               <a:ext uri="{FF2B5EF4-FFF2-40B4-BE49-F238E27FC236}">
-                <a16:creationId xmlns:a16="http://schemas.microsoft.com/office/drawing/2014/main" id="{A4C2D5F8-BE48-45B5-A4B0-BBBBD52ADF1E}"/>
+                <a16:creationId xmlns:a16="http://schemas.microsoft.com/office/drawing/2014/main" id="{9288F61D-F3F3-4CF5-8002-3AC25EDB8819}"/>
               </a:ext>
             </a:extLst>
           </p:cNvPr>
-          <p:cNvSpPr/>
-          <p:nvPr/>
+          <p:cNvSpPr>
+            <a:spLocks noGrp="1"/>
+          </p:cNvSpPr>
+          <p:nvPr>
+            <p:ph type="title"/>
+          </p:nvPr>
+        </p:nvSpPr>
+        <p:spPr/>
+        <p:txBody>
+          <a:bodyPr/>
+          <a:lstStyle/>
+          <a:p>
+            <a:r>
+              <a:rPr lang="en-US" dirty="0"/>
+              <a:t>1. Business understanding:</a:t>
+            </a:r>
+          </a:p>
+        </p:txBody>
+      </p:sp>
+      <p:sp>
+        <p:nvSpPr>
+          <p:cNvPr id="3" name="Content Placeholder 2">
+            <a:extLst>
+              <a:ext uri="{FF2B5EF4-FFF2-40B4-BE49-F238E27FC236}">
+                <a16:creationId xmlns:a16="http://schemas.microsoft.com/office/drawing/2014/main" id="{21FF2A87-8E89-4813-8BC6-A1CA52285D72}"/>
+              </a:ext>
+            </a:extLst>
+          </p:cNvPr>
+          <p:cNvSpPr>
+            <a:spLocks noGrp="1"/>
+          </p:cNvSpPr>
+          <p:nvPr>
+            <p:ph idx="1"/>
+          </p:nvPr>
         </p:nvSpPr>
         <p:spPr>
           <a:xfrm>
-            <a:off x="319177" y="750010"/>
-            <a:ext cx="11872823" cy="6135013"/>
+            <a:off x="838199" y="1825625"/>
+            <a:ext cx="9142563" cy="4851220"/>
+          </a:xfrm>
+        </p:spPr>
+        <p:txBody>
+          <a:bodyPr>
+            <a:normAutofit fontScale="77500" lnSpcReduction="20000"/>
+          </a:bodyPr>
+          <a:lstStyle/>
+          <a:p>
+            <a:pPr marL="0" indent="0">
+              <a:buNone/>
+            </a:pPr>
+            <a:r>
+              <a:rPr lang="en-US" b="1" dirty="0"/>
+              <a:t>Access situation:</a:t>
+            </a:r>
+            <a:endParaRPr lang="en-US" dirty="0"/>
+          </a:p>
+          <a:p>
+            <a:r>
+              <a:rPr lang="en-US" dirty="0"/>
+              <a:t>It requires a more detailed analysis of facts about all the resources, constraints, assumptions, and others that ought to be considered.</a:t>
+            </a:r>
+          </a:p>
+          <a:p>
+            <a:pPr marL="0" indent="0">
+              <a:buNone/>
+            </a:pPr>
+            <a:r>
+              <a:rPr lang="en-US" b="1" dirty="0"/>
+              <a:t>Determine data mining goals:</a:t>
+            </a:r>
+            <a:endParaRPr lang="en-US" dirty="0"/>
+          </a:p>
+          <a:p>
+            <a:r>
+              <a:rPr lang="en-US" dirty="0"/>
+              <a:t>A business goal states the target of the business terminology. </a:t>
+            </a:r>
+            <a:r>
+              <a:rPr lang="en-US" dirty="0">
+                <a:solidFill>
+                  <a:srgbClr val="FF0000"/>
+                </a:solidFill>
+              </a:rPr>
+              <a:t>For example, increase catalog sales to the existing customer</a:t>
+            </a:r>
+            <a:r>
+              <a:rPr lang="en-US" dirty="0"/>
+              <a:t>.</a:t>
+            </a:r>
+          </a:p>
+          <a:p>
+            <a:r>
+              <a:rPr lang="en-US" dirty="0"/>
+              <a:t>A data mining goal describes the project objectives. For example, It assumes how many objects a customer will buy, given their demographics details (Age, Salary, and City) and the price of the item over the past three years.</a:t>
+            </a:r>
+          </a:p>
+          <a:p>
+            <a:pPr marL="0" indent="0">
+              <a:buNone/>
+            </a:pPr>
+            <a:r>
+              <a:rPr lang="en-US" b="1" dirty="0"/>
+              <a:t>Produce a project plan:</a:t>
+            </a:r>
+            <a:endParaRPr lang="en-US" dirty="0"/>
+          </a:p>
+          <a:p>
+            <a:r>
+              <a:rPr lang="en-US" dirty="0"/>
+              <a:t>It states the targeted plan to accomplish the business and data mining plan.</a:t>
+            </a:r>
+          </a:p>
+          <a:p>
+            <a:r>
+              <a:rPr lang="en-US" dirty="0"/>
+              <a:t>The project plan should define the expected set of steps to be performed during the rest of the project, including the latest technique and better selection of tools.</a:t>
+            </a:r>
+          </a:p>
+          <a:p>
+            <a:endParaRPr lang="en-US" dirty="0"/>
+          </a:p>
+        </p:txBody>
+      </p:sp>
+      <p:pic>
+        <p:nvPicPr>
+          <p:cNvPr id="4" name="Picture 3">
+            <a:extLst>
+              <a:ext uri="{FF2B5EF4-FFF2-40B4-BE49-F238E27FC236}">
+                <a16:creationId xmlns:a16="http://schemas.microsoft.com/office/drawing/2014/main" id="{E78F6ABA-AFCC-4712-A573-B2C8A9E1504B}"/>
+              </a:ext>
+            </a:extLst>
+          </p:cNvPr>
+          <p:cNvPicPr>
+            <a:picLocks noChangeAspect="1"/>
+          </p:cNvPicPr>
+          <p:nvPr/>
+        </p:nvPicPr>
+        <p:blipFill>
+          <a:blip r:embed="rId2"/>
+          <a:stretch>
+            <a:fillRect/>
+          </a:stretch>
+        </p:blipFill>
+        <p:spPr>
+          <a:xfrm>
+            <a:off x="10237670" y="1825625"/>
+            <a:ext cx="1037629" cy="4339176"/>
           </a:xfrm>
           <a:prstGeom prst="rect">
             <a:avLst/>
           </a:prstGeom>
         </p:spPr>
-        <p:txBody>
-          <a:bodyPr wrap="square">
-            <a:spAutoFit/>
-          </a:bodyPr>
-          <a:lstStyle/>
-          <a:p>
-            <a:pPr>
-              <a:spcAft>
-                <a:spcPts val="800"/>
-              </a:spcAft>
-            </a:pPr>
-            <a:r>
-              <a:rPr lang="en-US" sz="1400" b="1" dirty="0">
-                <a:solidFill>
-                  <a:srgbClr val="0070C0"/>
-                </a:solidFill>
-                <a:latin typeface="Times New Roman" panose="02020603050405020304" pitchFamily="18" charset="0"/>
-                <a:ea typeface="Times New Roman" panose="02020603050405020304" pitchFamily="18" charset="0"/>
-                <a:cs typeface="Arial" panose="020B0604020202020204" pitchFamily="34" charset="0"/>
-              </a:rPr>
-              <a:t>1. Business Understanding Scenario:</a:t>
-            </a:r>
-            <a:endParaRPr lang="en-US" sz="1100" dirty="0">
-              <a:solidFill>
-                <a:srgbClr val="0070C0"/>
-              </a:solidFill>
-              <a:latin typeface="Calibri" panose="020F0502020204030204" pitchFamily="34" charset="0"/>
-              <a:ea typeface="Calibri" panose="020F0502020204030204" pitchFamily="34" charset="0"/>
-              <a:cs typeface="Arial" panose="020B0604020202020204" pitchFamily="34" charset="0"/>
-            </a:endParaRPr>
-          </a:p>
-          <a:p>
-            <a:pPr marR="0" lvl="0">
-              <a:spcBef>
-                <a:spcPts val="0"/>
-              </a:spcBef>
-              <a:buSzPts val="1000"/>
-              <a:tabLst>
-                <a:tab pos="457200" algn="l"/>
-              </a:tabLst>
-            </a:pPr>
-            <a:r>
-              <a:rPr lang="en-US" sz="1200" dirty="0">
-                <a:latin typeface="Times New Roman" panose="02020603050405020304" pitchFamily="18" charset="0"/>
-                <a:ea typeface="Times New Roman" panose="02020603050405020304" pitchFamily="18" charset="0"/>
-                <a:cs typeface="Arial" panose="020B0604020202020204" pitchFamily="34" charset="0"/>
-              </a:rPr>
-              <a:t>An e-commerce company wants </a:t>
-            </a:r>
-            <a:r>
-              <a:rPr lang="en-US" sz="1200" dirty="0">
-                <a:solidFill>
-                  <a:srgbClr val="FF0000"/>
-                </a:solidFill>
-                <a:latin typeface="Times New Roman" panose="02020603050405020304" pitchFamily="18" charset="0"/>
-                <a:ea typeface="Times New Roman" panose="02020603050405020304" pitchFamily="18" charset="0"/>
-                <a:cs typeface="Arial" panose="020B0604020202020204" pitchFamily="34" charset="0"/>
-              </a:rPr>
-              <a:t>to improve its marketing strategies to boost sales on its website</a:t>
-            </a:r>
-            <a:r>
-              <a:rPr lang="en-US" sz="1200" dirty="0">
-                <a:latin typeface="Times New Roman" panose="02020603050405020304" pitchFamily="18" charset="0"/>
-                <a:ea typeface="Times New Roman" panose="02020603050405020304" pitchFamily="18" charset="0"/>
-                <a:cs typeface="Arial" panose="020B0604020202020204" pitchFamily="34" charset="0"/>
-              </a:rPr>
-              <a:t>. The data analysis team is </a:t>
-            </a:r>
-            <a:r>
-              <a:rPr lang="en-US" sz="1200" dirty="0">
-                <a:solidFill>
-                  <a:srgbClr val="FF0000"/>
-                </a:solidFill>
-                <a:latin typeface="Times New Roman" panose="02020603050405020304" pitchFamily="18" charset="0"/>
-                <a:ea typeface="Times New Roman" panose="02020603050405020304" pitchFamily="18" charset="0"/>
-                <a:cs typeface="Arial" panose="020B0604020202020204" pitchFamily="34" charset="0"/>
-              </a:rPr>
-              <a:t>tasked</a:t>
-            </a:r>
-            <a:r>
-              <a:rPr lang="en-US" sz="1200" dirty="0">
-                <a:latin typeface="Times New Roman" panose="02020603050405020304" pitchFamily="18" charset="0"/>
-                <a:ea typeface="Times New Roman" panose="02020603050405020304" pitchFamily="18" charset="0"/>
-                <a:cs typeface="Arial" panose="020B0604020202020204" pitchFamily="34" charset="0"/>
-              </a:rPr>
-              <a:t> with a project to understand customer behavior and identify factors that influence purchasing decisions.</a:t>
-            </a:r>
-            <a:endParaRPr lang="en-US" sz="1100" dirty="0">
-              <a:latin typeface="Calibri" panose="020F0502020204030204" pitchFamily="34" charset="0"/>
-              <a:ea typeface="Calibri" panose="020F0502020204030204" pitchFamily="34" charset="0"/>
-              <a:cs typeface="Arial" panose="020B0604020202020204" pitchFamily="34" charset="0"/>
-            </a:endParaRPr>
-          </a:p>
-          <a:p>
-            <a:pPr>
-              <a:spcAft>
-                <a:spcPts val="800"/>
-              </a:spcAft>
-            </a:pPr>
-            <a:r>
-              <a:rPr lang="en-US" sz="1200" b="1" dirty="0">
-                <a:latin typeface="Times New Roman" panose="02020603050405020304" pitchFamily="18" charset="0"/>
-                <a:ea typeface="Times New Roman" panose="02020603050405020304" pitchFamily="18" charset="0"/>
-                <a:cs typeface="Arial" panose="020B0604020202020204" pitchFamily="34" charset="0"/>
-              </a:rPr>
-              <a:t>Key Steps:</a:t>
-            </a:r>
-            <a:endParaRPr lang="en-US" sz="1100" dirty="0">
-              <a:latin typeface="Calibri" panose="020F0502020204030204" pitchFamily="34" charset="0"/>
-              <a:ea typeface="Calibri" panose="020F0502020204030204" pitchFamily="34" charset="0"/>
-              <a:cs typeface="Arial" panose="020B0604020202020204" pitchFamily="34" charset="0"/>
-            </a:endParaRPr>
-          </a:p>
-          <a:p>
-            <a:pPr marL="342900" marR="0" lvl="0" indent="-342900">
-              <a:spcBef>
-                <a:spcPts val="0"/>
-              </a:spcBef>
-              <a:spcAft>
-                <a:spcPts val="800"/>
-              </a:spcAft>
-              <a:buSzPts val="1000"/>
-              <a:buFont typeface="Symbol" panose="05050102010706020507" pitchFamily="18" charset="2"/>
-              <a:buChar char=""/>
-              <a:tabLst>
-                <a:tab pos="457200" algn="l"/>
-              </a:tabLst>
-            </a:pPr>
-            <a:r>
-              <a:rPr lang="en-US" sz="1200" b="1" dirty="0">
-                <a:latin typeface="Times New Roman" panose="02020603050405020304" pitchFamily="18" charset="0"/>
-                <a:ea typeface="Times New Roman" panose="02020603050405020304" pitchFamily="18" charset="0"/>
-                <a:cs typeface="Arial" panose="020B0604020202020204" pitchFamily="34" charset="0"/>
-              </a:rPr>
-              <a:t>Define the Business Objective</a:t>
-            </a:r>
-            <a:r>
-              <a:rPr lang="en-US" sz="1200" dirty="0">
-                <a:latin typeface="Times New Roman" panose="02020603050405020304" pitchFamily="18" charset="0"/>
-                <a:ea typeface="Times New Roman" panose="02020603050405020304" pitchFamily="18" charset="0"/>
-                <a:cs typeface="Arial" panose="020B0604020202020204" pitchFamily="34" charset="0"/>
-              </a:rPr>
-              <a:t>:</a:t>
-            </a:r>
-            <a:endParaRPr lang="en-US" sz="1100" dirty="0">
-              <a:latin typeface="Calibri" panose="020F0502020204030204" pitchFamily="34" charset="0"/>
-              <a:ea typeface="Calibri" panose="020F0502020204030204" pitchFamily="34" charset="0"/>
-              <a:cs typeface="Arial" panose="020B0604020202020204" pitchFamily="34" charset="0"/>
-            </a:endParaRPr>
-          </a:p>
-          <a:p>
-            <a:pPr marL="742950" marR="0" lvl="1" indent="-285750">
-              <a:spcBef>
-                <a:spcPts val="0"/>
-              </a:spcBef>
-              <a:spcAft>
-                <a:spcPts val="800"/>
-              </a:spcAft>
-              <a:buSzPts val="1000"/>
-              <a:buFont typeface="Courier New" panose="02070309020205020404" pitchFamily="49" charset="0"/>
-              <a:buChar char="o"/>
-              <a:tabLst>
-                <a:tab pos="914400" algn="l"/>
-              </a:tabLst>
-            </a:pPr>
-            <a:r>
-              <a:rPr lang="en-US" sz="1200" dirty="0">
-                <a:latin typeface="Times New Roman" panose="02020603050405020304" pitchFamily="18" charset="0"/>
-                <a:ea typeface="Times New Roman" panose="02020603050405020304" pitchFamily="18" charset="0"/>
-                <a:cs typeface="Times New Roman" panose="02020603050405020304" pitchFamily="18" charset="0"/>
-              </a:rPr>
-              <a:t>The primary goal is to increase the </a:t>
-            </a:r>
-            <a:r>
-              <a:rPr lang="en-US" sz="1200" dirty="0">
-                <a:solidFill>
-                  <a:srgbClr val="FF0000"/>
-                </a:solidFill>
-                <a:latin typeface="Times New Roman" panose="02020603050405020304" pitchFamily="18" charset="0"/>
-                <a:ea typeface="Times New Roman" panose="02020603050405020304" pitchFamily="18" charset="0"/>
-                <a:cs typeface="Times New Roman" panose="02020603050405020304" pitchFamily="18" charset="0"/>
-              </a:rPr>
-              <a:t>website’s sales by 15% over the next six months</a:t>
-            </a:r>
-            <a:r>
-              <a:rPr lang="en-US" sz="1200" dirty="0">
-                <a:latin typeface="Times New Roman" panose="02020603050405020304" pitchFamily="18" charset="0"/>
-                <a:ea typeface="Times New Roman" panose="02020603050405020304" pitchFamily="18" charset="0"/>
-                <a:cs typeface="Times New Roman" panose="02020603050405020304" pitchFamily="18" charset="0"/>
-              </a:rPr>
-              <a:t>.</a:t>
-            </a:r>
-            <a:endParaRPr lang="en-US" sz="1100" dirty="0">
-              <a:latin typeface="Calibri" panose="020F0502020204030204" pitchFamily="34" charset="0"/>
-              <a:ea typeface="Calibri" panose="020F0502020204030204" pitchFamily="34" charset="0"/>
-              <a:cs typeface="Times New Roman" panose="02020603050405020304" pitchFamily="18" charset="0"/>
-            </a:endParaRPr>
-          </a:p>
-          <a:p>
-            <a:pPr marL="742950" marR="0" lvl="1" indent="-285750">
-              <a:spcBef>
-                <a:spcPts val="0"/>
-              </a:spcBef>
-              <a:spcAft>
-                <a:spcPts val="800"/>
-              </a:spcAft>
-              <a:buSzPts val="1000"/>
-              <a:buFont typeface="Courier New" panose="02070309020205020404" pitchFamily="49" charset="0"/>
-              <a:buChar char="o"/>
-              <a:tabLst>
-                <a:tab pos="914400" algn="l"/>
-              </a:tabLst>
-            </a:pPr>
-            <a:r>
-              <a:rPr lang="en-US" sz="1200" dirty="0">
-                <a:latin typeface="Times New Roman" panose="02020603050405020304" pitchFamily="18" charset="0"/>
-                <a:ea typeface="Times New Roman" panose="02020603050405020304" pitchFamily="18" charset="0"/>
-                <a:cs typeface="Times New Roman" panose="02020603050405020304" pitchFamily="18" charset="0"/>
-              </a:rPr>
-              <a:t>The focus is on understanding customer behavior, such as the number of items added to the cart, time spent on the website, and engagement with promotional offers.</a:t>
-            </a:r>
-            <a:endParaRPr lang="en-US" sz="1100" dirty="0">
-              <a:latin typeface="Calibri" panose="020F0502020204030204" pitchFamily="34" charset="0"/>
-              <a:ea typeface="Calibri" panose="020F0502020204030204" pitchFamily="34" charset="0"/>
-              <a:cs typeface="Times New Roman" panose="02020603050405020304" pitchFamily="18" charset="0"/>
-            </a:endParaRPr>
-          </a:p>
-          <a:p>
-            <a:pPr marL="342900" marR="0" lvl="0" indent="-342900">
-              <a:spcBef>
-                <a:spcPts val="0"/>
-              </a:spcBef>
-              <a:spcAft>
-                <a:spcPts val="800"/>
-              </a:spcAft>
-              <a:buSzPts val="1000"/>
-              <a:buFont typeface="Symbol" panose="05050102010706020507" pitchFamily="18" charset="2"/>
-              <a:buChar char=""/>
-              <a:tabLst>
-                <a:tab pos="457200" algn="l"/>
-              </a:tabLst>
-            </a:pPr>
-            <a:r>
-              <a:rPr lang="en-US" sz="1200" b="1" dirty="0">
-                <a:latin typeface="Times New Roman" panose="02020603050405020304" pitchFamily="18" charset="0"/>
-                <a:ea typeface="Times New Roman" panose="02020603050405020304" pitchFamily="18" charset="0"/>
-                <a:cs typeface="Arial" panose="020B0604020202020204" pitchFamily="34" charset="0"/>
-              </a:rPr>
-              <a:t>Key Questions</a:t>
-            </a:r>
-            <a:r>
-              <a:rPr lang="en-US" sz="1200" dirty="0">
-                <a:latin typeface="Times New Roman" panose="02020603050405020304" pitchFamily="18" charset="0"/>
-                <a:ea typeface="Times New Roman" panose="02020603050405020304" pitchFamily="18" charset="0"/>
-                <a:cs typeface="Arial" panose="020B0604020202020204" pitchFamily="34" charset="0"/>
-              </a:rPr>
-              <a:t>:</a:t>
-            </a:r>
-            <a:endParaRPr lang="en-US" sz="1100" dirty="0">
-              <a:latin typeface="Calibri" panose="020F0502020204030204" pitchFamily="34" charset="0"/>
-              <a:ea typeface="Calibri" panose="020F0502020204030204" pitchFamily="34" charset="0"/>
-              <a:cs typeface="Arial" panose="020B0604020202020204" pitchFamily="34" charset="0"/>
-            </a:endParaRPr>
-          </a:p>
-          <a:p>
-            <a:pPr marL="742950" marR="0" lvl="1" indent="-285750">
-              <a:spcBef>
-                <a:spcPts val="0"/>
-              </a:spcBef>
-              <a:spcAft>
-                <a:spcPts val="800"/>
-              </a:spcAft>
-              <a:buSzPts val="1000"/>
-              <a:buFont typeface="Courier New" panose="02070309020205020404" pitchFamily="49" charset="0"/>
-              <a:buChar char="o"/>
-              <a:tabLst>
-                <a:tab pos="914400" algn="l"/>
-              </a:tabLst>
-            </a:pPr>
-            <a:r>
-              <a:rPr lang="en-US" sz="1200" dirty="0">
-                <a:solidFill>
-                  <a:srgbClr val="FF0000"/>
-                </a:solidFill>
-                <a:latin typeface="Times New Roman" panose="02020603050405020304" pitchFamily="18" charset="0"/>
-                <a:ea typeface="Times New Roman" panose="02020603050405020304" pitchFamily="18" charset="0"/>
-                <a:cs typeface="Times New Roman" panose="02020603050405020304" pitchFamily="18" charset="0"/>
-              </a:rPr>
-              <a:t>Which age groups </a:t>
-            </a:r>
-            <a:r>
-              <a:rPr lang="en-US" sz="1200" dirty="0">
-                <a:latin typeface="Times New Roman" panose="02020603050405020304" pitchFamily="18" charset="0"/>
-                <a:ea typeface="Times New Roman" panose="02020603050405020304" pitchFamily="18" charset="0"/>
-                <a:cs typeface="Times New Roman" panose="02020603050405020304" pitchFamily="18" charset="0"/>
-              </a:rPr>
-              <a:t>or demographics are more likely to make a purchase?</a:t>
-            </a:r>
-            <a:endParaRPr lang="en-US" sz="1100" dirty="0">
-              <a:latin typeface="Calibri" panose="020F0502020204030204" pitchFamily="34" charset="0"/>
-              <a:ea typeface="Calibri" panose="020F0502020204030204" pitchFamily="34" charset="0"/>
-              <a:cs typeface="Times New Roman" panose="02020603050405020304" pitchFamily="18" charset="0"/>
-            </a:endParaRPr>
-          </a:p>
-          <a:p>
-            <a:pPr marL="742950" marR="0" lvl="1" indent="-285750">
-              <a:spcBef>
-                <a:spcPts val="0"/>
-              </a:spcBef>
-              <a:spcAft>
-                <a:spcPts val="800"/>
-              </a:spcAft>
-              <a:buSzPts val="1000"/>
-              <a:buFont typeface="Courier New" panose="02070309020205020404" pitchFamily="49" charset="0"/>
-              <a:buChar char="o"/>
-              <a:tabLst>
-                <a:tab pos="914400" algn="l"/>
-              </a:tabLst>
-            </a:pPr>
-            <a:r>
-              <a:rPr lang="en-US" sz="1200" dirty="0">
-                <a:solidFill>
-                  <a:srgbClr val="FF0000"/>
-                </a:solidFill>
-                <a:latin typeface="Times New Roman" panose="02020603050405020304" pitchFamily="18" charset="0"/>
-                <a:ea typeface="Times New Roman" panose="02020603050405020304" pitchFamily="18" charset="0"/>
-                <a:cs typeface="Times New Roman" panose="02020603050405020304" pitchFamily="18" charset="0"/>
-              </a:rPr>
-              <a:t>What impact do promotions </a:t>
-            </a:r>
-            <a:r>
-              <a:rPr lang="en-US" sz="1200" dirty="0">
-                <a:latin typeface="Times New Roman" panose="02020603050405020304" pitchFamily="18" charset="0"/>
-                <a:ea typeface="Times New Roman" panose="02020603050405020304" pitchFamily="18" charset="0"/>
-                <a:cs typeface="Times New Roman" panose="02020603050405020304" pitchFamily="18" charset="0"/>
-              </a:rPr>
-              <a:t>(discounts, free shipping) have on purchasing decisions?</a:t>
-            </a:r>
-            <a:endParaRPr lang="en-US" sz="1100" dirty="0">
-              <a:latin typeface="Calibri" panose="020F0502020204030204" pitchFamily="34" charset="0"/>
-              <a:ea typeface="Calibri" panose="020F0502020204030204" pitchFamily="34" charset="0"/>
-              <a:cs typeface="Times New Roman" panose="02020603050405020304" pitchFamily="18" charset="0"/>
-            </a:endParaRPr>
-          </a:p>
-          <a:p>
-            <a:pPr marL="742950" marR="0" lvl="1" indent="-285750">
-              <a:spcBef>
-                <a:spcPts val="0"/>
-              </a:spcBef>
-              <a:spcAft>
-                <a:spcPts val="800"/>
-              </a:spcAft>
-              <a:buSzPts val="1000"/>
-              <a:buFont typeface="Courier New" panose="02070309020205020404" pitchFamily="49" charset="0"/>
-              <a:buChar char="o"/>
-              <a:tabLst>
-                <a:tab pos="914400" algn="l"/>
-              </a:tabLst>
-            </a:pPr>
-            <a:r>
-              <a:rPr lang="en-US" sz="1200" dirty="0">
-                <a:solidFill>
-                  <a:srgbClr val="FF0000"/>
-                </a:solidFill>
-                <a:latin typeface="Times New Roman" panose="02020603050405020304" pitchFamily="18" charset="0"/>
-                <a:ea typeface="Times New Roman" panose="02020603050405020304" pitchFamily="18" charset="0"/>
-                <a:cs typeface="Times New Roman" panose="02020603050405020304" pitchFamily="18" charset="0"/>
-              </a:rPr>
-              <a:t>What products are frequently added to the cart but not purchased</a:t>
-            </a:r>
-            <a:r>
-              <a:rPr lang="en-US" sz="1200" dirty="0">
-                <a:latin typeface="Times New Roman" panose="02020603050405020304" pitchFamily="18" charset="0"/>
-                <a:ea typeface="Times New Roman" panose="02020603050405020304" pitchFamily="18" charset="0"/>
-                <a:cs typeface="Times New Roman" panose="02020603050405020304" pitchFamily="18" charset="0"/>
-              </a:rPr>
-              <a:t>?</a:t>
-            </a:r>
-            <a:endParaRPr lang="en-US" sz="1100" dirty="0">
-              <a:latin typeface="Calibri" panose="020F0502020204030204" pitchFamily="34" charset="0"/>
-              <a:ea typeface="Calibri" panose="020F0502020204030204" pitchFamily="34" charset="0"/>
-              <a:cs typeface="Times New Roman" panose="02020603050405020304" pitchFamily="18" charset="0"/>
-            </a:endParaRPr>
-          </a:p>
-          <a:p>
-            <a:pPr marL="342900" marR="0" lvl="0" indent="-342900">
-              <a:spcBef>
-                <a:spcPts val="0"/>
-              </a:spcBef>
-              <a:spcAft>
-                <a:spcPts val="800"/>
-              </a:spcAft>
-              <a:buSzPts val="1000"/>
-              <a:buFont typeface="Symbol" panose="05050102010706020507" pitchFamily="18" charset="2"/>
-              <a:buChar char=""/>
-              <a:tabLst>
-                <a:tab pos="457200" algn="l"/>
-              </a:tabLst>
-            </a:pPr>
-            <a:r>
-              <a:rPr lang="en-US" sz="1200" b="1" dirty="0">
-                <a:latin typeface="Times New Roman" panose="02020603050405020304" pitchFamily="18" charset="0"/>
-                <a:ea typeface="Times New Roman" panose="02020603050405020304" pitchFamily="18" charset="0"/>
-                <a:cs typeface="Arial" panose="020B0604020202020204" pitchFamily="34" charset="0"/>
-              </a:rPr>
-              <a:t>Key Performance Indicators (KPIs)</a:t>
-            </a:r>
-            <a:r>
-              <a:rPr lang="en-US" sz="1200" dirty="0">
-                <a:latin typeface="Times New Roman" panose="02020603050405020304" pitchFamily="18" charset="0"/>
-                <a:ea typeface="Times New Roman" panose="02020603050405020304" pitchFamily="18" charset="0"/>
-                <a:cs typeface="Arial" panose="020B0604020202020204" pitchFamily="34" charset="0"/>
-              </a:rPr>
-              <a:t>:</a:t>
-            </a:r>
-            <a:endParaRPr lang="en-US" sz="1100" dirty="0">
-              <a:latin typeface="Calibri" panose="020F0502020204030204" pitchFamily="34" charset="0"/>
-              <a:ea typeface="Calibri" panose="020F0502020204030204" pitchFamily="34" charset="0"/>
-              <a:cs typeface="Arial" panose="020B0604020202020204" pitchFamily="34" charset="0"/>
-            </a:endParaRPr>
-          </a:p>
-          <a:p>
-            <a:pPr marL="742950" marR="0" lvl="1" indent="-285750">
-              <a:spcBef>
-                <a:spcPts val="0"/>
-              </a:spcBef>
-              <a:spcAft>
-                <a:spcPts val="800"/>
-              </a:spcAft>
-              <a:buSzPts val="1000"/>
-              <a:buFont typeface="Courier New" panose="02070309020205020404" pitchFamily="49" charset="0"/>
-              <a:buChar char="o"/>
-              <a:tabLst>
-                <a:tab pos="914400" algn="l"/>
-              </a:tabLst>
-            </a:pPr>
-            <a:r>
-              <a:rPr lang="en-US" sz="1200" dirty="0">
-                <a:solidFill>
-                  <a:srgbClr val="FF0000"/>
-                </a:solidFill>
-                <a:latin typeface="Times New Roman" panose="02020603050405020304" pitchFamily="18" charset="0"/>
-                <a:ea typeface="Times New Roman" panose="02020603050405020304" pitchFamily="18" charset="0"/>
-                <a:cs typeface="Times New Roman" panose="02020603050405020304" pitchFamily="18" charset="0"/>
-              </a:rPr>
-              <a:t>Number of completed purchases</a:t>
-            </a:r>
-            <a:r>
-              <a:rPr lang="en-US" sz="1200" dirty="0">
-                <a:latin typeface="Times New Roman" panose="02020603050405020304" pitchFamily="18" charset="0"/>
-                <a:ea typeface="Times New Roman" panose="02020603050405020304" pitchFamily="18" charset="0"/>
-                <a:cs typeface="Times New Roman" panose="02020603050405020304" pitchFamily="18" charset="0"/>
-              </a:rPr>
-              <a:t>.</a:t>
-            </a:r>
-            <a:endParaRPr lang="en-US" sz="1100" dirty="0">
-              <a:latin typeface="Calibri" panose="020F0502020204030204" pitchFamily="34" charset="0"/>
-              <a:ea typeface="Calibri" panose="020F0502020204030204" pitchFamily="34" charset="0"/>
-              <a:cs typeface="Times New Roman" panose="02020603050405020304" pitchFamily="18" charset="0"/>
-            </a:endParaRPr>
-          </a:p>
-          <a:p>
-            <a:pPr marL="742950" marR="0" lvl="1" indent="-285750">
-              <a:spcBef>
-                <a:spcPts val="0"/>
-              </a:spcBef>
-              <a:spcAft>
-                <a:spcPts val="800"/>
-              </a:spcAft>
-              <a:buSzPts val="1000"/>
-              <a:buFont typeface="Courier New" panose="02070309020205020404" pitchFamily="49" charset="0"/>
-              <a:buChar char="o"/>
-              <a:tabLst>
-                <a:tab pos="914400" algn="l"/>
-              </a:tabLst>
-            </a:pPr>
-            <a:r>
-              <a:rPr lang="en-US" sz="1200" dirty="0">
-                <a:solidFill>
-                  <a:srgbClr val="FF0000"/>
-                </a:solidFill>
-                <a:latin typeface="Times New Roman" panose="02020603050405020304" pitchFamily="18" charset="0"/>
-                <a:ea typeface="Times New Roman" panose="02020603050405020304" pitchFamily="18" charset="0"/>
-                <a:cs typeface="Times New Roman" panose="02020603050405020304" pitchFamily="18" charset="0"/>
-              </a:rPr>
-              <a:t>Conversion rate </a:t>
-            </a:r>
-            <a:r>
-              <a:rPr lang="en-US" sz="1200" dirty="0">
-                <a:latin typeface="Times New Roman" panose="02020603050405020304" pitchFamily="18" charset="0"/>
-                <a:ea typeface="Times New Roman" panose="02020603050405020304" pitchFamily="18" charset="0"/>
-                <a:cs typeface="Times New Roman" panose="02020603050405020304" pitchFamily="18" charset="0"/>
-              </a:rPr>
-              <a:t>(percentage of visitors who make a purchase).</a:t>
-            </a:r>
-            <a:endParaRPr lang="en-US" sz="1100" dirty="0">
-              <a:latin typeface="Calibri" panose="020F0502020204030204" pitchFamily="34" charset="0"/>
-              <a:ea typeface="Calibri" panose="020F0502020204030204" pitchFamily="34" charset="0"/>
-              <a:cs typeface="Times New Roman" panose="02020603050405020304" pitchFamily="18" charset="0"/>
-            </a:endParaRPr>
-          </a:p>
-          <a:p>
-            <a:pPr marL="742950" marR="0" lvl="1" indent="-285750">
-              <a:spcBef>
-                <a:spcPts val="0"/>
-              </a:spcBef>
-              <a:spcAft>
-                <a:spcPts val="800"/>
-              </a:spcAft>
-              <a:buSzPts val="1000"/>
-              <a:buFont typeface="Courier New" panose="02070309020205020404" pitchFamily="49" charset="0"/>
-              <a:buChar char="o"/>
-              <a:tabLst>
-                <a:tab pos="914400" algn="l"/>
-              </a:tabLst>
-            </a:pPr>
-            <a:r>
-              <a:rPr lang="en-US" sz="1200" dirty="0">
-                <a:latin typeface="Times New Roman" panose="02020603050405020304" pitchFamily="18" charset="0"/>
-                <a:ea typeface="Times New Roman" panose="02020603050405020304" pitchFamily="18" charset="0"/>
-                <a:cs typeface="Times New Roman" panose="02020603050405020304" pitchFamily="18" charset="0"/>
-              </a:rPr>
-              <a:t>Average order value.</a:t>
-            </a:r>
-            <a:endParaRPr lang="en-US" sz="1100" dirty="0">
-              <a:latin typeface="Calibri" panose="020F0502020204030204" pitchFamily="34" charset="0"/>
-              <a:ea typeface="Calibri" panose="020F0502020204030204" pitchFamily="34" charset="0"/>
-              <a:cs typeface="Times New Roman" panose="02020603050405020304" pitchFamily="18" charset="0"/>
-            </a:endParaRPr>
-          </a:p>
-          <a:p>
-            <a:pPr marL="742950" marR="0" lvl="1" indent="-285750">
-              <a:spcBef>
-                <a:spcPts val="0"/>
-              </a:spcBef>
-              <a:spcAft>
-                <a:spcPts val="800"/>
-              </a:spcAft>
-              <a:buSzPts val="1000"/>
-              <a:buFont typeface="Courier New" panose="02070309020205020404" pitchFamily="49" charset="0"/>
-              <a:buChar char="o"/>
-              <a:tabLst>
-                <a:tab pos="914400" algn="l"/>
-              </a:tabLst>
-            </a:pPr>
-            <a:r>
-              <a:rPr lang="en-US" sz="1200" dirty="0">
-                <a:solidFill>
-                  <a:srgbClr val="FF0000"/>
-                </a:solidFill>
-                <a:latin typeface="Times New Roman" panose="02020603050405020304" pitchFamily="18" charset="0"/>
-                <a:ea typeface="Times New Roman" panose="02020603050405020304" pitchFamily="18" charset="0"/>
-                <a:cs typeface="Times New Roman" panose="02020603050405020304" pitchFamily="18" charset="0"/>
-              </a:rPr>
-              <a:t>Ratio of products added to the cart vs. products purchased</a:t>
-            </a:r>
-            <a:r>
-              <a:rPr lang="en-US" sz="1200" dirty="0">
-                <a:latin typeface="Times New Roman" panose="02020603050405020304" pitchFamily="18" charset="0"/>
-                <a:ea typeface="Times New Roman" panose="02020603050405020304" pitchFamily="18" charset="0"/>
-                <a:cs typeface="Times New Roman" panose="02020603050405020304" pitchFamily="18" charset="0"/>
-              </a:rPr>
-              <a:t>.</a:t>
-            </a:r>
-            <a:endParaRPr lang="en-US" sz="1100" dirty="0">
-              <a:latin typeface="Calibri" panose="020F0502020204030204" pitchFamily="34" charset="0"/>
-              <a:ea typeface="Calibri" panose="020F0502020204030204" pitchFamily="34" charset="0"/>
-              <a:cs typeface="Times New Roman" panose="02020603050405020304" pitchFamily="18" charset="0"/>
-            </a:endParaRPr>
-          </a:p>
-          <a:p>
-            <a:pPr marL="342900" marR="0" lvl="0" indent="-342900">
-              <a:spcBef>
-                <a:spcPts val="0"/>
-              </a:spcBef>
-              <a:spcAft>
-                <a:spcPts val="800"/>
-              </a:spcAft>
-              <a:buSzPts val="1000"/>
-              <a:buFont typeface="Symbol" panose="05050102010706020507" pitchFamily="18" charset="2"/>
-              <a:buChar char=""/>
-              <a:tabLst>
-                <a:tab pos="457200" algn="l"/>
-              </a:tabLst>
-            </a:pPr>
-            <a:r>
-              <a:rPr lang="en-US" sz="1200" b="1" dirty="0">
-                <a:latin typeface="Times New Roman" panose="02020603050405020304" pitchFamily="18" charset="0"/>
-                <a:ea typeface="Times New Roman" panose="02020603050405020304" pitchFamily="18" charset="0"/>
-                <a:cs typeface="Arial" panose="020B0604020202020204" pitchFamily="34" charset="0"/>
-              </a:rPr>
-              <a:t>Risk Assessment</a:t>
-            </a:r>
-            <a:r>
-              <a:rPr lang="en-US" sz="1200" dirty="0">
-                <a:latin typeface="Times New Roman" panose="02020603050405020304" pitchFamily="18" charset="0"/>
-                <a:ea typeface="Times New Roman" panose="02020603050405020304" pitchFamily="18" charset="0"/>
-                <a:cs typeface="Arial" panose="020B0604020202020204" pitchFamily="34" charset="0"/>
-              </a:rPr>
-              <a:t>:</a:t>
-            </a:r>
-            <a:endParaRPr lang="en-US" sz="1100" dirty="0">
-              <a:latin typeface="Calibri" panose="020F0502020204030204" pitchFamily="34" charset="0"/>
-              <a:ea typeface="Calibri" panose="020F0502020204030204" pitchFamily="34" charset="0"/>
-              <a:cs typeface="Arial" panose="020B0604020202020204" pitchFamily="34" charset="0"/>
-            </a:endParaRPr>
-          </a:p>
-          <a:p>
-            <a:pPr marL="742950" marR="0" lvl="1" indent="-285750">
-              <a:spcBef>
-                <a:spcPts val="0"/>
-              </a:spcBef>
-              <a:spcAft>
-                <a:spcPts val="800"/>
-              </a:spcAft>
-              <a:buSzPts val="1000"/>
-              <a:buFont typeface="Courier New" panose="02070309020205020404" pitchFamily="49" charset="0"/>
-              <a:buChar char="o"/>
-              <a:tabLst>
-                <a:tab pos="914400" algn="l"/>
-              </a:tabLst>
-            </a:pPr>
-            <a:r>
-              <a:rPr lang="en-US" sz="1200" dirty="0">
-                <a:latin typeface="Times New Roman" panose="02020603050405020304" pitchFamily="18" charset="0"/>
-                <a:ea typeface="Times New Roman" panose="02020603050405020304" pitchFamily="18" charset="0"/>
-                <a:cs typeface="Times New Roman" panose="02020603050405020304" pitchFamily="18" charset="0"/>
-              </a:rPr>
-              <a:t>Some customer behaviors might be missing from the data (e.g., interactions with promotions outside the website).</a:t>
-            </a:r>
-            <a:endParaRPr lang="en-US" sz="1100" dirty="0">
-              <a:latin typeface="Calibri" panose="020F0502020204030204" pitchFamily="34" charset="0"/>
-              <a:ea typeface="Calibri" panose="020F0502020204030204" pitchFamily="34" charset="0"/>
-              <a:cs typeface="Times New Roman" panose="02020603050405020304" pitchFamily="18" charset="0"/>
-            </a:endParaRPr>
-          </a:p>
-          <a:p>
-            <a:pPr marL="742950" marR="0" lvl="1" indent="-285750">
-              <a:spcBef>
-                <a:spcPts val="0"/>
-              </a:spcBef>
-              <a:spcAft>
-                <a:spcPts val="800"/>
-              </a:spcAft>
-              <a:buSzPts val="1000"/>
-              <a:buFont typeface="Courier New" panose="02070309020205020404" pitchFamily="49" charset="0"/>
-              <a:buChar char="o"/>
-              <a:tabLst>
-                <a:tab pos="914400" algn="l"/>
-              </a:tabLst>
-            </a:pPr>
-            <a:r>
-              <a:rPr lang="en-US" sz="1200" dirty="0">
-                <a:latin typeface="Times New Roman" panose="02020603050405020304" pitchFamily="18" charset="0"/>
-                <a:ea typeface="Times New Roman" panose="02020603050405020304" pitchFamily="18" charset="0"/>
-                <a:cs typeface="Times New Roman" panose="02020603050405020304" pitchFamily="18" charset="0"/>
-              </a:rPr>
-              <a:t>Data privacy regulations (such as GDPR) need to be respected.</a:t>
-            </a:r>
-            <a:endParaRPr lang="en-US" sz="1100" dirty="0">
-              <a:latin typeface="Calibri" panose="020F0502020204030204" pitchFamily="34" charset="0"/>
-              <a:ea typeface="Calibri" panose="020F0502020204030204" pitchFamily="34" charset="0"/>
-              <a:cs typeface="Times New Roman" panose="02020603050405020304" pitchFamily="18" charset="0"/>
-            </a:endParaRPr>
-          </a:p>
-          <a:p>
-            <a:pPr marL="342900" marR="0" lvl="0" indent="-342900">
-              <a:spcBef>
-                <a:spcPts val="0"/>
-              </a:spcBef>
-              <a:spcAft>
-                <a:spcPts val="800"/>
-              </a:spcAft>
-              <a:buSzPts val="1000"/>
-              <a:buFont typeface="Symbol" panose="05050102010706020507" pitchFamily="18" charset="2"/>
-              <a:buChar char=""/>
-              <a:tabLst>
-                <a:tab pos="457200" algn="l"/>
-              </a:tabLst>
-            </a:pPr>
-            <a:r>
-              <a:rPr lang="en-US" sz="1200" b="1" dirty="0">
-                <a:latin typeface="Times New Roman" panose="02020603050405020304" pitchFamily="18" charset="0"/>
-                <a:ea typeface="Times New Roman" panose="02020603050405020304" pitchFamily="18" charset="0"/>
-                <a:cs typeface="Arial" panose="020B0604020202020204" pitchFamily="34" charset="0"/>
-              </a:rPr>
-              <a:t>Resources</a:t>
-            </a:r>
-            <a:r>
-              <a:rPr lang="en-US" sz="1200" dirty="0">
-                <a:latin typeface="Times New Roman" panose="02020603050405020304" pitchFamily="18" charset="0"/>
-                <a:ea typeface="Times New Roman" panose="02020603050405020304" pitchFamily="18" charset="0"/>
-                <a:cs typeface="Arial" panose="020B0604020202020204" pitchFamily="34" charset="0"/>
-              </a:rPr>
-              <a:t>:</a:t>
-            </a:r>
-            <a:endParaRPr lang="en-US" sz="1100" dirty="0">
-              <a:latin typeface="Calibri" panose="020F0502020204030204" pitchFamily="34" charset="0"/>
-              <a:ea typeface="Calibri" panose="020F0502020204030204" pitchFamily="34" charset="0"/>
-              <a:cs typeface="Arial" panose="020B0604020202020204" pitchFamily="34" charset="0"/>
-            </a:endParaRPr>
-          </a:p>
-          <a:p>
-            <a:pPr marL="742950" marR="0" lvl="1" indent="-285750">
-              <a:spcBef>
-                <a:spcPts val="0"/>
-              </a:spcBef>
-              <a:spcAft>
-                <a:spcPts val="800"/>
-              </a:spcAft>
-              <a:buSzPts val="1000"/>
-              <a:buFont typeface="Courier New" panose="02070309020205020404" pitchFamily="49" charset="0"/>
-              <a:buChar char="o"/>
-              <a:tabLst>
-                <a:tab pos="914400" algn="l"/>
-              </a:tabLst>
-            </a:pPr>
-            <a:r>
-              <a:rPr lang="en-US" sz="1200" dirty="0">
-                <a:latin typeface="Times New Roman" panose="02020603050405020304" pitchFamily="18" charset="0"/>
-                <a:ea typeface="Times New Roman" panose="02020603050405020304" pitchFamily="18" charset="0"/>
-                <a:cs typeface="Times New Roman" panose="02020603050405020304" pitchFamily="18" charset="0"/>
-              </a:rPr>
-              <a:t>The data analysis team has tools like Python, R, and access to customer databases.</a:t>
-            </a:r>
-            <a:endParaRPr lang="en-US" sz="1100" dirty="0">
-              <a:latin typeface="Calibri" panose="020F0502020204030204" pitchFamily="34" charset="0"/>
-              <a:ea typeface="Calibri" panose="020F0502020204030204" pitchFamily="34" charset="0"/>
-              <a:cs typeface="Times New Roman" panose="02020603050405020304" pitchFamily="18" charset="0"/>
-            </a:endParaRPr>
-          </a:p>
-          <a:p>
-            <a:pPr marL="742950" marR="0" lvl="1" indent="-285750">
-              <a:spcBef>
-                <a:spcPts val="0"/>
-              </a:spcBef>
-              <a:spcAft>
-                <a:spcPts val="800"/>
-              </a:spcAft>
-              <a:buSzPts val="1000"/>
-              <a:buFont typeface="Courier New" panose="02070309020205020404" pitchFamily="49" charset="0"/>
-              <a:buChar char="o"/>
-              <a:tabLst>
-                <a:tab pos="914400" algn="l"/>
-              </a:tabLst>
-            </a:pPr>
-            <a:r>
-              <a:rPr lang="en-US" sz="1200" dirty="0">
-                <a:latin typeface="Times New Roman" panose="02020603050405020304" pitchFamily="18" charset="0"/>
-                <a:ea typeface="Times New Roman" panose="02020603050405020304" pitchFamily="18" charset="0"/>
-                <a:cs typeface="Times New Roman" panose="02020603050405020304" pitchFamily="18" charset="0"/>
-              </a:rPr>
-              <a:t>There’s a budget for acquiring external data or tools if needed.</a:t>
-            </a:r>
-            <a:endParaRPr lang="en-US" sz="1100" dirty="0">
-              <a:latin typeface="Calibri" panose="020F0502020204030204" pitchFamily="34" charset="0"/>
-              <a:ea typeface="Calibri" panose="020F0502020204030204" pitchFamily="34" charset="0"/>
-              <a:cs typeface="Times New Roman" panose="02020603050405020304" pitchFamily="18" charset="0"/>
-            </a:endParaRPr>
-          </a:p>
-        </p:txBody>
-      </p:sp>
+      </p:pic>
     </p:spTree>
     <p:extLst>
       <p:ext uri="{BB962C8B-B14F-4D97-AF65-F5344CB8AC3E}">
-        <p14:creationId xmlns:p14="http://schemas.microsoft.com/office/powerpoint/2010/main" val="3087456825"/>
+        <p14:creationId xmlns:p14="http://schemas.microsoft.com/office/powerpoint/2010/main" val="4051642265"/>
       </p:ext>
     </p:extLst>
   </p:cSld>
@@ -6264,197 +4335,791 @@
       </p:grpSpPr>
       <p:sp>
         <p:nvSpPr>
-          <p:cNvPr id="2" name="Title 1">
+          <p:cNvPr id="4" name="Rectangle 3">
             <a:extLst>
               <a:ext uri="{FF2B5EF4-FFF2-40B4-BE49-F238E27FC236}">
-                <a16:creationId xmlns:a16="http://schemas.microsoft.com/office/drawing/2014/main" id="{6C057820-CF00-4795-9097-113B9CA6485A}"/>
+                <a16:creationId xmlns:a16="http://schemas.microsoft.com/office/drawing/2014/main" id="{A4C2D5F8-BE48-45B5-A4B0-BBBBD52ADF1E}"/>
               </a:ext>
             </a:extLst>
           </p:cNvPr>
-          <p:cNvSpPr>
-            <a:spLocks noGrp="1"/>
-          </p:cNvSpPr>
-          <p:nvPr>
-            <p:ph type="title"/>
-          </p:nvPr>
-        </p:nvSpPr>
-        <p:spPr/>
-        <p:txBody>
-          <a:bodyPr/>
-          <a:lstStyle/>
-          <a:p>
-            <a:r>
-              <a:rPr lang="en-US" dirty="0"/>
-              <a:t>2- Data Understanding:</a:t>
-            </a:r>
-          </a:p>
-        </p:txBody>
-      </p:sp>
-      <p:sp>
-        <p:nvSpPr>
-          <p:cNvPr id="3" name="Content Placeholder 2">
-            <a:extLst>
-              <a:ext uri="{FF2B5EF4-FFF2-40B4-BE49-F238E27FC236}">
-                <a16:creationId xmlns:a16="http://schemas.microsoft.com/office/drawing/2014/main" id="{8D85989A-80AD-468A-8F1A-3E3AE90C37B2}"/>
-              </a:ext>
-            </a:extLst>
-          </p:cNvPr>
-          <p:cNvSpPr>
-            <a:spLocks noGrp="1"/>
-          </p:cNvSpPr>
-          <p:nvPr>
-            <p:ph idx="1"/>
-          </p:nvPr>
+          <p:cNvSpPr/>
+          <p:nvPr/>
         </p:nvSpPr>
         <p:spPr>
           <a:xfrm>
-            <a:off x="838199" y="1825625"/>
-            <a:ext cx="8219537" cy="4667250"/>
-          </a:xfrm>
-        </p:spPr>
-        <p:txBody>
-          <a:bodyPr>
-            <a:normAutofit fontScale="55000" lnSpcReduction="20000"/>
-          </a:bodyPr>
-          <a:lstStyle/>
-          <a:p>
-            <a:pPr marL="0" indent="0">
-              <a:buNone/>
-            </a:pPr>
-            <a:r>
-              <a:rPr lang="en-US" dirty="0"/>
-              <a:t>Data understanding starts with an original data collection and proceeds with operations to get familiar with the data, to data quality issues, to find better insight in data, or to detect interesting subsets for concealed information hypothesis.</a:t>
-            </a:r>
-          </a:p>
-          <a:p>
-            <a:pPr marL="0" indent="0">
-              <a:buNone/>
-            </a:pPr>
-            <a:r>
-              <a:rPr lang="en-US" b="1" dirty="0"/>
-              <a:t>Tasks:</a:t>
-            </a:r>
-            <a:endParaRPr lang="en-US" dirty="0"/>
-          </a:p>
-          <a:p>
-            <a:r>
-              <a:rPr lang="en-US" dirty="0"/>
-              <a:t>Collects initial data</a:t>
-            </a:r>
-          </a:p>
-          <a:p>
-            <a:r>
-              <a:rPr lang="en-US" dirty="0"/>
-              <a:t>Describe data</a:t>
-            </a:r>
-          </a:p>
-          <a:p>
-            <a:r>
-              <a:rPr lang="en-US" dirty="0"/>
-              <a:t>Explore data</a:t>
-            </a:r>
-          </a:p>
-          <a:p>
-            <a:r>
-              <a:rPr lang="en-US" dirty="0"/>
-              <a:t>Verify data quality</a:t>
-            </a:r>
-          </a:p>
-          <a:p>
-            <a:pPr marL="0" indent="0">
-              <a:buNone/>
-            </a:pPr>
-            <a:r>
-              <a:rPr lang="en-US" b="1" dirty="0"/>
-              <a:t>Collect initial data:</a:t>
-            </a:r>
-            <a:endParaRPr lang="en-US" dirty="0"/>
-          </a:p>
-          <a:p>
-            <a:r>
-              <a:rPr lang="en-US" dirty="0"/>
-              <a:t>It acquires the information mentioned in the project resources.</a:t>
-            </a:r>
-          </a:p>
-          <a:p>
-            <a:r>
-              <a:rPr lang="en-US" dirty="0"/>
-              <a:t>It includes data loading if needed for data understanding.</a:t>
-            </a:r>
-          </a:p>
-          <a:p>
-            <a:r>
-              <a:rPr lang="en-US" dirty="0"/>
-              <a:t>It may lead to original data preparation steps.</a:t>
-            </a:r>
-          </a:p>
-          <a:p>
-            <a:r>
-              <a:rPr lang="en-US" dirty="0"/>
-              <a:t>If various information sources are acquired then integration is an extra issue, either here or at the subsequent stage of data preparation.</a:t>
-            </a:r>
-          </a:p>
-          <a:p>
-            <a:pPr marL="0" indent="0">
-              <a:buNone/>
-            </a:pPr>
-            <a:r>
-              <a:rPr lang="en-US" b="1" dirty="0"/>
-              <a:t>Describe data:</a:t>
-            </a:r>
-            <a:endParaRPr lang="en-US" dirty="0"/>
-          </a:p>
-          <a:p>
-            <a:r>
-              <a:rPr lang="en-US" dirty="0"/>
-              <a:t>It examines the "gross" or "surface" characteristics of the information obtained.</a:t>
-            </a:r>
-          </a:p>
-          <a:p>
-            <a:r>
-              <a:rPr lang="en-US" dirty="0"/>
-              <a:t>It reports on the outcomes.</a:t>
-            </a:r>
-          </a:p>
-          <a:p>
-            <a:endParaRPr lang="en-US" dirty="0"/>
-          </a:p>
-        </p:txBody>
-      </p:sp>
-      <p:pic>
-        <p:nvPicPr>
-          <p:cNvPr id="6" name="Picture 5">
-            <a:extLst>
-              <a:ext uri="{FF2B5EF4-FFF2-40B4-BE49-F238E27FC236}">
-                <a16:creationId xmlns:a16="http://schemas.microsoft.com/office/drawing/2014/main" id="{DD42A04E-7FA1-47E0-8CDD-5E9CAC4EFD55}"/>
-              </a:ext>
-            </a:extLst>
-          </p:cNvPr>
-          <p:cNvPicPr>
-            <a:picLocks noChangeAspect="1"/>
-          </p:cNvPicPr>
-          <p:nvPr/>
-        </p:nvPicPr>
-        <p:blipFill>
-          <a:blip r:embed="rId2"/>
-          <a:stretch>
-            <a:fillRect/>
-          </a:stretch>
-        </p:blipFill>
-        <p:spPr>
-          <a:xfrm>
-            <a:off x="9414123" y="1825625"/>
-            <a:ext cx="2094951" cy="4509057"/>
+            <a:off x="319177" y="750010"/>
+            <a:ext cx="11872823" cy="6135013"/>
           </a:xfrm>
           <a:prstGeom prst="rect">
             <a:avLst/>
           </a:prstGeom>
         </p:spPr>
-      </p:pic>
+        <p:txBody>
+          <a:bodyPr wrap="square">
+            <a:spAutoFit/>
+          </a:bodyPr>
+          <a:lstStyle/>
+          <a:p>
+            <a:pPr>
+              <a:spcAft>
+                <a:spcPts val="800"/>
+              </a:spcAft>
+            </a:pPr>
+            <a:r>
+              <a:rPr lang="en-US" sz="1400" b="1" dirty="0">
+                <a:solidFill>
+                  <a:srgbClr val="0070C0"/>
+                </a:solidFill>
+                <a:latin typeface="Times New Roman" panose="02020603050405020304" pitchFamily="18" charset="0"/>
+                <a:ea typeface="Times New Roman" panose="02020603050405020304" pitchFamily="18" charset="0"/>
+                <a:cs typeface="Arial" panose="020B0604020202020204" pitchFamily="34" charset="0"/>
+              </a:rPr>
+              <a:t>1. Business Understanding Scenario:</a:t>
+            </a:r>
+            <a:endParaRPr lang="en-US" sz="1100" dirty="0">
+              <a:solidFill>
+                <a:srgbClr val="0070C0"/>
+              </a:solidFill>
+              <a:latin typeface="Calibri" panose="020F0502020204030204" pitchFamily="34" charset="0"/>
+              <a:ea typeface="Calibri" panose="020F0502020204030204" pitchFamily="34" charset="0"/>
+              <a:cs typeface="Arial" panose="020B0604020202020204" pitchFamily="34" charset="0"/>
+            </a:endParaRPr>
+          </a:p>
+          <a:p>
+            <a:pPr marR="0" lvl="0">
+              <a:spcBef>
+                <a:spcPts val="0"/>
+              </a:spcBef>
+              <a:buSzPts val="1000"/>
+              <a:tabLst>
+                <a:tab pos="457200" algn="l"/>
+              </a:tabLst>
+            </a:pPr>
+            <a:r>
+              <a:rPr lang="en-US" sz="1200" dirty="0">
+                <a:latin typeface="Times New Roman" panose="02020603050405020304" pitchFamily="18" charset="0"/>
+                <a:ea typeface="Times New Roman" panose="02020603050405020304" pitchFamily="18" charset="0"/>
+                <a:cs typeface="Arial" panose="020B0604020202020204" pitchFamily="34" charset="0"/>
+              </a:rPr>
+              <a:t>An e-commerce company wants </a:t>
+            </a:r>
+            <a:r>
+              <a:rPr lang="en-US" sz="1200" dirty="0">
+                <a:solidFill>
+                  <a:srgbClr val="FF0000"/>
+                </a:solidFill>
+                <a:latin typeface="Times New Roman" panose="02020603050405020304" pitchFamily="18" charset="0"/>
+                <a:ea typeface="Times New Roman" panose="02020603050405020304" pitchFamily="18" charset="0"/>
+                <a:cs typeface="Arial" panose="020B0604020202020204" pitchFamily="34" charset="0"/>
+              </a:rPr>
+              <a:t>to improve its marketing strategies to boost sales on its website</a:t>
+            </a:r>
+            <a:r>
+              <a:rPr lang="en-US" sz="1200" dirty="0">
+                <a:latin typeface="Times New Roman" panose="02020603050405020304" pitchFamily="18" charset="0"/>
+                <a:ea typeface="Times New Roman" panose="02020603050405020304" pitchFamily="18" charset="0"/>
+                <a:cs typeface="Arial" panose="020B0604020202020204" pitchFamily="34" charset="0"/>
+              </a:rPr>
+              <a:t>. The data analysis team is </a:t>
+            </a:r>
+            <a:r>
+              <a:rPr lang="en-US" sz="1200" dirty="0">
+                <a:solidFill>
+                  <a:srgbClr val="FF0000"/>
+                </a:solidFill>
+                <a:latin typeface="Times New Roman" panose="02020603050405020304" pitchFamily="18" charset="0"/>
+                <a:ea typeface="Times New Roman" panose="02020603050405020304" pitchFamily="18" charset="0"/>
+                <a:cs typeface="Arial" panose="020B0604020202020204" pitchFamily="34" charset="0"/>
+              </a:rPr>
+              <a:t>tasked</a:t>
+            </a:r>
+            <a:r>
+              <a:rPr lang="en-US" sz="1200" dirty="0">
+                <a:latin typeface="Times New Roman" panose="02020603050405020304" pitchFamily="18" charset="0"/>
+                <a:ea typeface="Times New Roman" panose="02020603050405020304" pitchFamily="18" charset="0"/>
+                <a:cs typeface="Arial" panose="020B0604020202020204" pitchFamily="34" charset="0"/>
+              </a:rPr>
+              <a:t> with a project to understand customer behavior and identify factors that influence purchasing decisions.</a:t>
+            </a:r>
+            <a:endParaRPr lang="en-US" sz="1100" dirty="0">
+              <a:latin typeface="Calibri" panose="020F0502020204030204" pitchFamily="34" charset="0"/>
+              <a:ea typeface="Calibri" panose="020F0502020204030204" pitchFamily="34" charset="0"/>
+              <a:cs typeface="Arial" panose="020B0604020202020204" pitchFamily="34" charset="0"/>
+            </a:endParaRPr>
+          </a:p>
+          <a:p>
+            <a:pPr>
+              <a:spcAft>
+                <a:spcPts val="800"/>
+              </a:spcAft>
+            </a:pPr>
+            <a:r>
+              <a:rPr lang="en-US" sz="1200" b="1" dirty="0">
+                <a:latin typeface="Times New Roman" panose="02020603050405020304" pitchFamily="18" charset="0"/>
+                <a:ea typeface="Times New Roman" panose="02020603050405020304" pitchFamily="18" charset="0"/>
+                <a:cs typeface="Arial" panose="020B0604020202020204" pitchFamily="34" charset="0"/>
+              </a:rPr>
+              <a:t>Key Steps:</a:t>
+            </a:r>
+            <a:endParaRPr lang="en-US" sz="1100" dirty="0">
+              <a:latin typeface="Calibri" panose="020F0502020204030204" pitchFamily="34" charset="0"/>
+              <a:ea typeface="Calibri" panose="020F0502020204030204" pitchFamily="34" charset="0"/>
+              <a:cs typeface="Arial" panose="020B0604020202020204" pitchFamily="34" charset="0"/>
+            </a:endParaRPr>
+          </a:p>
+          <a:p>
+            <a:pPr marL="342900" marR="0" lvl="0" indent="-342900">
+              <a:spcBef>
+                <a:spcPts val="0"/>
+              </a:spcBef>
+              <a:spcAft>
+                <a:spcPts val="800"/>
+              </a:spcAft>
+              <a:buSzPts val="1000"/>
+              <a:buFont typeface="Symbol" panose="05050102010706020507" pitchFamily="18" charset="2"/>
+              <a:buChar char=""/>
+              <a:tabLst>
+                <a:tab pos="457200" algn="l"/>
+              </a:tabLst>
+            </a:pPr>
+            <a:r>
+              <a:rPr lang="en-US" sz="1200" b="1" dirty="0">
+                <a:latin typeface="Times New Roman" panose="02020603050405020304" pitchFamily="18" charset="0"/>
+                <a:ea typeface="Times New Roman" panose="02020603050405020304" pitchFamily="18" charset="0"/>
+                <a:cs typeface="Arial" panose="020B0604020202020204" pitchFamily="34" charset="0"/>
+              </a:rPr>
+              <a:t>Define the Business Objective</a:t>
+            </a:r>
+            <a:r>
+              <a:rPr lang="en-US" sz="1200" dirty="0">
+                <a:latin typeface="Times New Roman" panose="02020603050405020304" pitchFamily="18" charset="0"/>
+                <a:ea typeface="Times New Roman" panose="02020603050405020304" pitchFamily="18" charset="0"/>
+                <a:cs typeface="Arial" panose="020B0604020202020204" pitchFamily="34" charset="0"/>
+              </a:rPr>
+              <a:t>:</a:t>
+            </a:r>
+            <a:endParaRPr lang="en-US" sz="1100" dirty="0">
+              <a:latin typeface="Calibri" panose="020F0502020204030204" pitchFamily="34" charset="0"/>
+              <a:ea typeface="Calibri" panose="020F0502020204030204" pitchFamily="34" charset="0"/>
+              <a:cs typeface="Arial" panose="020B0604020202020204" pitchFamily="34" charset="0"/>
+            </a:endParaRPr>
+          </a:p>
+          <a:p>
+            <a:pPr marL="742950" marR="0" lvl="1" indent="-285750">
+              <a:spcBef>
+                <a:spcPts val="0"/>
+              </a:spcBef>
+              <a:spcAft>
+                <a:spcPts val="800"/>
+              </a:spcAft>
+              <a:buSzPts val="1000"/>
+              <a:buFont typeface="Courier New" panose="02070309020205020404" pitchFamily="49" charset="0"/>
+              <a:buChar char="o"/>
+              <a:tabLst>
+                <a:tab pos="914400" algn="l"/>
+              </a:tabLst>
+            </a:pPr>
+            <a:r>
+              <a:rPr lang="en-US" sz="1200" dirty="0">
+                <a:latin typeface="Times New Roman" panose="02020603050405020304" pitchFamily="18" charset="0"/>
+                <a:ea typeface="Times New Roman" panose="02020603050405020304" pitchFamily="18" charset="0"/>
+                <a:cs typeface="Times New Roman" panose="02020603050405020304" pitchFamily="18" charset="0"/>
+              </a:rPr>
+              <a:t>The primary goal is to increase the </a:t>
+            </a:r>
+            <a:r>
+              <a:rPr lang="en-US" sz="1200" dirty="0">
+                <a:solidFill>
+                  <a:srgbClr val="FF0000"/>
+                </a:solidFill>
+                <a:latin typeface="Times New Roman" panose="02020603050405020304" pitchFamily="18" charset="0"/>
+                <a:ea typeface="Times New Roman" panose="02020603050405020304" pitchFamily="18" charset="0"/>
+                <a:cs typeface="Times New Roman" panose="02020603050405020304" pitchFamily="18" charset="0"/>
+              </a:rPr>
+              <a:t>website’s sales by 15% over the next six months</a:t>
+            </a:r>
+            <a:r>
+              <a:rPr lang="en-US" sz="1200" dirty="0">
+                <a:latin typeface="Times New Roman" panose="02020603050405020304" pitchFamily="18" charset="0"/>
+                <a:ea typeface="Times New Roman" panose="02020603050405020304" pitchFamily="18" charset="0"/>
+                <a:cs typeface="Times New Roman" panose="02020603050405020304" pitchFamily="18" charset="0"/>
+              </a:rPr>
+              <a:t>.</a:t>
+            </a:r>
+            <a:endParaRPr lang="en-US" sz="1100" dirty="0">
+              <a:latin typeface="Calibri" panose="020F0502020204030204" pitchFamily="34" charset="0"/>
+              <a:ea typeface="Calibri" panose="020F0502020204030204" pitchFamily="34" charset="0"/>
+              <a:cs typeface="Times New Roman" panose="02020603050405020304" pitchFamily="18" charset="0"/>
+            </a:endParaRPr>
+          </a:p>
+          <a:p>
+            <a:pPr marL="742950" marR="0" lvl="1" indent="-285750">
+              <a:spcBef>
+                <a:spcPts val="0"/>
+              </a:spcBef>
+              <a:spcAft>
+                <a:spcPts val="800"/>
+              </a:spcAft>
+              <a:buSzPts val="1000"/>
+              <a:buFont typeface="Courier New" panose="02070309020205020404" pitchFamily="49" charset="0"/>
+              <a:buChar char="o"/>
+              <a:tabLst>
+                <a:tab pos="914400" algn="l"/>
+              </a:tabLst>
+            </a:pPr>
+            <a:r>
+              <a:rPr lang="en-US" sz="1200" dirty="0">
+                <a:latin typeface="Times New Roman" panose="02020603050405020304" pitchFamily="18" charset="0"/>
+                <a:ea typeface="Times New Roman" panose="02020603050405020304" pitchFamily="18" charset="0"/>
+                <a:cs typeface="Times New Roman" panose="02020603050405020304" pitchFamily="18" charset="0"/>
+              </a:rPr>
+              <a:t>The focus is on understanding customer behavior, such as the number of items added to the cart, time spent on the website, and engagement with promotional offers.</a:t>
+            </a:r>
+            <a:endParaRPr lang="en-US" sz="1100" dirty="0">
+              <a:latin typeface="Calibri" panose="020F0502020204030204" pitchFamily="34" charset="0"/>
+              <a:ea typeface="Calibri" panose="020F0502020204030204" pitchFamily="34" charset="0"/>
+              <a:cs typeface="Times New Roman" panose="02020603050405020304" pitchFamily="18" charset="0"/>
+            </a:endParaRPr>
+          </a:p>
+          <a:p>
+            <a:pPr marL="342900" marR="0" lvl="0" indent="-342900">
+              <a:spcBef>
+                <a:spcPts val="0"/>
+              </a:spcBef>
+              <a:spcAft>
+                <a:spcPts val="800"/>
+              </a:spcAft>
+              <a:buSzPts val="1000"/>
+              <a:buFont typeface="Symbol" panose="05050102010706020507" pitchFamily="18" charset="2"/>
+              <a:buChar char=""/>
+              <a:tabLst>
+                <a:tab pos="457200" algn="l"/>
+              </a:tabLst>
+            </a:pPr>
+            <a:r>
+              <a:rPr lang="en-US" sz="1200" b="1" dirty="0">
+                <a:latin typeface="Times New Roman" panose="02020603050405020304" pitchFamily="18" charset="0"/>
+                <a:ea typeface="Times New Roman" panose="02020603050405020304" pitchFamily="18" charset="0"/>
+                <a:cs typeface="Arial" panose="020B0604020202020204" pitchFamily="34" charset="0"/>
+              </a:rPr>
+              <a:t>Key Questions</a:t>
+            </a:r>
+            <a:r>
+              <a:rPr lang="en-US" sz="1200" dirty="0">
+                <a:latin typeface="Times New Roman" panose="02020603050405020304" pitchFamily="18" charset="0"/>
+                <a:ea typeface="Times New Roman" panose="02020603050405020304" pitchFamily="18" charset="0"/>
+                <a:cs typeface="Arial" panose="020B0604020202020204" pitchFamily="34" charset="0"/>
+              </a:rPr>
+              <a:t>:</a:t>
+            </a:r>
+            <a:endParaRPr lang="en-US" sz="1100" dirty="0">
+              <a:latin typeface="Calibri" panose="020F0502020204030204" pitchFamily="34" charset="0"/>
+              <a:ea typeface="Calibri" panose="020F0502020204030204" pitchFamily="34" charset="0"/>
+              <a:cs typeface="Arial" panose="020B0604020202020204" pitchFamily="34" charset="0"/>
+            </a:endParaRPr>
+          </a:p>
+          <a:p>
+            <a:pPr marL="742950" marR="0" lvl="1" indent="-285750">
+              <a:spcBef>
+                <a:spcPts val="0"/>
+              </a:spcBef>
+              <a:spcAft>
+                <a:spcPts val="800"/>
+              </a:spcAft>
+              <a:buSzPts val="1000"/>
+              <a:buFont typeface="Courier New" panose="02070309020205020404" pitchFamily="49" charset="0"/>
+              <a:buChar char="o"/>
+              <a:tabLst>
+                <a:tab pos="914400" algn="l"/>
+              </a:tabLst>
+            </a:pPr>
+            <a:r>
+              <a:rPr lang="en-US" sz="1200" dirty="0">
+                <a:solidFill>
+                  <a:srgbClr val="FF0000"/>
+                </a:solidFill>
+                <a:latin typeface="Times New Roman" panose="02020603050405020304" pitchFamily="18" charset="0"/>
+                <a:ea typeface="Times New Roman" panose="02020603050405020304" pitchFamily="18" charset="0"/>
+                <a:cs typeface="Times New Roman" panose="02020603050405020304" pitchFamily="18" charset="0"/>
+              </a:rPr>
+              <a:t>Which age groups </a:t>
+            </a:r>
+            <a:r>
+              <a:rPr lang="en-US" sz="1200" dirty="0">
+                <a:latin typeface="Times New Roman" panose="02020603050405020304" pitchFamily="18" charset="0"/>
+                <a:ea typeface="Times New Roman" panose="02020603050405020304" pitchFamily="18" charset="0"/>
+                <a:cs typeface="Times New Roman" panose="02020603050405020304" pitchFamily="18" charset="0"/>
+              </a:rPr>
+              <a:t>or demographics are more likely to make a purchase?</a:t>
+            </a:r>
+            <a:endParaRPr lang="en-US" sz="1100" dirty="0">
+              <a:latin typeface="Calibri" panose="020F0502020204030204" pitchFamily="34" charset="0"/>
+              <a:ea typeface="Calibri" panose="020F0502020204030204" pitchFamily="34" charset="0"/>
+              <a:cs typeface="Times New Roman" panose="02020603050405020304" pitchFamily="18" charset="0"/>
+            </a:endParaRPr>
+          </a:p>
+          <a:p>
+            <a:pPr marL="742950" marR="0" lvl="1" indent="-285750">
+              <a:spcBef>
+                <a:spcPts val="0"/>
+              </a:spcBef>
+              <a:spcAft>
+                <a:spcPts val="800"/>
+              </a:spcAft>
+              <a:buSzPts val="1000"/>
+              <a:buFont typeface="Courier New" panose="02070309020205020404" pitchFamily="49" charset="0"/>
+              <a:buChar char="o"/>
+              <a:tabLst>
+                <a:tab pos="914400" algn="l"/>
+              </a:tabLst>
+            </a:pPr>
+            <a:r>
+              <a:rPr lang="en-US" sz="1200" dirty="0">
+                <a:solidFill>
+                  <a:srgbClr val="FF0000"/>
+                </a:solidFill>
+                <a:latin typeface="Times New Roman" panose="02020603050405020304" pitchFamily="18" charset="0"/>
+                <a:ea typeface="Times New Roman" panose="02020603050405020304" pitchFamily="18" charset="0"/>
+                <a:cs typeface="Times New Roman" panose="02020603050405020304" pitchFamily="18" charset="0"/>
+              </a:rPr>
+              <a:t>What impact do promotions </a:t>
+            </a:r>
+            <a:r>
+              <a:rPr lang="en-US" sz="1200" dirty="0">
+                <a:latin typeface="Times New Roman" panose="02020603050405020304" pitchFamily="18" charset="0"/>
+                <a:ea typeface="Times New Roman" panose="02020603050405020304" pitchFamily="18" charset="0"/>
+                <a:cs typeface="Times New Roman" panose="02020603050405020304" pitchFamily="18" charset="0"/>
+              </a:rPr>
+              <a:t>(discounts, free shipping) have on purchasing decisions?</a:t>
+            </a:r>
+            <a:endParaRPr lang="en-US" sz="1100" dirty="0">
+              <a:latin typeface="Calibri" panose="020F0502020204030204" pitchFamily="34" charset="0"/>
+              <a:ea typeface="Calibri" panose="020F0502020204030204" pitchFamily="34" charset="0"/>
+              <a:cs typeface="Times New Roman" panose="02020603050405020304" pitchFamily="18" charset="0"/>
+            </a:endParaRPr>
+          </a:p>
+          <a:p>
+            <a:pPr marL="742950" marR="0" lvl="1" indent="-285750">
+              <a:spcBef>
+                <a:spcPts val="0"/>
+              </a:spcBef>
+              <a:spcAft>
+                <a:spcPts val="800"/>
+              </a:spcAft>
+              <a:buSzPts val="1000"/>
+              <a:buFont typeface="Courier New" panose="02070309020205020404" pitchFamily="49" charset="0"/>
+              <a:buChar char="o"/>
+              <a:tabLst>
+                <a:tab pos="914400" algn="l"/>
+              </a:tabLst>
+            </a:pPr>
+            <a:r>
+              <a:rPr lang="en-US" sz="1200" dirty="0">
+                <a:solidFill>
+                  <a:srgbClr val="FF0000"/>
+                </a:solidFill>
+                <a:latin typeface="Times New Roman" panose="02020603050405020304" pitchFamily="18" charset="0"/>
+                <a:ea typeface="Times New Roman" panose="02020603050405020304" pitchFamily="18" charset="0"/>
+                <a:cs typeface="Times New Roman" panose="02020603050405020304" pitchFamily="18" charset="0"/>
+              </a:rPr>
+              <a:t>What products are frequently added to the cart but not purchased</a:t>
+            </a:r>
+            <a:r>
+              <a:rPr lang="en-US" sz="1200" dirty="0">
+                <a:latin typeface="Times New Roman" panose="02020603050405020304" pitchFamily="18" charset="0"/>
+                <a:ea typeface="Times New Roman" panose="02020603050405020304" pitchFamily="18" charset="0"/>
+                <a:cs typeface="Times New Roman" panose="02020603050405020304" pitchFamily="18" charset="0"/>
+              </a:rPr>
+              <a:t>?</a:t>
+            </a:r>
+            <a:endParaRPr lang="en-US" sz="1100" dirty="0">
+              <a:latin typeface="Calibri" panose="020F0502020204030204" pitchFamily="34" charset="0"/>
+              <a:ea typeface="Calibri" panose="020F0502020204030204" pitchFamily="34" charset="0"/>
+              <a:cs typeface="Times New Roman" panose="02020603050405020304" pitchFamily="18" charset="0"/>
+            </a:endParaRPr>
+          </a:p>
+          <a:p>
+            <a:pPr marL="342900" marR="0" lvl="0" indent="-342900">
+              <a:spcBef>
+                <a:spcPts val="0"/>
+              </a:spcBef>
+              <a:spcAft>
+                <a:spcPts val="800"/>
+              </a:spcAft>
+              <a:buSzPts val="1000"/>
+              <a:buFont typeface="Symbol" panose="05050102010706020507" pitchFamily="18" charset="2"/>
+              <a:buChar char=""/>
+              <a:tabLst>
+                <a:tab pos="457200" algn="l"/>
+              </a:tabLst>
+            </a:pPr>
+            <a:r>
+              <a:rPr lang="en-US" sz="1200" b="1" dirty="0">
+                <a:latin typeface="Times New Roman" panose="02020603050405020304" pitchFamily="18" charset="0"/>
+                <a:ea typeface="Times New Roman" panose="02020603050405020304" pitchFamily="18" charset="0"/>
+                <a:cs typeface="Arial" panose="020B0604020202020204" pitchFamily="34" charset="0"/>
+              </a:rPr>
+              <a:t>Key Performance Indicators (KPIs)</a:t>
+            </a:r>
+            <a:r>
+              <a:rPr lang="en-US" sz="1200" dirty="0">
+                <a:latin typeface="Times New Roman" panose="02020603050405020304" pitchFamily="18" charset="0"/>
+                <a:ea typeface="Times New Roman" panose="02020603050405020304" pitchFamily="18" charset="0"/>
+                <a:cs typeface="Arial" panose="020B0604020202020204" pitchFamily="34" charset="0"/>
+              </a:rPr>
+              <a:t>:</a:t>
+            </a:r>
+            <a:endParaRPr lang="en-US" sz="1100" dirty="0">
+              <a:latin typeface="Calibri" panose="020F0502020204030204" pitchFamily="34" charset="0"/>
+              <a:ea typeface="Calibri" panose="020F0502020204030204" pitchFamily="34" charset="0"/>
+              <a:cs typeface="Arial" panose="020B0604020202020204" pitchFamily="34" charset="0"/>
+            </a:endParaRPr>
+          </a:p>
+          <a:p>
+            <a:pPr marL="742950" marR="0" lvl="1" indent="-285750">
+              <a:spcBef>
+                <a:spcPts val="0"/>
+              </a:spcBef>
+              <a:spcAft>
+                <a:spcPts val="800"/>
+              </a:spcAft>
+              <a:buSzPts val="1000"/>
+              <a:buFont typeface="Courier New" panose="02070309020205020404" pitchFamily="49" charset="0"/>
+              <a:buChar char="o"/>
+              <a:tabLst>
+                <a:tab pos="914400" algn="l"/>
+              </a:tabLst>
+            </a:pPr>
+            <a:r>
+              <a:rPr lang="en-US" sz="1200" dirty="0">
+                <a:solidFill>
+                  <a:srgbClr val="FF0000"/>
+                </a:solidFill>
+                <a:latin typeface="Times New Roman" panose="02020603050405020304" pitchFamily="18" charset="0"/>
+                <a:ea typeface="Times New Roman" panose="02020603050405020304" pitchFamily="18" charset="0"/>
+                <a:cs typeface="Times New Roman" panose="02020603050405020304" pitchFamily="18" charset="0"/>
+              </a:rPr>
+              <a:t>Number of completed purchases</a:t>
+            </a:r>
+            <a:r>
+              <a:rPr lang="en-US" sz="1200" dirty="0">
+                <a:latin typeface="Times New Roman" panose="02020603050405020304" pitchFamily="18" charset="0"/>
+                <a:ea typeface="Times New Roman" panose="02020603050405020304" pitchFamily="18" charset="0"/>
+                <a:cs typeface="Times New Roman" panose="02020603050405020304" pitchFamily="18" charset="0"/>
+              </a:rPr>
+              <a:t>.</a:t>
+            </a:r>
+            <a:endParaRPr lang="en-US" sz="1100" dirty="0">
+              <a:latin typeface="Calibri" panose="020F0502020204030204" pitchFamily="34" charset="0"/>
+              <a:ea typeface="Calibri" panose="020F0502020204030204" pitchFamily="34" charset="0"/>
+              <a:cs typeface="Times New Roman" panose="02020603050405020304" pitchFamily="18" charset="0"/>
+            </a:endParaRPr>
+          </a:p>
+          <a:p>
+            <a:pPr marL="742950" marR="0" lvl="1" indent="-285750">
+              <a:spcBef>
+                <a:spcPts val="0"/>
+              </a:spcBef>
+              <a:spcAft>
+                <a:spcPts val="800"/>
+              </a:spcAft>
+              <a:buSzPts val="1000"/>
+              <a:buFont typeface="Courier New" panose="02070309020205020404" pitchFamily="49" charset="0"/>
+              <a:buChar char="o"/>
+              <a:tabLst>
+                <a:tab pos="914400" algn="l"/>
+              </a:tabLst>
+            </a:pPr>
+            <a:r>
+              <a:rPr lang="en-US" sz="1200" dirty="0">
+                <a:solidFill>
+                  <a:srgbClr val="FF0000"/>
+                </a:solidFill>
+                <a:latin typeface="Times New Roman" panose="02020603050405020304" pitchFamily="18" charset="0"/>
+                <a:ea typeface="Times New Roman" panose="02020603050405020304" pitchFamily="18" charset="0"/>
+                <a:cs typeface="Times New Roman" panose="02020603050405020304" pitchFamily="18" charset="0"/>
+              </a:rPr>
+              <a:t>Conversion rate </a:t>
+            </a:r>
+            <a:r>
+              <a:rPr lang="en-US" sz="1200" dirty="0">
+                <a:latin typeface="Times New Roman" panose="02020603050405020304" pitchFamily="18" charset="0"/>
+                <a:ea typeface="Times New Roman" panose="02020603050405020304" pitchFamily="18" charset="0"/>
+                <a:cs typeface="Times New Roman" panose="02020603050405020304" pitchFamily="18" charset="0"/>
+              </a:rPr>
+              <a:t>(percentage of visitors who make a purchase).</a:t>
+            </a:r>
+            <a:endParaRPr lang="en-US" sz="1100" dirty="0">
+              <a:latin typeface="Calibri" panose="020F0502020204030204" pitchFamily="34" charset="0"/>
+              <a:ea typeface="Calibri" panose="020F0502020204030204" pitchFamily="34" charset="0"/>
+              <a:cs typeface="Times New Roman" panose="02020603050405020304" pitchFamily="18" charset="0"/>
+            </a:endParaRPr>
+          </a:p>
+          <a:p>
+            <a:pPr marL="742950" marR="0" lvl="1" indent="-285750">
+              <a:spcBef>
+                <a:spcPts val="0"/>
+              </a:spcBef>
+              <a:spcAft>
+                <a:spcPts val="800"/>
+              </a:spcAft>
+              <a:buSzPts val="1000"/>
+              <a:buFont typeface="Courier New" panose="02070309020205020404" pitchFamily="49" charset="0"/>
+              <a:buChar char="o"/>
+              <a:tabLst>
+                <a:tab pos="914400" algn="l"/>
+              </a:tabLst>
+            </a:pPr>
+            <a:r>
+              <a:rPr lang="en-US" sz="1200" dirty="0">
+                <a:latin typeface="Times New Roman" panose="02020603050405020304" pitchFamily="18" charset="0"/>
+                <a:ea typeface="Times New Roman" panose="02020603050405020304" pitchFamily="18" charset="0"/>
+                <a:cs typeface="Times New Roman" panose="02020603050405020304" pitchFamily="18" charset="0"/>
+              </a:rPr>
+              <a:t>Average order value.</a:t>
+            </a:r>
+            <a:endParaRPr lang="en-US" sz="1100" dirty="0">
+              <a:latin typeface="Calibri" panose="020F0502020204030204" pitchFamily="34" charset="0"/>
+              <a:ea typeface="Calibri" panose="020F0502020204030204" pitchFamily="34" charset="0"/>
+              <a:cs typeface="Times New Roman" panose="02020603050405020304" pitchFamily="18" charset="0"/>
+            </a:endParaRPr>
+          </a:p>
+          <a:p>
+            <a:pPr marL="742950" marR="0" lvl="1" indent="-285750">
+              <a:spcBef>
+                <a:spcPts val="0"/>
+              </a:spcBef>
+              <a:spcAft>
+                <a:spcPts val="800"/>
+              </a:spcAft>
+              <a:buSzPts val="1000"/>
+              <a:buFont typeface="Courier New" panose="02070309020205020404" pitchFamily="49" charset="0"/>
+              <a:buChar char="o"/>
+              <a:tabLst>
+                <a:tab pos="914400" algn="l"/>
+              </a:tabLst>
+            </a:pPr>
+            <a:r>
+              <a:rPr lang="en-US" sz="1200" dirty="0">
+                <a:solidFill>
+                  <a:srgbClr val="FF0000"/>
+                </a:solidFill>
+                <a:latin typeface="Times New Roman" panose="02020603050405020304" pitchFamily="18" charset="0"/>
+                <a:ea typeface="Times New Roman" panose="02020603050405020304" pitchFamily="18" charset="0"/>
+                <a:cs typeface="Times New Roman" panose="02020603050405020304" pitchFamily="18" charset="0"/>
+              </a:rPr>
+              <a:t>Ratio of products added to the cart vs. products purchased</a:t>
+            </a:r>
+            <a:r>
+              <a:rPr lang="en-US" sz="1200" dirty="0">
+                <a:latin typeface="Times New Roman" panose="02020603050405020304" pitchFamily="18" charset="0"/>
+                <a:ea typeface="Times New Roman" panose="02020603050405020304" pitchFamily="18" charset="0"/>
+                <a:cs typeface="Times New Roman" panose="02020603050405020304" pitchFamily="18" charset="0"/>
+              </a:rPr>
+              <a:t>.</a:t>
+            </a:r>
+            <a:endParaRPr lang="en-US" sz="1100" dirty="0">
+              <a:latin typeface="Calibri" panose="020F0502020204030204" pitchFamily="34" charset="0"/>
+              <a:ea typeface="Calibri" panose="020F0502020204030204" pitchFamily="34" charset="0"/>
+              <a:cs typeface="Times New Roman" panose="02020603050405020304" pitchFamily="18" charset="0"/>
+            </a:endParaRPr>
+          </a:p>
+          <a:p>
+            <a:pPr marL="342900" marR="0" lvl="0" indent="-342900">
+              <a:spcBef>
+                <a:spcPts val="0"/>
+              </a:spcBef>
+              <a:spcAft>
+                <a:spcPts val="800"/>
+              </a:spcAft>
+              <a:buSzPts val="1000"/>
+              <a:buFont typeface="Symbol" panose="05050102010706020507" pitchFamily="18" charset="2"/>
+              <a:buChar char=""/>
+              <a:tabLst>
+                <a:tab pos="457200" algn="l"/>
+              </a:tabLst>
+            </a:pPr>
+            <a:r>
+              <a:rPr lang="en-US" sz="1200" b="1" dirty="0">
+                <a:latin typeface="Times New Roman" panose="02020603050405020304" pitchFamily="18" charset="0"/>
+                <a:ea typeface="Times New Roman" panose="02020603050405020304" pitchFamily="18" charset="0"/>
+                <a:cs typeface="Arial" panose="020B0604020202020204" pitchFamily="34" charset="0"/>
+              </a:rPr>
+              <a:t>Risk Assessment</a:t>
+            </a:r>
+            <a:r>
+              <a:rPr lang="en-US" sz="1200" dirty="0">
+                <a:latin typeface="Times New Roman" panose="02020603050405020304" pitchFamily="18" charset="0"/>
+                <a:ea typeface="Times New Roman" panose="02020603050405020304" pitchFamily="18" charset="0"/>
+                <a:cs typeface="Arial" panose="020B0604020202020204" pitchFamily="34" charset="0"/>
+              </a:rPr>
+              <a:t>:</a:t>
+            </a:r>
+            <a:endParaRPr lang="en-US" sz="1100" dirty="0">
+              <a:latin typeface="Calibri" panose="020F0502020204030204" pitchFamily="34" charset="0"/>
+              <a:ea typeface="Calibri" panose="020F0502020204030204" pitchFamily="34" charset="0"/>
+              <a:cs typeface="Arial" panose="020B0604020202020204" pitchFamily="34" charset="0"/>
+            </a:endParaRPr>
+          </a:p>
+          <a:p>
+            <a:pPr marL="742950" marR="0" lvl="1" indent="-285750">
+              <a:spcBef>
+                <a:spcPts val="0"/>
+              </a:spcBef>
+              <a:spcAft>
+                <a:spcPts val="800"/>
+              </a:spcAft>
+              <a:buSzPts val="1000"/>
+              <a:buFont typeface="Courier New" panose="02070309020205020404" pitchFamily="49" charset="0"/>
+              <a:buChar char="o"/>
+              <a:tabLst>
+                <a:tab pos="914400" algn="l"/>
+              </a:tabLst>
+            </a:pPr>
+            <a:r>
+              <a:rPr lang="en-US" sz="1200" dirty="0">
+                <a:latin typeface="Times New Roman" panose="02020603050405020304" pitchFamily="18" charset="0"/>
+                <a:ea typeface="Times New Roman" panose="02020603050405020304" pitchFamily="18" charset="0"/>
+                <a:cs typeface="Times New Roman" panose="02020603050405020304" pitchFamily="18" charset="0"/>
+              </a:rPr>
+              <a:t>Some customer behaviors might be missing from the data (e.g., interactions with promotions outside the website).</a:t>
+            </a:r>
+            <a:endParaRPr lang="en-US" sz="1100" dirty="0">
+              <a:latin typeface="Calibri" panose="020F0502020204030204" pitchFamily="34" charset="0"/>
+              <a:ea typeface="Calibri" panose="020F0502020204030204" pitchFamily="34" charset="0"/>
+              <a:cs typeface="Times New Roman" panose="02020603050405020304" pitchFamily="18" charset="0"/>
+            </a:endParaRPr>
+          </a:p>
+          <a:p>
+            <a:pPr marL="742950" marR="0" lvl="1" indent="-285750">
+              <a:spcBef>
+                <a:spcPts val="0"/>
+              </a:spcBef>
+              <a:spcAft>
+                <a:spcPts val="800"/>
+              </a:spcAft>
+              <a:buSzPts val="1000"/>
+              <a:buFont typeface="Courier New" panose="02070309020205020404" pitchFamily="49" charset="0"/>
+              <a:buChar char="o"/>
+              <a:tabLst>
+                <a:tab pos="914400" algn="l"/>
+              </a:tabLst>
+            </a:pPr>
+            <a:r>
+              <a:rPr lang="en-US" sz="1200" dirty="0">
+                <a:latin typeface="Times New Roman" panose="02020603050405020304" pitchFamily="18" charset="0"/>
+                <a:ea typeface="Times New Roman" panose="02020603050405020304" pitchFamily="18" charset="0"/>
+                <a:cs typeface="Times New Roman" panose="02020603050405020304" pitchFamily="18" charset="0"/>
+              </a:rPr>
+              <a:t>Data privacy regulations (such as GDPR) need to be respected.</a:t>
+            </a:r>
+            <a:endParaRPr lang="en-US" sz="1100" dirty="0">
+              <a:latin typeface="Calibri" panose="020F0502020204030204" pitchFamily="34" charset="0"/>
+              <a:ea typeface="Calibri" panose="020F0502020204030204" pitchFamily="34" charset="0"/>
+              <a:cs typeface="Times New Roman" panose="02020603050405020304" pitchFamily="18" charset="0"/>
+            </a:endParaRPr>
+          </a:p>
+          <a:p>
+            <a:pPr marL="342900" marR="0" lvl="0" indent="-342900">
+              <a:spcBef>
+                <a:spcPts val="0"/>
+              </a:spcBef>
+              <a:spcAft>
+                <a:spcPts val="800"/>
+              </a:spcAft>
+              <a:buSzPts val="1000"/>
+              <a:buFont typeface="Symbol" panose="05050102010706020507" pitchFamily="18" charset="2"/>
+              <a:buChar char=""/>
+              <a:tabLst>
+                <a:tab pos="457200" algn="l"/>
+              </a:tabLst>
+            </a:pPr>
+            <a:r>
+              <a:rPr lang="en-US" sz="1200" b="1" dirty="0">
+                <a:latin typeface="Times New Roman" panose="02020603050405020304" pitchFamily="18" charset="0"/>
+                <a:ea typeface="Times New Roman" panose="02020603050405020304" pitchFamily="18" charset="0"/>
+                <a:cs typeface="Arial" panose="020B0604020202020204" pitchFamily="34" charset="0"/>
+              </a:rPr>
+              <a:t>Resources</a:t>
+            </a:r>
+            <a:r>
+              <a:rPr lang="en-US" sz="1200" dirty="0">
+                <a:latin typeface="Times New Roman" panose="02020603050405020304" pitchFamily="18" charset="0"/>
+                <a:ea typeface="Times New Roman" panose="02020603050405020304" pitchFamily="18" charset="0"/>
+                <a:cs typeface="Arial" panose="020B0604020202020204" pitchFamily="34" charset="0"/>
+              </a:rPr>
+              <a:t>:</a:t>
+            </a:r>
+            <a:endParaRPr lang="en-US" sz="1100" dirty="0">
+              <a:latin typeface="Calibri" panose="020F0502020204030204" pitchFamily="34" charset="0"/>
+              <a:ea typeface="Calibri" panose="020F0502020204030204" pitchFamily="34" charset="0"/>
+              <a:cs typeface="Arial" panose="020B0604020202020204" pitchFamily="34" charset="0"/>
+            </a:endParaRPr>
+          </a:p>
+          <a:p>
+            <a:pPr marL="742950" marR="0" lvl="1" indent="-285750">
+              <a:spcBef>
+                <a:spcPts val="0"/>
+              </a:spcBef>
+              <a:spcAft>
+                <a:spcPts val="800"/>
+              </a:spcAft>
+              <a:buSzPts val="1000"/>
+              <a:buFont typeface="Courier New" panose="02070309020205020404" pitchFamily="49" charset="0"/>
+              <a:buChar char="o"/>
+              <a:tabLst>
+                <a:tab pos="914400" algn="l"/>
+              </a:tabLst>
+            </a:pPr>
+            <a:r>
+              <a:rPr lang="en-US" sz="1200" dirty="0">
+                <a:latin typeface="Times New Roman" panose="02020603050405020304" pitchFamily="18" charset="0"/>
+                <a:ea typeface="Times New Roman" panose="02020603050405020304" pitchFamily="18" charset="0"/>
+                <a:cs typeface="Times New Roman" panose="02020603050405020304" pitchFamily="18" charset="0"/>
+              </a:rPr>
+              <a:t>The data analysis team has tools like Python, R, and access to customer databases.</a:t>
+            </a:r>
+            <a:endParaRPr lang="en-US" sz="1100" dirty="0">
+              <a:latin typeface="Calibri" panose="020F0502020204030204" pitchFamily="34" charset="0"/>
+              <a:ea typeface="Calibri" panose="020F0502020204030204" pitchFamily="34" charset="0"/>
+              <a:cs typeface="Times New Roman" panose="02020603050405020304" pitchFamily="18" charset="0"/>
+            </a:endParaRPr>
+          </a:p>
+          <a:p>
+            <a:pPr marL="742950" marR="0" lvl="1" indent="-285750">
+              <a:spcBef>
+                <a:spcPts val="0"/>
+              </a:spcBef>
+              <a:spcAft>
+                <a:spcPts val="800"/>
+              </a:spcAft>
+              <a:buSzPts val="1000"/>
+              <a:buFont typeface="Courier New" panose="02070309020205020404" pitchFamily="49" charset="0"/>
+              <a:buChar char="o"/>
+              <a:tabLst>
+                <a:tab pos="914400" algn="l"/>
+              </a:tabLst>
+            </a:pPr>
+            <a:r>
+              <a:rPr lang="en-US" sz="1200" dirty="0">
+                <a:latin typeface="Times New Roman" panose="02020603050405020304" pitchFamily="18" charset="0"/>
+                <a:ea typeface="Times New Roman" panose="02020603050405020304" pitchFamily="18" charset="0"/>
+                <a:cs typeface="Times New Roman" panose="02020603050405020304" pitchFamily="18" charset="0"/>
+              </a:rPr>
+              <a:t>There’s a budget for acquiring external data or tools if needed.</a:t>
+            </a:r>
+            <a:endParaRPr lang="en-US" sz="1100" dirty="0">
+              <a:latin typeface="Calibri" panose="020F0502020204030204" pitchFamily="34" charset="0"/>
+              <a:ea typeface="Calibri" panose="020F0502020204030204" pitchFamily="34" charset="0"/>
+              <a:cs typeface="Times New Roman" panose="02020603050405020304" pitchFamily="18" charset="0"/>
+            </a:endParaRPr>
+          </a:p>
+        </p:txBody>
+      </p:sp>
     </p:spTree>
     <p:extLst>
       <p:ext uri="{BB962C8B-B14F-4D97-AF65-F5344CB8AC3E}">
-        <p14:creationId xmlns:p14="http://schemas.microsoft.com/office/powerpoint/2010/main" val="2810357117"/>
+        <p14:creationId xmlns:p14="http://schemas.microsoft.com/office/powerpoint/2010/main" val="3087456825"/>
       </p:ext>
     </p:extLst>
   </p:cSld>
@@ -6527,6 +5192,225 @@
         </p:nvSpPr>
         <p:spPr>
           <a:xfrm>
+            <a:off x="838199" y="1825625"/>
+            <a:ext cx="8219537" cy="4667250"/>
+          </a:xfrm>
+        </p:spPr>
+        <p:txBody>
+          <a:bodyPr>
+            <a:normAutofit fontScale="55000" lnSpcReduction="20000"/>
+          </a:bodyPr>
+          <a:lstStyle/>
+          <a:p>
+            <a:pPr marL="0" indent="0">
+              <a:buNone/>
+            </a:pPr>
+            <a:r>
+              <a:rPr lang="en-US" dirty="0"/>
+              <a:t>Data understanding starts with an original data collection and proceeds with operations to get familiar with the data, to data quality issues, to find better insight in data, or to detect interesting subsets for concealed information hypothesis.</a:t>
+            </a:r>
+          </a:p>
+          <a:p>
+            <a:pPr marL="0" indent="0">
+              <a:buNone/>
+            </a:pPr>
+            <a:r>
+              <a:rPr lang="en-US" b="1" dirty="0"/>
+              <a:t>Tasks:</a:t>
+            </a:r>
+            <a:endParaRPr lang="en-US" dirty="0"/>
+          </a:p>
+          <a:p>
+            <a:r>
+              <a:rPr lang="en-US" dirty="0"/>
+              <a:t>Collects initial data</a:t>
+            </a:r>
+          </a:p>
+          <a:p>
+            <a:r>
+              <a:rPr lang="en-US" dirty="0"/>
+              <a:t>Describe data</a:t>
+            </a:r>
+          </a:p>
+          <a:p>
+            <a:r>
+              <a:rPr lang="en-US" dirty="0"/>
+              <a:t>Explore data</a:t>
+            </a:r>
+          </a:p>
+          <a:p>
+            <a:r>
+              <a:rPr lang="en-US" dirty="0"/>
+              <a:t>Verify data quality</a:t>
+            </a:r>
+          </a:p>
+          <a:p>
+            <a:pPr marL="0" indent="0">
+              <a:buNone/>
+            </a:pPr>
+            <a:r>
+              <a:rPr lang="en-US" b="1" dirty="0"/>
+              <a:t>Collect initial data:</a:t>
+            </a:r>
+            <a:endParaRPr lang="en-US" dirty="0"/>
+          </a:p>
+          <a:p>
+            <a:r>
+              <a:rPr lang="en-US" dirty="0"/>
+              <a:t>It acquires the information mentioned in the project resources.</a:t>
+            </a:r>
+          </a:p>
+          <a:p>
+            <a:r>
+              <a:rPr lang="en-US" dirty="0"/>
+              <a:t>It includes data loading if needed for data understanding.</a:t>
+            </a:r>
+          </a:p>
+          <a:p>
+            <a:r>
+              <a:rPr lang="en-US" dirty="0"/>
+              <a:t>It may lead to original data preparation steps.</a:t>
+            </a:r>
+          </a:p>
+          <a:p>
+            <a:r>
+              <a:rPr lang="en-US" dirty="0"/>
+              <a:t>If various information sources are acquired then integration is an extra issue, either here or at the subsequent stage of data preparation.</a:t>
+            </a:r>
+          </a:p>
+          <a:p>
+            <a:pPr marL="0" indent="0">
+              <a:buNone/>
+            </a:pPr>
+            <a:r>
+              <a:rPr lang="en-US" b="1" dirty="0"/>
+              <a:t>Describe data:</a:t>
+            </a:r>
+            <a:endParaRPr lang="en-US" dirty="0"/>
+          </a:p>
+          <a:p>
+            <a:r>
+              <a:rPr lang="en-US" dirty="0"/>
+              <a:t>It examines the "gross" or "surface" characteristics of the information obtained.</a:t>
+            </a:r>
+          </a:p>
+          <a:p>
+            <a:r>
+              <a:rPr lang="en-US" dirty="0"/>
+              <a:t>It reports on the outcomes.</a:t>
+            </a:r>
+          </a:p>
+          <a:p>
+            <a:endParaRPr lang="en-US" dirty="0"/>
+          </a:p>
+        </p:txBody>
+      </p:sp>
+      <p:pic>
+        <p:nvPicPr>
+          <p:cNvPr id="6" name="Picture 5">
+            <a:extLst>
+              <a:ext uri="{FF2B5EF4-FFF2-40B4-BE49-F238E27FC236}">
+                <a16:creationId xmlns:a16="http://schemas.microsoft.com/office/drawing/2014/main" id="{DD42A04E-7FA1-47E0-8CDD-5E9CAC4EFD55}"/>
+              </a:ext>
+            </a:extLst>
+          </p:cNvPr>
+          <p:cNvPicPr>
+            <a:picLocks noChangeAspect="1"/>
+          </p:cNvPicPr>
+          <p:nvPr/>
+        </p:nvPicPr>
+        <p:blipFill>
+          <a:blip r:embed="rId2"/>
+          <a:stretch>
+            <a:fillRect/>
+          </a:stretch>
+        </p:blipFill>
+        <p:spPr>
+          <a:xfrm>
+            <a:off x="9414123" y="1825625"/>
+            <a:ext cx="2094951" cy="4509057"/>
+          </a:xfrm>
+          <a:prstGeom prst="rect">
+            <a:avLst/>
+          </a:prstGeom>
+        </p:spPr>
+      </p:pic>
+    </p:spTree>
+    <p:extLst>
+      <p:ext uri="{BB962C8B-B14F-4D97-AF65-F5344CB8AC3E}">
+        <p14:creationId xmlns:p14="http://schemas.microsoft.com/office/powerpoint/2010/main" val="2810357117"/>
+      </p:ext>
+    </p:extLst>
+  </p:cSld>
+  <p:clrMapOvr>
+    <a:masterClrMapping/>
+  </p:clrMapOvr>
+</p:sld>
+</file>
+
+<file path=ppt/slides/slide13.xml><?xml version="1.0" encoding="utf-8"?>
+<p:sld xmlns:a="http://schemas.openxmlformats.org/drawingml/2006/main" xmlns:r="http://schemas.openxmlformats.org/officeDocument/2006/relationships" xmlns:p="http://schemas.openxmlformats.org/presentationml/2006/main">
+  <p:cSld>
+    <p:spTree>
+      <p:nvGrpSpPr>
+        <p:cNvPr id="1" name=""/>
+        <p:cNvGrpSpPr/>
+        <p:nvPr/>
+      </p:nvGrpSpPr>
+      <p:grpSpPr>
+        <a:xfrm>
+          <a:off x="0" y="0"/>
+          <a:ext cx="0" cy="0"/>
+          <a:chOff x="0" y="0"/>
+          <a:chExt cx="0" cy="0"/>
+        </a:xfrm>
+      </p:grpSpPr>
+      <p:sp>
+        <p:nvSpPr>
+          <p:cNvPr id="2" name="Title 1">
+            <a:extLst>
+              <a:ext uri="{FF2B5EF4-FFF2-40B4-BE49-F238E27FC236}">
+                <a16:creationId xmlns:a16="http://schemas.microsoft.com/office/drawing/2014/main" id="{6C057820-CF00-4795-9097-113B9CA6485A}"/>
+              </a:ext>
+            </a:extLst>
+          </p:cNvPr>
+          <p:cNvSpPr>
+            <a:spLocks noGrp="1"/>
+          </p:cNvSpPr>
+          <p:nvPr>
+            <p:ph type="title"/>
+          </p:nvPr>
+        </p:nvSpPr>
+        <p:spPr/>
+        <p:txBody>
+          <a:bodyPr/>
+          <a:lstStyle/>
+          <a:p>
+            <a:r>
+              <a:rPr lang="en-US" dirty="0"/>
+              <a:t>2- Data Understanding:</a:t>
+            </a:r>
+          </a:p>
+        </p:txBody>
+      </p:sp>
+      <p:sp>
+        <p:nvSpPr>
+          <p:cNvPr id="3" name="Content Placeholder 2">
+            <a:extLst>
+              <a:ext uri="{FF2B5EF4-FFF2-40B4-BE49-F238E27FC236}">
+                <a16:creationId xmlns:a16="http://schemas.microsoft.com/office/drawing/2014/main" id="{8D85989A-80AD-468A-8F1A-3E3AE90C37B2}"/>
+              </a:ext>
+            </a:extLst>
+          </p:cNvPr>
+          <p:cNvSpPr>
+            <a:spLocks noGrp="1"/>
+          </p:cNvSpPr>
+          <p:nvPr>
+            <p:ph idx="1"/>
+          </p:nvPr>
+        </p:nvSpPr>
+        <p:spPr>
+          <a:xfrm>
             <a:off x="838200" y="1825625"/>
             <a:ext cx="8167777" cy="4351338"/>
           </a:xfrm>
@@ -6671,7 +5555,7 @@
 </p:sld>
 </file>
 
-<file path=ppt/slides/slide13.xml><?xml version="1.0" encoding="utf-8"?>
+<file path=ppt/slides/slide14.xml><?xml version="1.0" encoding="utf-8"?>
 <p:sld xmlns:a="http://schemas.openxmlformats.org/drawingml/2006/main" xmlns:r="http://schemas.openxmlformats.org/officeDocument/2006/relationships" xmlns:p="http://schemas.openxmlformats.org/presentationml/2006/main">
   <p:cSld>
     <p:spTree>
@@ -7186,224 +6070,6 @@
     <p:extLst>
       <p:ext uri="{BB962C8B-B14F-4D97-AF65-F5344CB8AC3E}">
         <p14:creationId xmlns:p14="http://schemas.microsoft.com/office/powerpoint/2010/main" val="1869085755"/>
-      </p:ext>
-    </p:extLst>
-  </p:cSld>
-  <p:clrMapOvr>
-    <a:masterClrMapping/>
-  </p:clrMapOvr>
-</p:sld>
-</file>
-
-<file path=ppt/slides/slide14.xml><?xml version="1.0" encoding="utf-8"?>
-<p:sld xmlns:a="http://schemas.openxmlformats.org/drawingml/2006/main" xmlns:r="http://schemas.openxmlformats.org/officeDocument/2006/relationships" xmlns:p="http://schemas.openxmlformats.org/presentationml/2006/main">
-  <p:cSld>
-    <p:spTree>
-      <p:nvGrpSpPr>
-        <p:cNvPr id="1" name=""/>
-        <p:cNvGrpSpPr/>
-        <p:nvPr/>
-      </p:nvGrpSpPr>
-      <p:grpSpPr>
-        <a:xfrm>
-          <a:off x="0" y="0"/>
-          <a:ext cx="0" cy="0"/>
-          <a:chOff x="0" y="0"/>
-          <a:chExt cx="0" cy="0"/>
-        </a:xfrm>
-      </p:grpSpPr>
-      <p:sp>
-        <p:nvSpPr>
-          <p:cNvPr id="2" name="Title 1">
-            <a:extLst>
-              <a:ext uri="{FF2B5EF4-FFF2-40B4-BE49-F238E27FC236}">
-                <a16:creationId xmlns:a16="http://schemas.microsoft.com/office/drawing/2014/main" id="{9987501D-B572-4460-8231-76B9F857EC0F}"/>
-              </a:ext>
-            </a:extLst>
-          </p:cNvPr>
-          <p:cNvSpPr>
-            <a:spLocks noGrp="1"/>
-          </p:cNvSpPr>
-          <p:nvPr>
-            <p:ph type="title"/>
-          </p:nvPr>
-        </p:nvSpPr>
-        <p:spPr/>
-        <p:txBody>
-          <a:bodyPr/>
-          <a:lstStyle/>
-          <a:p>
-            <a:r>
-              <a:rPr lang="en-US" dirty="0"/>
-              <a:t>3. Data Preparation</a:t>
-            </a:r>
-          </a:p>
-        </p:txBody>
-      </p:sp>
-      <p:sp>
-        <p:nvSpPr>
-          <p:cNvPr id="3" name="Content Placeholder 2">
-            <a:extLst>
-              <a:ext uri="{FF2B5EF4-FFF2-40B4-BE49-F238E27FC236}">
-                <a16:creationId xmlns:a16="http://schemas.microsoft.com/office/drawing/2014/main" id="{87120F09-B855-46F4-976C-8E2C0397ACE7}"/>
-              </a:ext>
-            </a:extLst>
-          </p:cNvPr>
-          <p:cNvSpPr>
-            <a:spLocks noGrp="1"/>
-          </p:cNvSpPr>
-          <p:nvPr>
-            <p:ph idx="1"/>
-          </p:nvPr>
-        </p:nvSpPr>
-        <p:spPr>
-          <a:xfrm>
-            <a:off x="838200" y="1825624"/>
-            <a:ext cx="7680158" cy="4833967"/>
-          </a:xfrm>
-        </p:spPr>
-        <p:txBody>
-          <a:bodyPr>
-            <a:normAutofit fontScale="85000" lnSpcReduction="20000"/>
-          </a:bodyPr>
-          <a:lstStyle/>
-          <a:p>
-            <a:r>
-              <a:rPr lang="en-US" sz="2000" dirty="0"/>
-              <a:t>It usually takes more than </a:t>
-            </a:r>
-            <a:r>
-              <a:rPr lang="en-US" sz="2000" dirty="0">
-                <a:solidFill>
-                  <a:srgbClr val="FF0000"/>
-                </a:solidFill>
-              </a:rPr>
-              <a:t>90 percent </a:t>
-            </a:r>
-            <a:r>
-              <a:rPr lang="en-US" sz="2000" dirty="0"/>
-              <a:t>of the time.</a:t>
-            </a:r>
-          </a:p>
-          <a:p>
-            <a:r>
-              <a:rPr lang="en-US" sz="2000" dirty="0"/>
-              <a:t>It covers all operations to build the final data set from the original raw information.</a:t>
-            </a:r>
-          </a:p>
-          <a:p>
-            <a:r>
-              <a:rPr lang="en-US" sz="2000" dirty="0"/>
-              <a:t>Data preparation is probable to be done several times and not in any prescribed order.</a:t>
-            </a:r>
-          </a:p>
-          <a:p>
-            <a:pPr marL="0" indent="0">
-              <a:buNone/>
-            </a:pPr>
-            <a:r>
-              <a:rPr lang="en-US" sz="2000" b="1" dirty="0"/>
-              <a:t>Tasks:</a:t>
-            </a:r>
-            <a:endParaRPr lang="en-US" sz="2000" dirty="0"/>
-          </a:p>
-          <a:p>
-            <a:r>
-              <a:rPr lang="en-US" sz="2000" dirty="0"/>
-              <a:t>Select data</a:t>
-            </a:r>
-          </a:p>
-          <a:p>
-            <a:r>
-              <a:rPr lang="en-US" sz="2000" dirty="0"/>
-              <a:t>Clean data</a:t>
-            </a:r>
-          </a:p>
-          <a:p>
-            <a:r>
-              <a:rPr lang="en-US" sz="2000" dirty="0"/>
-              <a:t>Construct data</a:t>
-            </a:r>
-          </a:p>
-          <a:p>
-            <a:r>
-              <a:rPr lang="en-US" sz="2000" dirty="0"/>
-              <a:t>Integrate data</a:t>
-            </a:r>
-          </a:p>
-          <a:p>
-            <a:r>
-              <a:rPr lang="en-US" sz="2000" dirty="0"/>
-              <a:t>Format data</a:t>
-            </a:r>
-          </a:p>
-          <a:p>
-            <a:pPr marL="0" indent="0">
-              <a:buNone/>
-            </a:pPr>
-            <a:r>
-              <a:rPr lang="en-US" sz="2000" b="1" dirty="0"/>
-              <a:t>Select data:</a:t>
-            </a:r>
-            <a:endParaRPr lang="en-US" sz="2000" dirty="0"/>
-          </a:p>
-          <a:p>
-            <a:r>
-              <a:rPr lang="en-US" sz="2000" dirty="0"/>
-              <a:t>It decides which information to be used for evaluation.</a:t>
-            </a:r>
-          </a:p>
-          <a:p>
-            <a:r>
-              <a:rPr lang="en-US" sz="2000" dirty="0"/>
-              <a:t>In the data selection criteria include significance to data mining objectives, quality and technical limitations such as data volume boundaries or data types.</a:t>
-            </a:r>
-          </a:p>
-          <a:p>
-            <a:r>
-              <a:rPr lang="en-US" sz="2000" dirty="0"/>
-              <a:t>It covers the selection of characteristics and the choice of the document in the table.</a:t>
-            </a:r>
-          </a:p>
-          <a:p>
-            <a:endParaRPr lang="en-US" sz="2000" dirty="0"/>
-          </a:p>
-        </p:txBody>
-      </p:sp>
-      <p:pic>
-        <p:nvPicPr>
-          <p:cNvPr id="5" name="Picture 4">
-            <a:extLst>
-              <a:ext uri="{FF2B5EF4-FFF2-40B4-BE49-F238E27FC236}">
-                <a16:creationId xmlns:a16="http://schemas.microsoft.com/office/drawing/2014/main" id="{597389B4-53D0-2971-A749-E12EA0B32C75}"/>
-              </a:ext>
-            </a:extLst>
-          </p:cNvPr>
-          <p:cNvPicPr>
-            <a:picLocks noChangeAspect="1"/>
-          </p:cNvPicPr>
-          <p:nvPr/>
-        </p:nvPicPr>
-        <p:blipFill>
-          <a:blip r:embed="rId2"/>
-          <a:stretch>
-            <a:fillRect/>
-          </a:stretch>
-        </p:blipFill>
-        <p:spPr>
-          <a:xfrm>
-            <a:off x="8612857" y="1825625"/>
-            <a:ext cx="3170825" cy="4478381"/>
-          </a:xfrm>
-          <a:prstGeom prst="rect">
-            <a:avLst/>
-          </a:prstGeom>
-        </p:spPr>
-      </p:pic>
-    </p:spTree>
-    <p:extLst>
-      <p:ext uri="{BB962C8B-B14F-4D97-AF65-F5344CB8AC3E}">
-        <p14:creationId xmlns:p14="http://schemas.microsoft.com/office/powerpoint/2010/main" val="3925652072"/>
       </p:ext>
     </p:extLst>
   </p:cSld>
@@ -7476,6 +6142,224 @@
         </p:nvSpPr>
         <p:spPr>
           <a:xfrm>
+            <a:off x="838200" y="1825624"/>
+            <a:ext cx="7680158" cy="4833967"/>
+          </a:xfrm>
+        </p:spPr>
+        <p:txBody>
+          <a:bodyPr>
+            <a:normAutofit fontScale="85000" lnSpcReduction="20000"/>
+          </a:bodyPr>
+          <a:lstStyle/>
+          <a:p>
+            <a:r>
+              <a:rPr lang="en-US" sz="2000" dirty="0"/>
+              <a:t>It usually takes more than </a:t>
+            </a:r>
+            <a:r>
+              <a:rPr lang="en-US" sz="2000" dirty="0">
+                <a:solidFill>
+                  <a:srgbClr val="FF0000"/>
+                </a:solidFill>
+              </a:rPr>
+              <a:t>90 percent </a:t>
+            </a:r>
+            <a:r>
+              <a:rPr lang="en-US" sz="2000" dirty="0"/>
+              <a:t>of the time.</a:t>
+            </a:r>
+          </a:p>
+          <a:p>
+            <a:r>
+              <a:rPr lang="en-US" sz="2000" dirty="0"/>
+              <a:t>It covers all operations to build the final data set from the original raw information.</a:t>
+            </a:r>
+          </a:p>
+          <a:p>
+            <a:r>
+              <a:rPr lang="en-US" sz="2000" dirty="0"/>
+              <a:t>Data preparation is probable to be done several times and not in any prescribed order.</a:t>
+            </a:r>
+          </a:p>
+          <a:p>
+            <a:pPr marL="0" indent="0">
+              <a:buNone/>
+            </a:pPr>
+            <a:r>
+              <a:rPr lang="en-US" sz="2000" b="1" dirty="0"/>
+              <a:t>Tasks:</a:t>
+            </a:r>
+            <a:endParaRPr lang="en-US" sz="2000" dirty="0"/>
+          </a:p>
+          <a:p>
+            <a:r>
+              <a:rPr lang="en-US" sz="2000" dirty="0"/>
+              <a:t>Select data</a:t>
+            </a:r>
+          </a:p>
+          <a:p>
+            <a:r>
+              <a:rPr lang="en-US" sz="2000" dirty="0"/>
+              <a:t>Clean data</a:t>
+            </a:r>
+          </a:p>
+          <a:p>
+            <a:r>
+              <a:rPr lang="en-US" sz="2000" dirty="0"/>
+              <a:t>Construct data</a:t>
+            </a:r>
+          </a:p>
+          <a:p>
+            <a:r>
+              <a:rPr lang="en-US" sz="2000" dirty="0"/>
+              <a:t>Integrate data</a:t>
+            </a:r>
+          </a:p>
+          <a:p>
+            <a:r>
+              <a:rPr lang="en-US" sz="2000" dirty="0"/>
+              <a:t>Format data</a:t>
+            </a:r>
+          </a:p>
+          <a:p>
+            <a:pPr marL="0" indent="0">
+              <a:buNone/>
+            </a:pPr>
+            <a:r>
+              <a:rPr lang="en-US" sz="2000" b="1" dirty="0"/>
+              <a:t>Select data:</a:t>
+            </a:r>
+            <a:endParaRPr lang="en-US" sz="2000" dirty="0"/>
+          </a:p>
+          <a:p>
+            <a:r>
+              <a:rPr lang="en-US" sz="2000" dirty="0"/>
+              <a:t>It decides which information to be used for evaluation.</a:t>
+            </a:r>
+          </a:p>
+          <a:p>
+            <a:r>
+              <a:rPr lang="en-US" sz="2000" dirty="0"/>
+              <a:t>In the data selection criteria include significance to data mining objectives, quality and technical limitations such as data volume boundaries or data types.</a:t>
+            </a:r>
+          </a:p>
+          <a:p>
+            <a:r>
+              <a:rPr lang="en-US" sz="2000" dirty="0"/>
+              <a:t>It covers the selection of characteristics and the choice of the document in the table.</a:t>
+            </a:r>
+          </a:p>
+          <a:p>
+            <a:endParaRPr lang="en-US" sz="2000" dirty="0"/>
+          </a:p>
+        </p:txBody>
+      </p:sp>
+      <p:pic>
+        <p:nvPicPr>
+          <p:cNvPr id="5" name="Picture 4">
+            <a:extLst>
+              <a:ext uri="{FF2B5EF4-FFF2-40B4-BE49-F238E27FC236}">
+                <a16:creationId xmlns:a16="http://schemas.microsoft.com/office/drawing/2014/main" id="{597389B4-53D0-2971-A749-E12EA0B32C75}"/>
+              </a:ext>
+            </a:extLst>
+          </p:cNvPr>
+          <p:cNvPicPr>
+            <a:picLocks noChangeAspect="1"/>
+          </p:cNvPicPr>
+          <p:nvPr/>
+        </p:nvPicPr>
+        <p:blipFill>
+          <a:blip r:embed="rId2"/>
+          <a:stretch>
+            <a:fillRect/>
+          </a:stretch>
+        </p:blipFill>
+        <p:spPr>
+          <a:xfrm>
+            <a:off x="8612857" y="1825625"/>
+            <a:ext cx="3170825" cy="4478381"/>
+          </a:xfrm>
+          <a:prstGeom prst="rect">
+            <a:avLst/>
+          </a:prstGeom>
+        </p:spPr>
+      </p:pic>
+    </p:spTree>
+    <p:extLst>
+      <p:ext uri="{BB962C8B-B14F-4D97-AF65-F5344CB8AC3E}">
+        <p14:creationId xmlns:p14="http://schemas.microsoft.com/office/powerpoint/2010/main" val="3925652072"/>
+      </p:ext>
+    </p:extLst>
+  </p:cSld>
+  <p:clrMapOvr>
+    <a:masterClrMapping/>
+  </p:clrMapOvr>
+</p:sld>
+</file>
+
+<file path=ppt/slides/slide16.xml><?xml version="1.0" encoding="utf-8"?>
+<p:sld xmlns:a="http://schemas.openxmlformats.org/drawingml/2006/main" xmlns:r="http://schemas.openxmlformats.org/officeDocument/2006/relationships" xmlns:p="http://schemas.openxmlformats.org/presentationml/2006/main">
+  <p:cSld>
+    <p:spTree>
+      <p:nvGrpSpPr>
+        <p:cNvPr id="1" name=""/>
+        <p:cNvGrpSpPr/>
+        <p:nvPr/>
+      </p:nvGrpSpPr>
+      <p:grpSpPr>
+        <a:xfrm>
+          <a:off x="0" y="0"/>
+          <a:ext cx="0" cy="0"/>
+          <a:chOff x="0" y="0"/>
+          <a:chExt cx="0" cy="0"/>
+        </a:xfrm>
+      </p:grpSpPr>
+      <p:sp>
+        <p:nvSpPr>
+          <p:cNvPr id="2" name="Title 1">
+            <a:extLst>
+              <a:ext uri="{FF2B5EF4-FFF2-40B4-BE49-F238E27FC236}">
+                <a16:creationId xmlns:a16="http://schemas.microsoft.com/office/drawing/2014/main" id="{9987501D-B572-4460-8231-76B9F857EC0F}"/>
+              </a:ext>
+            </a:extLst>
+          </p:cNvPr>
+          <p:cNvSpPr>
+            <a:spLocks noGrp="1"/>
+          </p:cNvSpPr>
+          <p:nvPr>
+            <p:ph type="title"/>
+          </p:nvPr>
+        </p:nvSpPr>
+        <p:spPr/>
+        <p:txBody>
+          <a:bodyPr/>
+          <a:lstStyle/>
+          <a:p>
+            <a:r>
+              <a:rPr lang="en-US" dirty="0"/>
+              <a:t>3. Data Preparation</a:t>
+            </a:r>
+          </a:p>
+        </p:txBody>
+      </p:sp>
+      <p:sp>
+        <p:nvSpPr>
+          <p:cNvPr id="3" name="Content Placeholder 2">
+            <a:extLst>
+              <a:ext uri="{FF2B5EF4-FFF2-40B4-BE49-F238E27FC236}">
+                <a16:creationId xmlns:a16="http://schemas.microsoft.com/office/drawing/2014/main" id="{87120F09-B855-46F4-976C-8E2C0397ACE7}"/>
+              </a:ext>
+            </a:extLst>
+          </p:cNvPr>
+          <p:cNvSpPr>
+            <a:spLocks noGrp="1"/>
+          </p:cNvSpPr>
+          <p:nvPr>
+            <p:ph idx="1"/>
+          </p:nvPr>
+        </p:nvSpPr>
+        <p:spPr>
+          <a:xfrm>
             <a:off x="838200" y="1825625"/>
             <a:ext cx="7400026" cy="4351338"/>
           </a:xfrm>
@@ -7597,7 +6481,7 @@
 </p:sld>
 </file>
 
-<file path=ppt/slides/slide16.xml><?xml version="1.0" encoding="utf-8"?>
+<file path=ppt/slides/slide17.xml><?xml version="1.0" encoding="utf-8"?>
 <p:sld xmlns:a="http://schemas.openxmlformats.org/drawingml/2006/main" xmlns:r="http://schemas.openxmlformats.org/officeDocument/2006/relationships" xmlns:p="http://schemas.openxmlformats.org/presentationml/2006/main">
   <p:cSld>
     <p:spTree>
@@ -7758,7 +6642,7 @@
 </p:sld>
 </file>
 
-<file path=ppt/slides/slide17.xml><?xml version="1.0" encoding="utf-8"?>
+<file path=ppt/slides/slide18.xml><?xml version="1.0" encoding="utf-8"?>
 <p:sld xmlns:a="http://schemas.openxmlformats.org/drawingml/2006/main" xmlns:r="http://schemas.openxmlformats.org/officeDocument/2006/relationships" xmlns:p="http://schemas.openxmlformats.org/presentationml/2006/main">
   <p:cSld>
     <p:spTree>
@@ -7943,7 +6827,7 @@
 </p:sld>
 </file>
 
-<file path=ppt/slides/slide18.xml><?xml version="1.0" encoding="utf-8"?>
+<file path=ppt/slides/slide19.xml><?xml version="1.0" encoding="utf-8"?>
 <p:sld xmlns:a="http://schemas.openxmlformats.org/drawingml/2006/main" xmlns:r="http://schemas.openxmlformats.org/officeDocument/2006/relationships" xmlns:p="http://schemas.openxmlformats.org/presentationml/2006/main">
   <p:cSld>
     <p:spTree>
@@ -8135,7 +7019,146 @@
 </p:sld>
 </file>
 
-<file path=ppt/slides/slide19.xml><?xml version="1.0" encoding="utf-8"?>
+<file path=ppt/slides/slide2.xml><?xml version="1.0" encoding="utf-8"?>
+<p:sld xmlns:a="http://schemas.openxmlformats.org/drawingml/2006/main" xmlns:r="http://schemas.openxmlformats.org/officeDocument/2006/relationships" xmlns:p="http://schemas.openxmlformats.org/presentationml/2006/main">
+  <p:cSld>
+    <p:spTree>
+      <p:nvGrpSpPr>
+        <p:cNvPr id="1" name=""/>
+        <p:cNvGrpSpPr/>
+        <p:nvPr/>
+      </p:nvGrpSpPr>
+      <p:grpSpPr>
+        <a:xfrm>
+          <a:off x="0" y="0"/>
+          <a:ext cx="0" cy="0"/>
+          <a:chOff x="0" y="0"/>
+          <a:chExt cx="0" cy="0"/>
+        </a:xfrm>
+      </p:grpSpPr>
+      <p:sp>
+        <p:nvSpPr>
+          <p:cNvPr id="2" name="Content Placeholder 1">
+            <a:extLst>
+              <a:ext uri="{FF2B5EF4-FFF2-40B4-BE49-F238E27FC236}">
+                <a16:creationId xmlns:a16="http://schemas.microsoft.com/office/drawing/2014/main" id="{7885DAC0-F666-1E70-A069-E0E346810F00}"/>
+              </a:ext>
+            </a:extLst>
+          </p:cNvPr>
+          <p:cNvSpPr>
+            <a:spLocks noGrp="1"/>
+          </p:cNvSpPr>
+          <p:nvPr>
+            <p:ph idx="1"/>
+          </p:nvPr>
+        </p:nvSpPr>
+        <p:spPr/>
+        <p:txBody>
+          <a:bodyPr vert="horz" lIns="91440" tIns="45720" rIns="91440" bIns="45720" rtlCol="0" anchor="t">
+            <a:normAutofit/>
+          </a:bodyPr>
+          <a:lstStyle/>
+          <a:p>
+            <a:r>
+              <a:rPr lang="en-US" dirty="0">
+                <a:ea typeface="+mn-lt"/>
+                <a:cs typeface="+mn-lt"/>
+              </a:rPr>
+              <a:t>We live in the age of data! Every purchase we make is dutifully recorded; every money transaction is carefully registered; every web click ends up in a web click archive. </a:t>
+            </a:r>
+          </a:p>
+          <a:p>
+            <a:r>
+              <a:rPr lang="en-US" dirty="0">
+                <a:ea typeface="+mn-lt"/>
+                <a:cs typeface="+mn-lt"/>
+              </a:rPr>
+              <a:t>Nowadays everything carries an RFID chip and can record data. We have data available like never before.</a:t>
+            </a:r>
+            <a:endParaRPr lang="en-US">
+              <a:ea typeface="Calibri"/>
+              <a:cs typeface="Calibri"/>
+            </a:endParaRPr>
+          </a:p>
+          <a:p>
+            <a:r>
+              <a:rPr lang="en-US" dirty="0">
+                <a:ea typeface="+mn-lt"/>
+                <a:cs typeface="+mn-lt"/>
+              </a:rPr>
+              <a:t>What can we do with all this data? Can we make some sense out of it? </a:t>
+            </a:r>
+          </a:p>
+          <a:p>
+            <a:r>
+              <a:rPr lang="en-US" dirty="0">
+                <a:ea typeface="+mn-lt"/>
+                <a:cs typeface="+mn-lt"/>
+              </a:rPr>
+              <a:t>Can we use it to learn something useful and profitable? </a:t>
+            </a:r>
+          </a:p>
+          <a:p>
+            <a:r>
+              <a:rPr lang="en-US" dirty="0">
+                <a:ea typeface="+mn-lt"/>
+                <a:cs typeface="+mn-lt"/>
+              </a:rPr>
+              <a:t>Data Mining is the science that enable us to go deeper and deeper into our data, to look at it from many different perspectives, to represent its underlying structure.</a:t>
+            </a:r>
+            <a:endParaRPr lang="en-US">
+              <a:ea typeface="Calibri"/>
+              <a:cs typeface="Calibri"/>
+            </a:endParaRPr>
+          </a:p>
+        </p:txBody>
+      </p:sp>
+      <p:sp>
+        <p:nvSpPr>
+          <p:cNvPr id="3" name="Title 2">
+            <a:extLst>
+              <a:ext uri="{FF2B5EF4-FFF2-40B4-BE49-F238E27FC236}">
+                <a16:creationId xmlns:a16="http://schemas.microsoft.com/office/drawing/2014/main" id="{39BF1C2E-CEA4-91E0-9928-E5BCB00A766E}"/>
+              </a:ext>
+            </a:extLst>
+          </p:cNvPr>
+          <p:cNvSpPr>
+            <a:spLocks noGrp="1"/>
+          </p:cNvSpPr>
+          <p:nvPr>
+            <p:ph type="title"/>
+          </p:nvPr>
+        </p:nvSpPr>
+        <p:spPr/>
+        <p:txBody>
+          <a:bodyPr/>
+          <a:lstStyle/>
+          <a:p>
+            <a:r>
+              <a:rPr lang="en-US" dirty="0">
+                <a:ea typeface="Calibri Light"/>
+                <a:cs typeface="Calibri Light"/>
+              </a:rPr>
+              <a:t>Preface</a:t>
+            </a:r>
+            <a:endParaRPr lang="en-US" dirty="0"/>
+          </a:p>
+        </p:txBody>
+      </p:sp>
+    </p:spTree>
+    <p:extLst>
+      <p:ext uri="{BB962C8B-B14F-4D97-AF65-F5344CB8AC3E}">
+        <p14:creationId xmlns:p14="http://schemas.microsoft.com/office/powerpoint/2010/main" val="1915583685"/>
+      </p:ext>
+    </p:extLst>
+  </p:cSld>
+  <p:clrMapOvr>
+    <a:masterClrMapping/>
+  </p:clrMapOvr>
+</p:sld>
+</file>
+
+<file path=ppt/slides/slide20.xml><?xml version="1.0" encoding="utf-8"?>
 <p:sld xmlns:a="http://schemas.openxmlformats.org/drawingml/2006/main" xmlns:r="http://schemas.openxmlformats.org/officeDocument/2006/relationships" xmlns:p="http://schemas.openxmlformats.org/presentationml/2006/main">
   <p:cSld>
     <p:spTree>
@@ -8537,329 +7560,6 @@
     <p:extLst>
       <p:ext uri="{BB962C8B-B14F-4D97-AF65-F5344CB8AC3E}">
         <p14:creationId xmlns:p14="http://schemas.microsoft.com/office/powerpoint/2010/main" val="277181267"/>
-      </p:ext>
-    </p:extLst>
-  </p:cSld>
-  <p:clrMapOvr>
-    <a:masterClrMapping/>
-  </p:clrMapOvr>
-</p:sld>
-</file>
-
-<file path=ppt/slides/slide2.xml><?xml version="1.0" encoding="utf-8"?>
-<p:sld xmlns:a="http://schemas.openxmlformats.org/drawingml/2006/main" xmlns:r="http://schemas.openxmlformats.org/officeDocument/2006/relationships" xmlns:p="http://schemas.openxmlformats.org/presentationml/2006/main">
-  <p:cSld>
-    <p:spTree>
-      <p:nvGrpSpPr>
-        <p:cNvPr id="1" name=""/>
-        <p:cNvGrpSpPr/>
-        <p:nvPr/>
-      </p:nvGrpSpPr>
-      <p:grpSpPr>
-        <a:xfrm>
-          <a:off x="0" y="0"/>
-          <a:ext cx="0" cy="0"/>
-          <a:chOff x="0" y="0"/>
-          <a:chExt cx="0" cy="0"/>
-        </a:xfrm>
-      </p:grpSpPr>
-      <p:sp>
-        <p:nvSpPr>
-          <p:cNvPr id="2" name="Title 1">
-            <a:extLst>
-              <a:ext uri="{FF2B5EF4-FFF2-40B4-BE49-F238E27FC236}">
-                <a16:creationId xmlns:a16="http://schemas.microsoft.com/office/drawing/2014/main" id="{8BE518FD-B81F-466C-AD85-5DDC967653B4}"/>
-              </a:ext>
-            </a:extLst>
-          </p:cNvPr>
-          <p:cNvSpPr>
-            <a:spLocks noGrp="1"/>
-          </p:cNvSpPr>
-          <p:nvPr>
-            <p:ph type="title"/>
-          </p:nvPr>
-        </p:nvSpPr>
-        <p:spPr/>
-        <p:txBody>
-          <a:bodyPr/>
-          <a:lstStyle/>
-          <a:p>
-            <a:r>
-              <a:rPr lang="en-US" b="1" dirty="0"/>
-              <a:t>What is Data Mining?</a:t>
-            </a:r>
-            <a:endParaRPr lang="en-US" dirty="0"/>
-          </a:p>
-        </p:txBody>
-      </p:sp>
-      <p:sp>
-        <p:nvSpPr>
-          <p:cNvPr id="3" name="Content Placeholder 2">
-            <a:extLst>
-              <a:ext uri="{FF2B5EF4-FFF2-40B4-BE49-F238E27FC236}">
-                <a16:creationId xmlns:a16="http://schemas.microsoft.com/office/drawing/2014/main" id="{1A647627-019E-4599-BFE9-83A7DEA04B6D}"/>
-              </a:ext>
-            </a:extLst>
-          </p:cNvPr>
-          <p:cNvSpPr>
-            <a:spLocks noGrp="1"/>
-          </p:cNvSpPr>
-          <p:nvPr>
-            <p:ph idx="1"/>
-          </p:nvPr>
-        </p:nvSpPr>
-        <p:spPr/>
-        <p:txBody>
-          <a:bodyPr>
-            <a:normAutofit/>
-          </a:bodyPr>
-          <a:lstStyle/>
-          <a:p>
-            <a:r>
-              <a:rPr lang="en-US" b="1" dirty="0"/>
-              <a:t>Definition:</a:t>
-            </a:r>
-            <a:r>
-              <a:rPr lang="en-US" dirty="0"/>
-              <a:t> Data mining is the process of discovering </a:t>
-            </a:r>
-            <a:r>
-              <a:rPr lang="en-US" dirty="0">
-                <a:solidFill>
-                  <a:srgbClr val="FF0000"/>
-                </a:solidFill>
-              </a:rPr>
-              <a:t>patterns</a:t>
-            </a:r>
-            <a:r>
-              <a:rPr lang="en-US" dirty="0"/>
-              <a:t>, </a:t>
-            </a:r>
-            <a:r>
-              <a:rPr lang="en-US" dirty="0">
-                <a:solidFill>
-                  <a:srgbClr val="FF0000"/>
-                </a:solidFill>
-              </a:rPr>
-              <a:t>correlations</a:t>
-            </a:r>
-            <a:r>
-              <a:rPr lang="en-US" dirty="0"/>
-              <a:t>, </a:t>
-            </a:r>
-            <a:r>
-              <a:rPr lang="en-US" dirty="0">
-                <a:solidFill>
-                  <a:srgbClr val="FF0000"/>
-                </a:solidFill>
-              </a:rPr>
-              <a:t>trends</a:t>
-            </a:r>
-            <a:r>
-              <a:rPr lang="en-US" dirty="0"/>
-              <a:t>, and </a:t>
-            </a:r>
-            <a:r>
-              <a:rPr lang="en-US" dirty="0">
-                <a:solidFill>
-                  <a:srgbClr val="FF0000"/>
-                </a:solidFill>
-              </a:rPr>
-              <a:t>useful information </a:t>
-            </a:r>
-            <a:r>
-              <a:rPr lang="en-US" dirty="0"/>
-              <a:t>from large datasets, often involving methods from statistics, machine learning, and database systems.</a:t>
-            </a:r>
-          </a:p>
-          <a:p>
-            <a:r>
-              <a:rPr lang="en-US" b="1" dirty="0"/>
-              <a:t>Pattern Recognition:</a:t>
-            </a:r>
-            <a:r>
-              <a:rPr lang="en-US" dirty="0"/>
-              <a:t> Identifying meaningful patterns in data, such as associations, clusters, or classifications.</a:t>
-            </a:r>
-          </a:p>
-        </p:txBody>
-      </p:sp>
-    </p:spTree>
-    <p:extLst>
-      <p:ext uri="{BB962C8B-B14F-4D97-AF65-F5344CB8AC3E}">
-        <p14:creationId xmlns:p14="http://schemas.microsoft.com/office/powerpoint/2010/main" val="1162554463"/>
-      </p:ext>
-    </p:extLst>
-  </p:cSld>
-  <p:clrMapOvr>
-    <a:masterClrMapping/>
-  </p:clrMapOvr>
-</p:sld>
-</file>
-
-<file path=ppt/slides/slide20.xml><?xml version="1.0" encoding="utf-8"?>
-<p:sld xmlns:a="http://schemas.openxmlformats.org/drawingml/2006/main" xmlns:r="http://schemas.openxmlformats.org/officeDocument/2006/relationships" xmlns:p="http://schemas.openxmlformats.org/presentationml/2006/main">
-  <p:cSld>
-    <p:spTree>
-      <p:nvGrpSpPr>
-        <p:cNvPr id="1" name=""/>
-        <p:cNvGrpSpPr/>
-        <p:nvPr/>
-      </p:nvGrpSpPr>
-      <p:grpSpPr>
-        <a:xfrm>
-          <a:off x="0" y="0"/>
-          <a:ext cx="0" cy="0"/>
-          <a:chOff x="0" y="0"/>
-          <a:chExt cx="0" cy="0"/>
-        </a:xfrm>
-      </p:grpSpPr>
-      <p:sp>
-        <p:nvSpPr>
-          <p:cNvPr id="2" name="Title 1">
-            <a:extLst>
-              <a:ext uri="{FF2B5EF4-FFF2-40B4-BE49-F238E27FC236}">
-                <a16:creationId xmlns:a16="http://schemas.microsoft.com/office/drawing/2014/main" id="{01EEEC5D-AE76-482E-9BDB-4391F6FFC714}"/>
-              </a:ext>
-            </a:extLst>
-          </p:cNvPr>
-          <p:cNvSpPr>
-            <a:spLocks noGrp="1"/>
-          </p:cNvSpPr>
-          <p:nvPr>
-            <p:ph type="title"/>
-          </p:nvPr>
-        </p:nvSpPr>
-        <p:spPr/>
-        <p:txBody>
-          <a:bodyPr/>
-          <a:lstStyle/>
-          <a:p>
-            <a:r>
-              <a:rPr lang="en-US" dirty="0"/>
-              <a:t>5. Evaluation</a:t>
-            </a:r>
-          </a:p>
-        </p:txBody>
-      </p:sp>
-      <p:sp>
-        <p:nvSpPr>
-          <p:cNvPr id="3" name="Content Placeholder 2">
-            <a:extLst>
-              <a:ext uri="{FF2B5EF4-FFF2-40B4-BE49-F238E27FC236}">
-                <a16:creationId xmlns:a16="http://schemas.microsoft.com/office/drawing/2014/main" id="{D2295298-8EE1-4945-B5D5-F3017888096E}"/>
-              </a:ext>
-            </a:extLst>
-          </p:cNvPr>
-          <p:cNvSpPr>
-            <a:spLocks noGrp="1"/>
-          </p:cNvSpPr>
-          <p:nvPr>
-            <p:ph idx="1"/>
-          </p:nvPr>
-        </p:nvSpPr>
-        <p:spPr>
-          <a:xfrm>
-            <a:off x="838200" y="1825625"/>
-            <a:ext cx="6571891" cy="4351338"/>
-          </a:xfrm>
-        </p:spPr>
-        <p:txBody>
-          <a:bodyPr>
-            <a:normAutofit fontScale="77500" lnSpcReduction="20000"/>
-          </a:bodyPr>
-          <a:lstStyle/>
-          <a:p>
-            <a:r>
-              <a:rPr lang="en-US" dirty="0"/>
-              <a:t>At the last of this phase, a decision on the use of the data mining results should be reached.</a:t>
-            </a:r>
-          </a:p>
-          <a:p>
-            <a:r>
-              <a:rPr lang="en-US" dirty="0"/>
-              <a:t>It evaluates the model efficiently, and review the steps executed to build the model and to ensure that the business objectives are properly achieved.</a:t>
-            </a:r>
-          </a:p>
-          <a:p>
-            <a:r>
-              <a:rPr lang="en-US" dirty="0"/>
-              <a:t>The main objective of the evaluation is to determine some significant business issue that has not been regarded adequately.</a:t>
-            </a:r>
-          </a:p>
-          <a:p>
-            <a:r>
-              <a:rPr lang="en-US" dirty="0"/>
-              <a:t>At the last of this phase, a decision on the use of the data mining outcomes should be reached.</a:t>
-            </a:r>
-          </a:p>
-          <a:p>
-            <a:pPr marL="0" indent="0">
-              <a:buNone/>
-            </a:pPr>
-            <a:r>
-              <a:rPr lang="en-US" b="1" dirty="0"/>
-              <a:t>Tasks:</a:t>
-            </a:r>
-            <a:endParaRPr lang="en-US" dirty="0"/>
-          </a:p>
-          <a:p>
-            <a:r>
-              <a:rPr lang="en-US" dirty="0"/>
-              <a:t>Evaluate results</a:t>
-            </a:r>
-          </a:p>
-          <a:p>
-            <a:r>
-              <a:rPr lang="en-US" dirty="0"/>
-              <a:t>Review process</a:t>
-            </a:r>
-          </a:p>
-          <a:p>
-            <a:r>
-              <a:rPr lang="en-US" dirty="0"/>
-              <a:t>Determine next steps</a:t>
-            </a:r>
-          </a:p>
-          <a:p>
-            <a:endParaRPr lang="en-US" dirty="0"/>
-          </a:p>
-        </p:txBody>
-      </p:sp>
-      <p:pic>
-        <p:nvPicPr>
-          <p:cNvPr id="4" name="Picture 3">
-            <a:extLst>
-              <a:ext uri="{FF2B5EF4-FFF2-40B4-BE49-F238E27FC236}">
-                <a16:creationId xmlns:a16="http://schemas.microsoft.com/office/drawing/2014/main" id="{0B45CC0D-25F8-496D-A3D7-1CB2FD98251F}"/>
-              </a:ext>
-            </a:extLst>
-          </p:cNvPr>
-          <p:cNvPicPr>
-            <a:picLocks noChangeAspect="1"/>
-          </p:cNvPicPr>
-          <p:nvPr/>
-        </p:nvPicPr>
-        <p:blipFill>
-          <a:blip r:embed="rId2"/>
-          <a:stretch>
-            <a:fillRect/>
-          </a:stretch>
-        </p:blipFill>
-        <p:spPr>
-          <a:xfrm>
-            <a:off x="7841411" y="1825625"/>
-            <a:ext cx="4218299" cy="3395669"/>
-          </a:xfrm>
-          <a:prstGeom prst="rect">
-            <a:avLst/>
-          </a:prstGeom>
-        </p:spPr>
-      </p:pic>
-    </p:spTree>
-    <p:extLst>
-      <p:ext uri="{BB962C8B-B14F-4D97-AF65-F5344CB8AC3E}">
-        <p14:creationId xmlns:p14="http://schemas.microsoft.com/office/powerpoint/2010/main" val="3668955903"/>
       </p:ext>
     </p:extLst>
   </p:cSld>
@@ -8933,6 +7633,178 @@
         <p:spPr>
           <a:xfrm>
             <a:off x="838200" y="1825625"/>
+            <a:ext cx="6571891" cy="4351338"/>
+          </a:xfrm>
+        </p:spPr>
+        <p:txBody>
+          <a:bodyPr>
+            <a:normAutofit fontScale="77500" lnSpcReduction="20000"/>
+          </a:bodyPr>
+          <a:lstStyle/>
+          <a:p>
+            <a:r>
+              <a:rPr lang="en-US" dirty="0"/>
+              <a:t>At the last of this phase, a decision on the use of the data mining results should be reached.</a:t>
+            </a:r>
+          </a:p>
+          <a:p>
+            <a:r>
+              <a:rPr lang="en-US" dirty="0"/>
+              <a:t>It evaluates the model efficiently, and review the steps executed to build the model and to ensure that the business objectives are properly achieved.</a:t>
+            </a:r>
+          </a:p>
+          <a:p>
+            <a:r>
+              <a:rPr lang="en-US" dirty="0"/>
+              <a:t>The main objective of the evaluation is to determine some significant business issue that has not been regarded adequately.</a:t>
+            </a:r>
+          </a:p>
+          <a:p>
+            <a:r>
+              <a:rPr lang="en-US" dirty="0"/>
+              <a:t>At the last of this phase, a decision on the use of the data mining outcomes should be reached.</a:t>
+            </a:r>
+          </a:p>
+          <a:p>
+            <a:pPr marL="0" indent="0">
+              <a:buNone/>
+            </a:pPr>
+            <a:r>
+              <a:rPr lang="en-US" b="1" dirty="0"/>
+              <a:t>Tasks:</a:t>
+            </a:r>
+            <a:endParaRPr lang="en-US" dirty="0"/>
+          </a:p>
+          <a:p>
+            <a:r>
+              <a:rPr lang="en-US" dirty="0"/>
+              <a:t>Evaluate results</a:t>
+            </a:r>
+          </a:p>
+          <a:p>
+            <a:r>
+              <a:rPr lang="en-US" dirty="0"/>
+              <a:t>Review process</a:t>
+            </a:r>
+          </a:p>
+          <a:p>
+            <a:r>
+              <a:rPr lang="en-US" dirty="0"/>
+              <a:t>Determine next steps</a:t>
+            </a:r>
+          </a:p>
+          <a:p>
+            <a:endParaRPr lang="en-US" dirty="0"/>
+          </a:p>
+        </p:txBody>
+      </p:sp>
+      <p:pic>
+        <p:nvPicPr>
+          <p:cNvPr id="4" name="Picture 3">
+            <a:extLst>
+              <a:ext uri="{FF2B5EF4-FFF2-40B4-BE49-F238E27FC236}">
+                <a16:creationId xmlns:a16="http://schemas.microsoft.com/office/drawing/2014/main" id="{0B45CC0D-25F8-496D-A3D7-1CB2FD98251F}"/>
+              </a:ext>
+            </a:extLst>
+          </p:cNvPr>
+          <p:cNvPicPr>
+            <a:picLocks noChangeAspect="1"/>
+          </p:cNvPicPr>
+          <p:nvPr/>
+        </p:nvPicPr>
+        <p:blipFill>
+          <a:blip r:embed="rId2"/>
+          <a:stretch>
+            <a:fillRect/>
+          </a:stretch>
+        </p:blipFill>
+        <p:spPr>
+          <a:xfrm>
+            <a:off x="7841411" y="1825625"/>
+            <a:ext cx="4218299" cy="3395669"/>
+          </a:xfrm>
+          <a:prstGeom prst="rect">
+            <a:avLst/>
+          </a:prstGeom>
+        </p:spPr>
+      </p:pic>
+    </p:spTree>
+    <p:extLst>
+      <p:ext uri="{BB962C8B-B14F-4D97-AF65-F5344CB8AC3E}">
+        <p14:creationId xmlns:p14="http://schemas.microsoft.com/office/powerpoint/2010/main" val="3668955903"/>
+      </p:ext>
+    </p:extLst>
+  </p:cSld>
+  <p:clrMapOvr>
+    <a:masterClrMapping/>
+  </p:clrMapOvr>
+</p:sld>
+</file>
+
+<file path=ppt/slides/slide22.xml><?xml version="1.0" encoding="utf-8"?>
+<p:sld xmlns:a="http://schemas.openxmlformats.org/drawingml/2006/main" xmlns:r="http://schemas.openxmlformats.org/officeDocument/2006/relationships" xmlns:p="http://schemas.openxmlformats.org/presentationml/2006/main">
+  <p:cSld>
+    <p:spTree>
+      <p:nvGrpSpPr>
+        <p:cNvPr id="1" name=""/>
+        <p:cNvGrpSpPr/>
+        <p:nvPr/>
+      </p:nvGrpSpPr>
+      <p:grpSpPr>
+        <a:xfrm>
+          <a:off x="0" y="0"/>
+          <a:ext cx="0" cy="0"/>
+          <a:chOff x="0" y="0"/>
+          <a:chExt cx="0" cy="0"/>
+        </a:xfrm>
+      </p:grpSpPr>
+      <p:sp>
+        <p:nvSpPr>
+          <p:cNvPr id="2" name="Title 1">
+            <a:extLst>
+              <a:ext uri="{FF2B5EF4-FFF2-40B4-BE49-F238E27FC236}">
+                <a16:creationId xmlns:a16="http://schemas.microsoft.com/office/drawing/2014/main" id="{01EEEC5D-AE76-482E-9BDB-4391F6FFC714}"/>
+              </a:ext>
+            </a:extLst>
+          </p:cNvPr>
+          <p:cNvSpPr>
+            <a:spLocks noGrp="1"/>
+          </p:cNvSpPr>
+          <p:nvPr>
+            <p:ph type="title"/>
+          </p:nvPr>
+        </p:nvSpPr>
+        <p:spPr/>
+        <p:txBody>
+          <a:bodyPr/>
+          <a:lstStyle/>
+          <a:p>
+            <a:r>
+              <a:rPr lang="en-US" dirty="0"/>
+              <a:t>5. Evaluation</a:t>
+            </a:r>
+          </a:p>
+        </p:txBody>
+      </p:sp>
+      <p:sp>
+        <p:nvSpPr>
+          <p:cNvPr id="3" name="Content Placeholder 2">
+            <a:extLst>
+              <a:ext uri="{FF2B5EF4-FFF2-40B4-BE49-F238E27FC236}">
+                <a16:creationId xmlns:a16="http://schemas.microsoft.com/office/drawing/2014/main" id="{D2295298-8EE1-4945-B5D5-F3017888096E}"/>
+              </a:ext>
+            </a:extLst>
+          </p:cNvPr>
+          <p:cNvSpPr>
+            <a:spLocks noGrp="1"/>
+          </p:cNvSpPr>
+          <p:nvPr>
+            <p:ph idx="1"/>
+          </p:nvPr>
+        </p:nvSpPr>
+        <p:spPr>
+          <a:xfrm>
+            <a:off x="838200" y="1825625"/>
             <a:ext cx="7029091" cy="4667250"/>
           </a:xfrm>
         </p:spPr>
@@ -9061,7 +7933,7 @@
 </p:sld>
 </file>
 
-<file path=ppt/slides/slide22.xml><?xml version="1.0" encoding="utf-8"?>
+<file path=ppt/slides/slide23.xml><?xml version="1.0" encoding="utf-8"?>
 <p:sld xmlns:a="http://schemas.openxmlformats.org/drawingml/2006/main" xmlns:r="http://schemas.openxmlformats.org/officeDocument/2006/relationships" xmlns:p="http://schemas.openxmlformats.org/presentationml/2006/main">
   <p:cSld>
     <p:spTree>
@@ -9260,7 +8132,7 @@
 </p:sld>
 </file>
 
-<file path=ppt/slides/slide23.xml><?xml version="1.0" encoding="utf-8"?>
+<file path=ppt/slides/slide24.xml><?xml version="1.0" encoding="utf-8"?>
 <p:sld xmlns:a="http://schemas.openxmlformats.org/drawingml/2006/main" xmlns:r="http://schemas.openxmlformats.org/officeDocument/2006/relationships" xmlns:p="http://schemas.openxmlformats.org/presentationml/2006/main">
   <p:cSld>
     <p:spTree>
@@ -9462,7 +8334,7 @@
 </p:sld>
 </file>
 
-<file path=ppt/slides/slide24.xml><?xml version="1.0" encoding="utf-8"?>
+<file path=ppt/slides/slide25.xml><?xml version="1.0" encoding="utf-8"?>
 <p:sld xmlns:a="http://schemas.openxmlformats.org/drawingml/2006/main" xmlns:r="http://schemas.openxmlformats.org/officeDocument/2006/relationships" xmlns:p="http://schemas.openxmlformats.org/presentationml/2006/main">
   <p:cSld>
     <p:spTree>
@@ -9693,7 +8565,7 @@
 </p:sld>
 </file>
 
-<file path=ppt/slides/slide25.xml><?xml version="1.0" encoding="utf-8"?>
+<file path=ppt/slides/slide26.xml><?xml version="1.0" encoding="utf-8"?>
 <p:sld xmlns:a="http://schemas.openxmlformats.org/drawingml/2006/main" xmlns:r="http://schemas.openxmlformats.org/officeDocument/2006/relationships" xmlns:p="http://schemas.openxmlformats.org/presentationml/2006/main">
   <p:cSld>
     <p:spTree>
@@ -10091,7 +8963,7 @@
 </p:sld>
 </file>
 
-<file path=ppt/slides/slide26.xml><?xml version="1.0" encoding="utf-8"?>
+<file path=ppt/slides/slide27.xml><?xml version="1.0" encoding="utf-8"?>
 <p:sld xmlns:a="http://schemas.openxmlformats.org/drawingml/2006/main" xmlns:r="http://schemas.openxmlformats.org/officeDocument/2006/relationships" xmlns:p="http://schemas.openxmlformats.org/presentationml/2006/main">
   <p:cSld>
     <p:spTree>
@@ -10369,7 +9241,7 @@
 </p:sld>
 </file>
 
-<file path=ppt/slides/slide27.xml><?xml version="1.0" encoding="utf-8"?>
+<file path=ppt/slides/slide28.xml><?xml version="1.0" encoding="utf-8"?>
 <p:sld xmlns:a="http://schemas.openxmlformats.org/drawingml/2006/main" xmlns:r="http://schemas.openxmlformats.org/officeDocument/2006/relationships" xmlns:p="http://schemas.openxmlformats.org/presentationml/2006/main">
   <p:cSld>
     <p:spTree>
@@ -12563,7 +11435,7 @@
 </p:sld>
 </file>
 
-<file path=ppt/slides/slide28.xml><?xml version="1.0" encoding="utf-8"?>
+<file path=ppt/slides/slide29.xml><?xml version="1.0" encoding="utf-8"?>
 <p:sld xmlns:a="http://schemas.openxmlformats.org/drawingml/2006/main" xmlns:r="http://schemas.openxmlformats.org/officeDocument/2006/relationships" xmlns:p="http://schemas.openxmlformats.org/presentationml/2006/main">
   <p:cSld>
     <p:spTree>
@@ -12717,7 +11589,158 @@
 </p:sld>
 </file>
 
-<file path=ppt/slides/slide29.xml><?xml version="1.0" encoding="utf-8"?>
+<file path=ppt/slides/slide3.xml><?xml version="1.0" encoding="utf-8"?>
+<p:sld xmlns:a="http://schemas.openxmlformats.org/drawingml/2006/main" xmlns:r="http://schemas.openxmlformats.org/officeDocument/2006/relationships" xmlns:p="http://schemas.openxmlformats.org/presentationml/2006/main">
+  <p:cSld>
+    <p:spTree>
+      <p:nvGrpSpPr>
+        <p:cNvPr id="1" name=""/>
+        <p:cNvGrpSpPr/>
+        <p:nvPr/>
+      </p:nvGrpSpPr>
+      <p:grpSpPr>
+        <a:xfrm>
+          <a:off x="0" y="0"/>
+          <a:ext cx="0" cy="0"/>
+          <a:chOff x="0" y="0"/>
+          <a:chExt cx="0" cy="0"/>
+        </a:xfrm>
+      </p:grpSpPr>
+      <p:sp>
+        <p:nvSpPr>
+          <p:cNvPr id="2" name="Title 1">
+            <a:extLst>
+              <a:ext uri="{FF2B5EF4-FFF2-40B4-BE49-F238E27FC236}">
+                <a16:creationId xmlns:a16="http://schemas.microsoft.com/office/drawing/2014/main" id="{8BE518FD-B81F-466C-AD85-5DDC967653B4}"/>
+              </a:ext>
+            </a:extLst>
+          </p:cNvPr>
+          <p:cNvSpPr>
+            <a:spLocks noGrp="1"/>
+          </p:cNvSpPr>
+          <p:nvPr>
+            <p:ph type="title"/>
+          </p:nvPr>
+        </p:nvSpPr>
+        <p:spPr/>
+        <p:txBody>
+          <a:bodyPr/>
+          <a:lstStyle/>
+          <a:p>
+            <a:r>
+              <a:rPr lang="en-US" b="1" dirty="0"/>
+              <a:t>What is Data Mining?</a:t>
+            </a:r>
+            <a:endParaRPr lang="en-US" dirty="0"/>
+          </a:p>
+        </p:txBody>
+      </p:sp>
+      <p:sp>
+        <p:nvSpPr>
+          <p:cNvPr id="3" name="Content Placeholder 2">
+            <a:extLst>
+              <a:ext uri="{FF2B5EF4-FFF2-40B4-BE49-F238E27FC236}">
+                <a16:creationId xmlns:a16="http://schemas.microsoft.com/office/drawing/2014/main" id="{1A647627-019E-4599-BFE9-83A7DEA04B6D}"/>
+              </a:ext>
+            </a:extLst>
+          </p:cNvPr>
+          <p:cNvSpPr>
+            <a:spLocks noGrp="1"/>
+          </p:cNvSpPr>
+          <p:nvPr>
+            <p:ph idx="1"/>
+          </p:nvPr>
+        </p:nvSpPr>
+        <p:spPr/>
+        <p:txBody>
+          <a:bodyPr>
+            <a:normAutofit/>
+          </a:bodyPr>
+          <a:lstStyle/>
+          <a:p>
+            <a:r>
+              <a:rPr lang="en-US" b="1" dirty="0"/>
+              <a:t>Definition:</a:t>
+            </a:r>
+            <a:r>
+              <a:rPr lang="en-US" dirty="0"/>
+              <a:t> Data mining is the process of discovering </a:t>
+            </a:r>
+            <a:r>
+              <a:rPr lang="en-US" dirty="0">
+                <a:solidFill>
+                  <a:srgbClr val="FF0000"/>
+                </a:solidFill>
+              </a:rPr>
+              <a:t>patterns</a:t>
+            </a:r>
+            <a:r>
+              <a:rPr lang="en-US" dirty="0"/>
+              <a:t>, </a:t>
+            </a:r>
+            <a:r>
+              <a:rPr lang="en-US" dirty="0">
+                <a:solidFill>
+                  <a:srgbClr val="FF0000"/>
+                </a:solidFill>
+              </a:rPr>
+              <a:t>correlations</a:t>
+            </a:r>
+            <a:r>
+              <a:rPr lang="en-US" dirty="0"/>
+              <a:t>, </a:t>
+            </a:r>
+            <a:r>
+              <a:rPr lang="en-US" dirty="0">
+                <a:solidFill>
+                  <a:srgbClr val="FF0000"/>
+                </a:solidFill>
+              </a:rPr>
+              <a:t>trends</a:t>
+            </a:r>
+            <a:r>
+              <a:rPr lang="en-US" dirty="0"/>
+              <a:t>, and </a:t>
+            </a:r>
+            <a:r>
+              <a:rPr lang="en-US" dirty="0">
+                <a:solidFill>
+                  <a:srgbClr val="FF0000"/>
+                </a:solidFill>
+              </a:rPr>
+              <a:t>useful information </a:t>
+            </a:r>
+            <a:r>
+              <a:rPr lang="en-US" dirty="0"/>
+              <a:t>from large datasets, often involving methods from statistics, machine learning, and database systems.</a:t>
+            </a:r>
+          </a:p>
+          <a:p>
+            <a:r>
+              <a:rPr lang="en-US" b="1" dirty="0"/>
+              <a:t>Pattern Recognition:</a:t>
+            </a:r>
+            <a:r>
+              <a:rPr lang="en-US" dirty="0"/>
+              <a:t> Identifying meaningful patterns in data, such as associations, clusters, or classifications.</a:t>
+            </a:r>
+          </a:p>
+        </p:txBody>
+      </p:sp>
+    </p:spTree>
+    <p:extLst>
+      <p:ext uri="{BB962C8B-B14F-4D97-AF65-F5344CB8AC3E}">
+        <p14:creationId xmlns:p14="http://schemas.microsoft.com/office/powerpoint/2010/main" val="1162554463"/>
+      </p:ext>
+    </p:extLst>
+  </p:cSld>
+  <p:clrMapOvr>
+    <a:masterClrMapping/>
+  </p:clrMapOvr>
+</p:sld>
+</file>
+
+<file path=ppt/slides/slide30.xml><?xml version="1.0" encoding="utf-8"?>
 <p:sld xmlns:a="http://schemas.openxmlformats.org/drawingml/2006/main" xmlns:r="http://schemas.openxmlformats.org/officeDocument/2006/relationships" xmlns:p="http://schemas.openxmlformats.org/presentationml/2006/main">
   <p:cSld>
     <p:spTree>
@@ -16013,224 +15036,7 @@
 </p:sld>
 </file>
 
-<file path=ppt/slides/slide3.xml><?xml version="1.0" encoding="utf-8"?>
-<p:sld xmlns:a="http://schemas.openxmlformats.org/drawingml/2006/main" xmlns:r="http://schemas.openxmlformats.org/officeDocument/2006/relationships" xmlns:p="http://schemas.openxmlformats.org/presentationml/2006/main">
-  <p:cSld>
-    <p:spTree>
-      <p:nvGrpSpPr>
-        <p:cNvPr id="1" name=""/>
-        <p:cNvGrpSpPr/>
-        <p:nvPr/>
-      </p:nvGrpSpPr>
-      <p:grpSpPr>
-        <a:xfrm>
-          <a:off x="0" y="0"/>
-          <a:ext cx="0" cy="0"/>
-          <a:chOff x="0" y="0"/>
-          <a:chExt cx="0" cy="0"/>
-        </a:xfrm>
-      </p:grpSpPr>
-      <p:sp>
-        <p:nvSpPr>
-          <p:cNvPr id="2" name="Title 1">
-            <a:extLst>
-              <a:ext uri="{FF2B5EF4-FFF2-40B4-BE49-F238E27FC236}">
-                <a16:creationId xmlns:a16="http://schemas.microsoft.com/office/drawing/2014/main" id="{9288F61D-F3F3-4CF5-8002-3AC25EDB8819}"/>
-              </a:ext>
-            </a:extLst>
-          </p:cNvPr>
-          <p:cNvSpPr>
-            <a:spLocks noGrp="1"/>
-          </p:cNvSpPr>
-          <p:nvPr>
-            <p:ph type="title"/>
-          </p:nvPr>
-        </p:nvSpPr>
-        <p:spPr/>
-        <p:txBody>
-          <a:bodyPr/>
-          <a:lstStyle/>
-          <a:p>
-            <a:r>
-              <a:rPr lang="en-US" b="1" dirty="0"/>
-              <a:t>The Importance of Data Mining</a:t>
-            </a:r>
-            <a:endParaRPr lang="en-US" dirty="0"/>
-          </a:p>
-        </p:txBody>
-      </p:sp>
-      <p:sp>
-        <p:nvSpPr>
-          <p:cNvPr id="3" name="Content Placeholder 2">
-            <a:extLst>
-              <a:ext uri="{FF2B5EF4-FFF2-40B4-BE49-F238E27FC236}">
-                <a16:creationId xmlns:a16="http://schemas.microsoft.com/office/drawing/2014/main" id="{21FF2A87-8E89-4813-8BC6-A1CA52285D72}"/>
-              </a:ext>
-            </a:extLst>
-          </p:cNvPr>
-          <p:cNvSpPr>
-            <a:spLocks noGrp="1"/>
-          </p:cNvSpPr>
-          <p:nvPr>
-            <p:ph idx="1"/>
-          </p:nvPr>
-        </p:nvSpPr>
-        <p:spPr>
-          <a:xfrm>
-            <a:off x="838200" y="1825625"/>
-            <a:ext cx="6709913" cy="4799462"/>
-          </a:xfrm>
-        </p:spPr>
-        <p:txBody>
-          <a:bodyPr>
-            <a:normAutofit lnSpcReduction="10000"/>
-          </a:bodyPr>
-          <a:lstStyle/>
-          <a:p>
-            <a:r>
-              <a:rPr lang="en-US" b="1" dirty="0"/>
-              <a:t>Application Areas:</a:t>
-            </a:r>
-            <a:endParaRPr lang="en-US" dirty="0"/>
-          </a:p>
-          <a:p>
-            <a:pPr lvl="1"/>
-            <a:r>
-              <a:rPr lang="en-US" b="1" dirty="0"/>
-              <a:t>Business:</a:t>
-            </a:r>
-            <a:r>
-              <a:rPr lang="en-US" dirty="0"/>
-              <a:t> Customer segmentation, market basket analysis, fraud detection.</a:t>
-            </a:r>
-          </a:p>
-          <a:p>
-            <a:pPr lvl="1"/>
-            <a:r>
-              <a:rPr lang="en-US" b="1" dirty="0"/>
-              <a:t>Healthcare:</a:t>
-            </a:r>
-            <a:r>
-              <a:rPr lang="en-US" dirty="0"/>
-              <a:t> Disease prediction, patient risk analysis.</a:t>
-            </a:r>
-          </a:p>
-          <a:p>
-            <a:pPr lvl="1"/>
-            <a:r>
-              <a:rPr lang="en-US" b="1" dirty="0"/>
-              <a:t>Finance:</a:t>
-            </a:r>
-            <a:r>
-              <a:rPr lang="en-US" dirty="0"/>
-              <a:t> Credit scoring, stock market analysis.</a:t>
-            </a:r>
-          </a:p>
-          <a:p>
-            <a:pPr lvl="1"/>
-            <a:r>
-              <a:rPr lang="en-US" b="1" dirty="0"/>
-              <a:t>Retail:</a:t>
-            </a:r>
-            <a:r>
-              <a:rPr lang="en-US" dirty="0"/>
-              <a:t> Recommendation systems, inventory forecasting.</a:t>
-            </a:r>
-          </a:p>
-          <a:p>
-            <a:r>
-              <a:rPr lang="en-US" b="1" dirty="0"/>
-              <a:t>Why it Matters:</a:t>
-            </a:r>
-            <a:endParaRPr lang="en-US" dirty="0"/>
-          </a:p>
-          <a:p>
-            <a:pPr lvl="1"/>
-            <a:r>
-              <a:rPr lang="en-US" dirty="0"/>
-              <a:t>Turning raw data into actionable insights.</a:t>
-            </a:r>
-          </a:p>
-          <a:p>
-            <a:pPr lvl="1"/>
-            <a:r>
-              <a:rPr lang="en-US" dirty="0"/>
-              <a:t>Helping organizations make informed decisions.</a:t>
-            </a:r>
-          </a:p>
-          <a:p>
-            <a:pPr lvl="1"/>
-            <a:r>
-              <a:rPr lang="en-US" dirty="0"/>
-              <a:t>Enabling predictive and prescriptive analytics.</a:t>
-            </a:r>
-          </a:p>
-          <a:p>
-            <a:endParaRPr lang="en-US" dirty="0"/>
-          </a:p>
-        </p:txBody>
-      </p:sp>
-      <p:pic>
-        <p:nvPicPr>
-          <p:cNvPr id="2050" name="Picture 2" descr="Data Mining Applications">
-            <a:extLst>
-              <a:ext uri="{FF2B5EF4-FFF2-40B4-BE49-F238E27FC236}">
-                <a16:creationId xmlns:a16="http://schemas.microsoft.com/office/drawing/2014/main" id="{AA68ACC8-5427-41F6-A099-9DE9A9BF7361}"/>
-              </a:ext>
-            </a:extLst>
-          </p:cNvPr>
-          <p:cNvPicPr>
-            <a:picLocks noChangeAspect="1" noChangeArrowheads="1"/>
-          </p:cNvPicPr>
-          <p:nvPr/>
-        </p:nvPicPr>
-        <p:blipFill>
-          <a:blip r:embed="rId2">
-            <a:extLst>
-              <a:ext uri="{28A0092B-C50C-407E-A947-70E740481C1C}">
-                <a14:useLocalDpi xmlns:a14="http://schemas.microsoft.com/office/drawing/2010/main" val="0"/>
-              </a:ext>
-            </a:extLst>
-          </a:blip>
-          <a:srcRect/>
-          <a:stretch>
-            <a:fillRect/>
-          </a:stretch>
-        </p:blipFill>
-        <p:spPr bwMode="auto">
-          <a:xfrm>
-            <a:off x="7719342" y="2205306"/>
-            <a:ext cx="4098468" cy="3814494"/>
-          </a:xfrm>
-          <a:prstGeom prst="rect">
-            <a:avLst/>
-          </a:prstGeom>
-          <a:noFill/>
-          <a:extLst>
-            <a:ext uri="{909E8E84-426E-40DD-AFC4-6F175D3DCCD1}">
-              <a14:hiddenFill xmlns:a14="http://schemas.microsoft.com/office/drawing/2010/main">
-                <a:solidFill>
-                  <a:srgbClr val="FFFFFF"/>
-                </a:solidFill>
-              </a14:hiddenFill>
-            </a:ext>
-          </a:extLst>
-        </p:spPr>
-      </p:pic>
-    </p:spTree>
-    <p:extLst>
-      <p:ext uri="{BB962C8B-B14F-4D97-AF65-F5344CB8AC3E}">
-        <p14:creationId xmlns:p14="http://schemas.microsoft.com/office/powerpoint/2010/main" val="706735111"/>
-      </p:ext>
-    </p:extLst>
-  </p:cSld>
-  <p:clrMapOvr>
-    <a:masterClrMapping/>
-  </p:clrMapOvr>
-</p:sld>
-</file>
-
-<file path=ppt/slides/slide30.xml><?xml version="1.0" encoding="utf-8"?>
+<file path=ppt/slides/slide31.xml><?xml version="1.0" encoding="utf-8"?>
 <p:sld xmlns:a="http://schemas.openxmlformats.org/drawingml/2006/main" xmlns:r="http://schemas.openxmlformats.org/officeDocument/2006/relationships" xmlns:p="http://schemas.openxmlformats.org/presentationml/2006/main">
   <p:cSld>
     <p:spTree>
@@ -18803,6 +17609,223 @@
           <a:p>
             <a:r>
               <a:rPr lang="en-US" b="1" dirty="0"/>
+              <a:t>The Importance of Data Mining</a:t>
+            </a:r>
+            <a:endParaRPr lang="en-US" dirty="0"/>
+          </a:p>
+        </p:txBody>
+      </p:sp>
+      <p:sp>
+        <p:nvSpPr>
+          <p:cNvPr id="3" name="Content Placeholder 2">
+            <a:extLst>
+              <a:ext uri="{FF2B5EF4-FFF2-40B4-BE49-F238E27FC236}">
+                <a16:creationId xmlns:a16="http://schemas.microsoft.com/office/drawing/2014/main" id="{21FF2A87-8E89-4813-8BC6-A1CA52285D72}"/>
+              </a:ext>
+            </a:extLst>
+          </p:cNvPr>
+          <p:cNvSpPr>
+            <a:spLocks noGrp="1"/>
+          </p:cNvSpPr>
+          <p:nvPr>
+            <p:ph idx="1"/>
+          </p:nvPr>
+        </p:nvSpPr>
+        <p:spPr>
+          <a:xfrm>
+            <a:off x="838200" y="1825625"/>
+            <a:ext cx="6709913" cy="4799462"/>
+          </a:xfrm>
+        </p:spPr>
+        <p:txBody>
+          <a:bodyPr>
+            <a:normAutofit lnSpcReduction="10000"/>
+          </a:bodyPr>
+          <a:lstStyle/>
+          <a:p>
+            <a:r>
+              <a:rPr lang="en-US" b="1" dirty="0"/>
+              <a:t>Application Areas:</a:t>
+            </a:r>
+            <a:endParaRPr lang="en-US" dirty="0"/>
+          </a:p>
+          <a:p>
+            <a:pPr lvl="1"/>
+            <a:r>
+              <a:rPr lang="en-US" b="1" dirty="0"/>
+              <a:t>Business:</a:t>
+            </a:r>
+            <a:r>
+              <a:rPr lang="en-US" dirty="0"/>
+              <a:t> Customer segmentation, market basket analysis, fraud detection.</a:t>
+            </a:r>
+          </a:p>
+          <a:p>
+            <a:pPr lvl="1"/>
+            <a:r>
+              <a:rPr lang="en-US" b="1" dirty="0"/>
+              <a:t>Healthcare:</a:t>
+            </a:r>
+            <a:r>
+              <a:rPr lang="en-US" dirty="0"/>
+              <a:t> Disease prediction, patient risk analysis.</a:t>
+            </a:r>
+          </a:p>
+          <a:p>
+            <a:pPr lvl="1"/>
+            <a:r>
+              <a:rPr lang="en-US" b="1" dirty="0"/>
+              <a:t>Finance:</a:t>
+            </a:r>
+            <a:r>
+              <a:rPr lang="en-US" dirty="0"/>
+              <a:t> Credit scoring, stock market analysis.</a:t>
+            </a:r>
+          </a:p>
+          <a:p>
+            <a:pPr lvl="1"/>
+            <a:r>
+              <a:rPr lang="en-US" b="1" dirty="0"/>
+              <a:t>Retail:</a:t>
+            </a:r>
+            <a:r>
+              <a:rPr lang="en-US" dirty="0"/>
+              <a:t> Recommendation systems, inventory forecasting.</a:t>
+            </a:r>
+          </a:p>
+          <a:p>
+            <a:r>
+              <a:rPr lang="en-US" b="1" dirty="0"/>
+              <a:t>Why it Matters:</a:t>
+            </a:r>
+            <a:endParaRPr lang="en-US" dirty="0"/>
+          </a:p>
+          <a:p>
+            <a:pPr lvl="1"/>
+            <a:r>
+              <a:rPr lang="en-US" dirty="0"/>
+              <a:t>Turning raw data into actionable insights.</a:t>
+            </a:r>
+          </a:p>
+          <a:p>
+            <a:pPr lvl="1"/>
+            <a:r>
+              <a:rPr lang="en-US" dirty="0"/>
+              <a:t>Helping organizations make informed decisions.</a:t>
+            </a:r>
+          </a:p>
+          <a:p>
+            <a:pPr lvl="1"/>
+            <a:r>
+              <a:rPr lang="en-US" dirty="0"/>
+              <a:t>Enabling predictive and prescriptive analytics.</a:t>
+            </a:r>
+          </a:p>
+          <a:p>
+            <a:endParaRPr lang="en-US" dirty="0"/>
+          </a:p>
+        </p:txBody>
+      </p:sp>
+      <p:pic>
+        <p:nvPicPr>
+          <p:cNvPr id="2050" name="Picture 2" descr="Data Mining Applications">
+            <a:extLst>
+              <a:ext uri="{FF2B5EF4-FFF2-40B4-BE49-F238E27FC236}">
+                <a16:creationId xmlns:a16="http://schemas.microsoft.com/office/drawing/2014/main" id="{AA68ACC8-5427-41F6-A099-9DE9A9BF7361}"/>
+              </a:ext>
+            </a:extLst>
+          </p:cNvPr>
+          <p:cNvPicPr>
+            <a:picLocks noChangeAspect="1" noChangeArrowheads="1"/>
+          </p:cNvPicPr>
+          <p:nvPr/>
+        </p:nvPicPr>
+        <p:blipFill>
+          <a:blip r:embed="rId2">
+            <a:extLst>
+              <a:ext uri="{28A0092B-C50C-407E-A947-70E740481C1C}">
+                <a14:useLocalDpi xmlns:a14="http://schemas.microsoft.com/office/drawing/2010/main" val="0"/>
+              </a:ext>
+            </a:extLst>
+          </a:blip>
+          <a:srcRect/>
+          <a:stretch>
+            <a:fillRect/>
+          </a:stretch>
+        </p:blipFill>
+        <p:spPr bwMode="auto">
+          <a:xfrm>
+            <a:off x="7719342" y="2205306"/>
+            <a:ext cx="4098468" cy="3814494"/>
+          </a:xfrm>
+          <a:prstGeom prst="rect">
+            <a:avLst/>
+          </a:prstGeom>
+          <a:noFill/>
+          <a:extLst>
+            <a:ext uri="{909E8E84-426E-40DD-AFC4-6F175D3DCCD1}">
+              <a14:hiddenFill xmlns:a14="http://schemas.microsoft.com/office/drawing/2010/main">
+                <a:solidFill>
+                  <a:srgbClr val="FFFFFF"/>
+                </a:solidFill>
+              </a14:hiddenFill>
+            </a:ext>
+          </a:extLst>
+        </p:spPr>
+      </p:pic>
+    </p:spTree>
+    <p:extLst>
+      <p:ext uri="{BB962C8B-B14F-4D97-AF65-F5344CB8AC3E}">
+        <p14:creationId xmlns:p14="http://schemas.microsoft.com/office/powerpoint/2010/main" val="706735111"/>
+      </p:ext>
+    </p:extLst>
+  </p:cSld>
+  <p:clrMapOvr>
+    <a:masterClrMapping/>
+  </p:clrMapOvr>
+</p:sld>
+</file>
+
+<file path=ppt/slides/slide5.xml><?xml version="1.0" encoding="utf-8"?>
+<p:sld xmlns:a="http://schemas.openxmlformats.org/drawingml/2006/main" xmlns:r="http://schemas.openxmlformats.org/officeDocument/2006/relationships" xmlns:p="http://schemas.openxmlformats.org/presentationml/2006/main">
+  <p:cSld>
+    <p:spTree>
+      <p:nvGrpSpPr>
+        <p:cNvPr id="1" name=""/>
+        <p:cNvGrpSpPr/>
+        <p:nvPr/>
+      </p:nvGrpSpPr>
+      <p:grpSpPr>
+        <a:xfrm>
+          <a:off x="0" y="0"/>
+          <a:ext cx="0" cy="0"/>
+          <a:chOff x="0" y="0"/>
+          <a:chExt cx="0" cy="0"/>
+        </a:xfrm>
+      </p:grpSpPr>
+      <p:sp>
+        <p:nvSpPr>
+          <p:cNvPr id="2" name="Title 1">
+            <a:extLst>
+              <a:ext uri="{FF2B5EF4-FFF2-40B4-BE49-F238E27FC236}">
+                <a16:creationId xmlns:a16="http://schemas.microsoft.com/office/drawing/2014/main" id="{9288F61D-F3F3-4CF5-8002-3AC25EDB8819}"/>
+              </a:ext>
+            </a:extLst>
+          </p:cNvPr>
+          <p:cNvSpPr>
+            <a:spLocks noGrp="1"/>
+          </p:cNvSpPr>
+          <p:nvPr>
+            <p:ph type="title"/>
+          </p:nvPr>
+        </p:nvSpPr>
+        <p:spPr/>
+        <p:txBody>
+          <a:bodyPr/>
+          <a:lstStyle/>
+          <a:p>
+            <a:r>
+              <a:rPr lang="en-US" b="1" dirty="0"/>
               <a:t>Types of Data Mining Tasks</a:t>
             </a:r>
             <a:endParaRPr lang="en-US" dirty="0"/>
@@ -18989,7 +18012,7 @@
 </p:sld>
 </file>
 
-<file path=ppt/slides/slide5.xml><?xml version="1.0" encoding="utf-8"?>
+<file path=ppt/slides/slide6.xml><?xml version="1.0" encoding="utf-8"?>
 <p:sld xmlns:a="http://schemas.openxmlformats.org/drawingml/2006/main" xmlns:r="http://schemas.openxmlformats.org/officeDocument/2006/relationships" xmlns:p="http://schemas.openxmlformats.org/presentationml/2006/main">
   <p:cSld>
     <p:spTree>
@@ -19169,7 +18192,7 @@
 </p:sld>
 </file>
 
-<file path=ppt/slides/slide6.xml><?xml version="1.0" encoding="utf-8"?>
+<file path=ppt/slides/slide7.xml><?xml version="1.0" encoding="utf-8"?>
 <p:sld xmlns:a="http://schemas.openxmlformats.org/drawingml/2006/main" xmlns:r="http://schemas.openxmlformats.org/officeDocument/2006/relationships" xmlns:p="http://schemas.openxmlformats.org/presentationml/2006/main">
   <p:cSld>
     <p:spTree>
@@ -19517,7 +18540,7 @@
 </p:sld>
 </file>
 
-<file path=ppt/slides/slide7.xml><?xml version="1.0" encoding="utf-8"?>
+<file path=ppt/slides/slide8.xml><?xml version="1.0" encoding="utf-8"?>
 <p:sld xmlns:a="http://schemas.openxmlformats.org/drawingml/2006/main" xmlns:r="http://schemas.openxmlformats.org/officeDocument/2006/relationships" xmlns:p="http://schemas.openxmlformats.org/presentationml/2006/main">
   <p:cSld>
     <p:spTree>
@@ -19633,241 +18656,6 @@
 </p:sld>
 </file>
 
-<file path=ppt/slides/slide8.xml><?xml version="1.0" encoding="utf-8"?>
-<p:sld xmlns:a="http://schemas.openxmlformats.org/drawingml/2006/main" xmlns:r="http://schemas.openxmlformats.org/officeDocument/2006/relationships" xmlns:p="http://schemas.openxmlformats.org/presentationml/2006/main">
-  <p:cSld>
-    <p:spTree>
-      <p:nvGrpSpPr>
-        <p:cNvPr id="1" name=""/>
-        <p:cNvGrpSpPr/>
-        <p:nvPr/>
-      </p:nvGrpSpPr>
-      <p:grpSpPr>
-        <a:xfrm>
-          <a:off x="0" y="0"/>
-          <a:ext cx="0" cy="0"/>
-          <a:chOff x="0" y="0"/>
-          <a:chExt cx="0" cy="0"/>
-        </a:xfrm>
-      </p:grpSpPr>
-      <p:sp>
-        <p:nvSpPr>
-          <p:cNvPr id="2" name="Title 1">
-            <a:extLst>
-              <a:ext uri="{FF2B5EF4-FFF2-40B4-BE49-F238E27FC236}">
-                <a16:creationId xmlns:a16="http://schemas.microsoft.com/office/drawing/2014/main" id="{9288F61D-F3F3-4CF5-8002-3AC25EDB8819}"/>
-              </a:ext>
-            </a:extLst>
-          </p:cNvPr>
-          <p:cNvSpPr>
-            <a:spLocks noGrp="1"/>
-          </p:cNvSpPr>
-          <p:nvPr>
-            <p:ph type="title"/>
-          </p:nvPr>
-        </p:nvSpPr>
-        <p:spPr/>
-        <p:txBody>
-          <a:bodyPr/>
-          <a:lstStyle/>
-          <a:p>
-            <a:r>
-              <a:rPr lang="en-US" dirty="0"/>
-              <a:t>1. Business understanding:</a:t>
-            </a:r>
-          </a:p>
-        </p:txBody>
-      </p:sp>
-      <p:sp>
-        <p:nvSpPr>
-          <p:cNvPr id="3" name="Content Placeholder 2">
-            <a:extLst>
-              <a:ext uri="{FF2B5EF4-FFF2-40B4-BE49-F238E27FC236}">
-                <a16:creationId xmlns:a16="http://schemas.microsoft.com/office/drawing/2014/main" id="{21FF2A87-8E89-4813-8BC6-A1CA52285D72}"/>
-              </a:ext>
-            </a:extLst>
-          </p:cNvPr>
-          <p:cNvSpPr>
-            <a:spLocks noGrp="1"/>
-          </p:cNvSpPr>
-          <p:nvPr>
-            <p:ph idx="1"/>
-          </p:nvPr>
-        </p:nvSpPr>
-        <p:spPr>
-          <a:xfrm>
-            <a:off x="838199" y="1825625"/>
-            <a:ext cx="8029755" cy="4851220"/>
-          </a:xfrm>
-        </p:spPr>
-        <p:txBody>
-          <a:bodyPr>
-            <a:normAutofit fontScale="77500" lnSpcReduction="20000"/>
-          </a:bodyPr>
-          <a:lstStyle/>
-          <a:p>
-            <a:pPr marL="0" indent="0">
-              <a:buNone/>
-            </a:pPr>
-            <a:r>
-              <a:rPr lang="en-US" dirty="0"/>
-              <a:t>It focuses on </a:t>
-            </a:r>
-            <a:r>
-              <a:rPr lang="en-US" dirty="0">
-                <a:solidFill>
-                  <a:srgbClr val="FF0000"/>
-                </a:solidFill>
-              </a:rPr>
-              <a:t>understanding the project goals and requirements </a:t>
-            </a:r>
-            <a:r>
-              <a:rPr lang="en-US" dirty="0"/>
-              <a:t>form a business point of view, then converting this information into a data mining problem afterward a preliminary plan designed to accomplish the target.</a:t>
-            </a:r>
-          </a:p>
-          <a:p>
-            <a:pPr marL="0" indent="0">
-              <a:buNone/>
-            </a:pPr>
-            <a:r>
-              <a:rPr lang="en-US" b="1" dirty="0"/>
-              <a:t>Tasks:</a:t>
-            </a:r>
-            <a:endParaRPr lang="en-US" dirty="0"/>
-          </a:p>
-          <a:p>
-            <a:r>
-              <a:rPr lang="en-US" dirty="0"/>
-              <a:t>Determine business objectives</a:t>
-            </a:r>
-          </a:p>
-          <a:p>
-            <a:r>
-              <a:rPr lang="en-US" dirty="0"/>
-              <a:t>Access situation</a:t>
-            </a:r>
-          </a:p>
-          <a:p>
-            <a:r>
-              <a:rPr lang="en-US" dirty="0"/>
-              <a:t>Determine data mining goals</a:t>
-            </a:r>
-          </a:p>
-          <a:p>
-            <a:r>
-              <a:rPr lang="en-US" dirty="0"/>
-              <a:t>Produce a project plan</a:t>
-            </a:r>
-          </a:p>
-          <a:p>
-            <a:pPr marL="0" indent="0">
-              <a:buNone/>
-            </a:pPr>
-            <a:r>
-              <a:rPr lang="en-US" b="1" dirty="0"/>
-              <a:t>Determine business objectives:</a:t>
-            </a:r>
-            <a:endParaRPr lang="en-US" dirty="0"/>
-          </a:p>
-          <a:p>
-            <a:r>
-              <a:rPr lang="en-US" dirty="0"/>
-              <a:t>It understands the project targets and prerequisites from a business point of view.</a:t>
-            </a:r>
-          </a:p>
-          <a:p>
-            <a:r>
-              <a:rPr lang="en-US" dirty="0">
-                <a:solidFill>
-                  <a:srgbClr val="FF0000"/>
-                </a:solidFill>
-              </a:rPr>
-              <a:t>Thoroughly understand </a:t>
-            </a:r>
-            <a:r>
-              <a:rPr lang="en-US" dirty="0"/>
-              <a:t>what the customer wants to achieve.</a:t>
-            </a:r>
-          </a:p>
-          <a:p>
-            <a:r>
-              <a:rPr lang="en-US" dirty="0"/>
-              <a:t>Reveal </a:t>
-            </a:r>
-            <a:r>
-              <a:rPr lang="en-US" dirty="0">
-                <a:solidFill>
-                  <a:srgbClr val="FF0000"/>
-                </a:solidFill>
-              </a:rPr>
-              <a:t>significant factors</a:t>
-            </a:r>
-            <a:r>
-              <a:rPr lang="en-US" dirty="0"/>
-              <a:t>, at the starting, it can </a:t>
-            </a:r>
-            <a:r>
-              <a:rPr lang="en-US" dirty="0">
-                <a:solidFill>
-                  <a:srgbClr val="FF0000"/>
-                </a:solidFill>
-              </a:rPr>
-              <a:t>impact</a:t>
-            </a:r>
-            <a:r>
-              <a:rPr lang="en-US" dirty="0"/>
-              <a:t> the result of the project.</a:t>
-            </a:r>
-          </a:p>
-          <a:p>
-            <a:endParaRPr lang="en-US" dirty="0"/>
-          </a:p>
-        </p:txBody>
-      </p:sp>
-      <p:pic>
-        <p:nvPicPr>
-          <p:cNvPr id="4" name="Picture 3">
-            <a:extLst>
-              <a:ext uri="{FF2B5EF4-FFF2-40B4-BE49-F238E27FC236}">
-                <a16:creationId xmlns:a16="http://schemas.microsoft.com/office/drawing/2014/main" id="{5F6629B2-E2E7-4132-BFCF-F6A78C0F1430}"/>
-              </a:ext>
-            </a:extLst>
-          </p:cNvPr>
-          <p:cNvPicPr>
-            <a:picLocks noChangeAspect="1"/>
-          </p:cNvPicPr>
-          <p:nvPr/>
-        </p:nvPicPr>
-        <p:blipFill>
-          <a:blip r:embed="rId2"/>
-          <a:stretch>
-            <a:fillRect/>
-          </a:stretch>
-        </p:blipFill>
-        <p:spPr>
-          <a:xfrm>
-            <a:off x="10237670" y="1825625"/>
-            <a:ext cx="1037629" cy="4339176"/>
-          </a:xfrm>
-          <a:prstGeom prst="rect">
-            <a:avLst/>
-          </a:prstGeom>
-        </p:spPr>
-      </p:pic>
-    </p:spTree>
-    <p:extLst>
-      <p:ext uri="{BB962C8B-B14F-4D97-AF65-F5344CB8AC3E}">
-        <p14:creationId xmlns:p14="http://schemas.microsoft.com/office/powerpoint/2010/main" val="4074862586"/>
-      </p:ext>
-    </p:extLst>
-  </p:cSld>
-  <p:clrMapOvr>
-    <a:masterClrMapping/>
-  </p:clrMapOvr>
-</p:sld>
-</file>
-
 <file path=ppt/slides/slide9.xml><?xml version="1.0" encoding="utf-8"?>
 <p:sld xmlns:a="http://schemas.openxmlformats.org/drawingml/2006/main" xmlns:r="http://schemas.openxmlformats.org/officeDocument/2006/relationships" xmlns:p="http://schemas.openxmlformats.org/presentationml/2006/main">
   <p:cSld>
@@ -19932,7 +18720,7 @@
         <p:spPr>
           <a:xfrm>
             <a:off x="838199" y="1825625"/>
-            <a:ext cx="9142563" cy="4851220"/>
+            <a:ext cx="8029755" cy="4851220"/>
           </a:xfrm>
         </p:spPr>
         <p:txBody>
@@ -19945,31 +18733,8 @@
               <a:buNone/>
             </a:pPr>
             <a:r>
-              <a:rPr lang="en-US" b="1" dirty="0"/>
-              <a:t>Access situation:</a:t>
-            </a:r>
-            <a:endParaRPr lang="en-US" dirty="0"/>
-          </a:p>
-          <a:p>
-            <a:r>
               <a:rPr lang="en-US" dirty="0"/>
-              <a:t>It requires a more detailed analysis of facts about all the resources, constraints, assumptions, and others that ought to be considered.</a:t>
-            </a:r>
-          </a:p>
-          <a:p>
-            <a:pPr marL="0" indent="0">
-              <a:buNone/>
-            </a:pPr>
-            <a:r>
-              <a:rPr lang="en-US" b="1" dirty="0"/>
-              <a:t>Determine data mining goals:</a:t>
-            </a:r>
-            <a:endParaRPr lang="en-US" dirty="0"/>
-          </a:p>
-          <a:p>
-            <a:r>
-              <a:rPr lang="en-US" dirty="0"/>
-              <a:t>A business goal states the target of the business terminology. </a:t>
+              <a:t>It focuses on </a:t>
             </a:r>
             <a:r>
               <a:rPr lang="en-US" dirty="0">
@@ -19977,17 +18742,11 @@
                   <a:srgbClr val="FF0000"/>
                 </a:solidFill>
               </a:rPr>
-              <a:t>For example, increase catalog sales to the existing customer</a:t>
+              <a:t>understanding the project goals and requirements </a:t>
             </a:r>
             <a:r>
               <a:rPr lang="en-US" dirty="0"/>
-              <a:t>.</a:t>
-            </a:r>
-          </a:p>
-          <a:p>
-            <a:r>
-              <a:rPr lang="en-US" dirty="0"/>
-              <a:t>A data mining goal describes the project objectives. For example, It assumes how many objects a customer will buy, given their demographics details (Age, Salary, and City) and the price of the item over the past three years.</a:t>
+              <a:t>form a business point of view, then converting this information into a data mining problem afterward a preliminary plan designed to accomplish the target.</a:t>
             </a:r>
           </a:p>
           <a:p>
@@ -19996,20 +18755,92 @@
             </a:pPr>
             <a:r>
               <a:rPr lang="en-US" b="1" dirty="0"/>
-              <a:t>Produce a project plan:</a:t>
+              <a:t>Tasks:</a:t>
             </a:r>
             <a:endParaRPr lang="en-US" dirty="0"/>
           </a:p>
           <a:p>
             <a:r>
               <a:rPr lang="en-US" dirty="0"/>
-              <a:t>It states the targeted plan to accomplish the business and data mining plan.</a:t>
+              <a:t>Determine business objectives</a:t>
             </a:r>
           </a:p>
           <a:p>
             <a:r>
               <a:rPr lang="en-US" dirty="0"/>
-              <a:t>The project plan should define the expected set of steps to be performed during the rest of the project, including the latest technique and better selection of tools.</a:t>
+              <a:t>Access situation</a:t>
+            </a:r>
+          </a:p>
+          <a:p>
+            <a:r>
+              <a:rPr lang="en-US" dirty="0"/>
+              <a:t>Determine data mining goals</a:t>
+            </a:r>
+          </a:p>
+          <a:p>
+            <a:r>
+              <a:rPr lang="en-US" dirty="0"/>
+              <a:t>Produce a project plan</a:t>
+            </a:r>
+          </a:p>
+          <a:p>
+            <a:pPr marL="0" indent="0">
+              <a:buNone/>
+            </a:pPr>
+            <a:r>
+              <a:rPr lang="en-US" b="1" dirty="0"/>
+              <a:t>Determine business objectives:</a:t>
+            </a:r>
+            <a:endParaRPr lang="en-US" dirty="0"/>
+          </a:p>
+          <a:p>
+            <a:r>
+              <a:rPr lang="en-US" dirty="0"/>
+              <a:t>It understands the project targets and prerequisites from a business point of view.</a:t>
+            </a:r>
+          </a:p>
+          <a:p>
+            <a:r>
+              <a:rPr lang="en-US" dirty="0">
+                <a:solidFill>
+                  <a:srgbClr val="FF0000"/>
+                </a:solidFill>
+              </a:rPr>
+              <a:t>Thoroughly understand </a:t>
+            </a:r>
+            <a:r>
+              <a:rPr lang="en-US" dirty="0"/>
+              <a:t>what the customer wants to achieve.</a:t>
+            </a:r>
+          </a:p>
+          <a:p>
+            <a:r>
+              <a:rPr lang="en-US" dirty="0"/>
+              <a:t>Reveal </a:t>
+            </a:r>
+            <a:r>
+              <a:rPr lang="en-US" dirty="0">
+                <a:solidFill>
+                  <a:srgbClr val="FF0000"/>
+                </a:solidFill>
+              </a:rPr>
+              <a:t>significant factors</a:t>
+            </a:r>
+            <a:r>
+              <a:rPr lang="en-US" dirty="0"/>
+              <a:t>, at the starting, it can </a:t>
+            </a:r>
+            <a:r>
+              <a:rPr lang="en-US" dirty="0">
+                <a:solidFill>
+                  <a:srgbClr val="FF0000"/>
+                </a:solidFill>
+              </a:rPr>
+              <a:t>impact</a:t>
+            </a:r>
+            <a:r>
+              <a:rPr lang="en-US" dirty="0"/>
+              <a:t> the result of the project.</a:t>
             </a:r>
           </a:p>
           <a:p>
@@ -20022,7 +18853,7 @@
           <p:cNvPr id="4" name="Picture 3">
             <a:extLst>
               <a:ext uri="{FF2B5EF4-FFF2-40B4-BE49-F238E27FC236}">
-                <a16:creationId xmlns:a16="http://schemas.microsoft.com/office/drawing/2014/main" id="{E78F6ABA-AFCC-4712-A573-B2C8A9E1504B}"/>
+                <a16:creationId xmlns:a16="http://schemas.microsoft.com/office/drawing/2014/main" id="{5F6629B2-E2E7-4132-BFCF-F6A78C0F1430}"/>
               </a:ext>
             </a:extLst>
           </p:cNvPr>
@@ -20050,7 +18881,7 @@
     </p:spTree>
     <p:extLst>
       <p:ext uri="{BB962C8B-B14F-4D97-AF65-F5344CB8AC3E}">
-        <p14:creationId xmlns:p14="http://schemas.microsoft.com/office/powerpoint/2010/main" val="4051642265"/>
+        <p14:creationId xmlns:p14="http://schemas.microsoft.com/office/powerpoint/2010/main" val="4074862586"/>
       </p:ext>
     </p:extLst>
   </p:cSld>
@@ -20356,6 +19187,15 @@
 </file>
 
 <file path=customXml/item1.xml><?xml version="1.0" encoding="utf-8"?>
+<?mso-contentType ?>
+<FormTemplates xmlns="http://schemas.microsoft.com/sharepoint/v3/contenttype/forms">
+  <Display>DocumentLibraryForm</Display>
+  <Edit>DocumentLibraryForm</Edit>
+  <New>DocumentLibraryForm</New>
+</FormTemplates>
+</file>
+
+<file path=customXml/item2.xml><?xml version="1.0" encoding="utf-8"?>
 <ct:contentTypeSchema xmlns:ct="http://schemas.microsoft.com/office/2006/metadata/contentType" xmlns:ma="http://schemas.microsoft.com/office/2006/metadata/properties/metaAttributes" ct:_="" ma:_="" ma:contentTypeName="Document" ma:contentTypeID="0x010100D30DB0B4DCD4994BA0B53B90F48248FB" ma:contentTypeVersion="17" ma:contentTypeDescription="Create a new document." ma:contentTypeScope="" ma:versionID="89b596077de0219f935a6ab711f2d0ee">
   <xsd:schema xmlns:xsd="http://www.w3.org/2001/XMLSchema" xmlns:xs="http://www.w3.org/2001/XMLSchema" xmlns:p="http://schemas.microsoft.com/office/2006/metadata/properties" xmlns:ns3="5d9e8ea6-d7cf-4c00-b931-0c0027af1451" xmlns:ns4="24b8453d-154c-4c63-97d1-80f7846f6991" targetNamespace="http://schemas.microsoft.com/office/2006/metadata/properties" ma:root="true" ma:fieldsID="cd616adf96839ca32a36dfb6e4534def" ns3:_="" ns4:_="">
     <xsd:import namespace="5d9e8ea6-d7cf-4c00-b931-0c0027af1451"/>
@@ -20602,15 +19442,6 @@
 </ct:contentTypeSchema>
 </file>
 
-<file path=customXml/item2.xml><?xml version="1.0" encoding="utf-8"?>
-<?mso-contentType ?>
-<FormTemplates xmlns="http://schemas.microsoft.com/sharepoint/v3/contenttype/forms">
-  <Display>DocumentLibraryForm</Display>
-  <Edit>DocumentLibraryForm</Edit>
-  <New>DocumentLibraryForm</New>
-</FormTemplates>
-</file>
-
 <file path=customXml/item3.xml><?xml version="1.0" encoding="utf-8"?>
 <p:properties xmlns:p="http://schemas.microsoft.com/office/2006/metadata/properties" xmlns:xsi="http://www.w3.org/2001/XMLSchema-instance" xmlns:pc="http://schemas.microsoft.com/office/infopath/2007/PartnerControls">
   <documentManagement>
@@ -20620,6 +19451,14 @@
 </file>
 
 <file path=customXml/itemProps1.xml><?xml version="1.0" encoding="utf-8"?>
+<ds:datastoreItem xmlns:ds="http://schemas.openxmlformats.org/officeDocument/2006/customXml" ds:itemID="{45A00539-F935-4DAE-994B-29A86868AB4E}">
+  <ds:schemaRefs>
+    <ds:schemaRef ds:uri="http://schemas.microsoft.com/sharepoint/v3/contenttype/forms"/>
+  </ds:schemaRefs>
+</ds:datastoreItem>
+</file>
+
+<file path=customXml/itemProps2.xml><?xml version="1.0" encoding="utf-8"?>
 <ds:datastoreItem xmlns:ds="http://schemas.openxmlformats.org/officeDocument/2006/customXml" ds:itemID="{E49744A2-A4E7-4F10-8EA8-A7278CF8AA73}">
   <ds:schemaRefs>
     <ds:schemaRef ds:uri="http://schemas.microsoft.com/office/2006/metadata/contentType"/>
@@ -20634,14 +19473,6 @@
     <ds:schemaRef ds:uri="http://purl.org/dc/elements/1.1/"/>
     <ds:schemaRef ds:uri="http://purl.org/dc/terms/"/>
     <ds:schemaRef ds:uri="http://schemas.microsoft.com/internal/obd"/>
-  </ds:schemaRefs>
-</ds:datastoreItem>
-</file>
-
-<file path=customXml/itemProps2.xml><?xml version="1.0" encoding="utf-8"?>
-<ds:datastoreItem xmlns:ds="http://schemas.openxmlformats.org/officeDocument/2006/customXml" ds:itemID="{45A00539-F935-4DAE-994B-29A86868AB4E}">
-  <ds:schemaRefs>
-    <ds:schemaRef ds:uri="http://schemas.microsoft.com/sharepoint/v3/contenttype/forms"/>
   </ds:schemaRefs>
 </ds:datastoreItem>
 </file>
